--- a/slides/pptx/week15.pptx
+++ b/slides/pptx/week15.pptx
@@ -28,9 +28,10 @@
     <p:sldId id="276" r:id="rId22"/>
     <p:sldId id="277" r:id="rId23"/>
     <p:sldId id="278" r:id="rId24"/>
+    <p:sldId id="279" r:id="rId25"/>
   </p:sldIdLst>
   <p:notesMasterIdLst>
-    <p:notesMasterId r:id="rId25"/>
+    <p:notesMasterId r:id="rId26"/>
   </p:notesMasterIdLst>
   <p:sldSz cx="9144000" cy="5143500"/>
   <p:notesSz cx="5143500" cy="9144000"/>
@@ -524,7 +525,7 @@
           <a:p>
             <a:r>
               <a:rPr lang="en-US" dirty="0"/>
-              <a:t>Final teaching week. Hook: everything we've learned — SAST, SCA, secrets, image scans — only works if it runs automatically on every commit. Today we wire it into one pipeline that blocks bad code. ~2 min.</a:t>
+              <a:t>Final teaching week. Hook: everything we've learned — SAST, SCA, secrets, image scans — only works if it runs automatically on every commit. Today we wire it into one pipeline that turns every bad PR red — and, once those checks are required, blocks the merge. ~2 min.</a:t>
             </a:r>
             <a:endParaRPr lang="en-US" dirty="0"/>
           </a:p>
@@ -612,7 +613,7 @@
           <a:p>
             <a:r>
               <a:rPr lang="en-US" dirty="0"/>
-              <a:t>Ties back to W2 triage. The danger asymmetry: a false negative = an attack you never saw. But too many false positives → alert fatigue → analysts mute everything → effective false negatives. The skill is TUNING. ~4 min.</a:t>
+              <a:t>Awareness of the defender's toolkit. NIDS watches the wire, HIDS watches the host, SIEM correlates everything. TAP vs SPAN is a practical gotcha: SPAN ports drop packets under load — you miss attacks. Keep brisk. ~3 min.</a:t>
             </a:r>
             <a:endParaRPr lang="en-US" dirty="0"/>
           </a:p>
@@ -700,7 +701,7 @@
           <a:p>
             <a:r>
               <a:rPr lang="en-US" dirty="0"/>
-              <a:t>A taste of incident response / forensics. Order of volatility: capture RAM before you pull the plug — it's gone on shutdown. 4625 (failed) / 4624 (success) are the login events they'd grep in a real investigation. ~4 min.</a:t>
+              <a:t>Ties back to W2 triage. The danger asymmetry: a false negative = an attack you never saw. But too many false positives → alert fatigue → analysts mute everything → effective false negatives. The skill is TUNING. ~4 min.</a:t>
             </a:r>
             <a:endParaRPr lang="en-US" dirty="0"/>
           </a:p>
@@ -788,7 +789,7 @@
           <a:p>
             <a:r>
               <a:rPr lang="en-US" dirty="0"/>
-              <a:t>A design principle that recurs: when something breaks, DENY (fail closed), don't accidentally grant access (fail open). Verbose errors leak schema/secrets (recall W4 error-based enumeration). ~3 min.</a:t>
+              <a:t>A taste of incident response / forensics. Order of volatility: capture RAM before you pull the plug — it's gone on shutdown. 4625 (failed) / 4624 (success) are the login events they'd grep in a real investigation. ~4 min.</a:t>
             </a:r>
             <a:endParaRPr lang="en-US" dirty="0"/>
           </a:p>
@@ -876,7 +877,7 @@
           <a:p>
             <a:r>
               <a:rPr lang="en-US" dirty="0"/>
-              <a:t>The professional/ethical close: finding a bug is step one; managing it to a fix (with SLAs) is the job. Coordinated disclosure + security.txt = how to receive reports responsibly. Connects to the course ethics theme. ~3 min.</a:t>
+              <a:t>A design principle that recurs: when something breaks, DENY (fail closed), don't accidentally grant access (fail open). Verbose errors leak schema/secrets (recall W4 error-based enumeration). ~3 min.</a:t>
             </a:r>
             <a:endParaRPr lang="en-US" dirty="0"/>
           </a:p>
@@ -964,8 +965,7 @@
           <a:p>
             <a:r>
               <a:rPr lang="en-US" dirty="0"/>
-              <a:t>The synthesis slide, and arguably the whole course's closing argument: "secure by default" means someone has to have DECIDED the default, twice here — once in YAML severity filters, once in an except block. An unexamined default is always permissive. Walk both panels, land on the bottom line before the game. ~5 min.
-Diagram: Two panels showing the same yes-or-no decision at two different times. Build time: the CI gate's HIGH/CRITICAL severity filter, not the scanner itself, decides what a build refuses — root user (DS-0002, HIGH) is caught, :latest (DS-0001, MEDIUM) slips past the filter. Run time: the /admin handler makes the identical decision on an exception — fail-open returns 200 and logs nothing (silent bypass, A09); fail-closed returns 403 and logs event=authz_failure without ever logging the token itself (CWE-532). Both defaults, unexamined, are yes: the gate exits 0 on anything it wasn't told to fail on, the handler returns 200 on anything that threw. Nobody chose — that silence is A10, CWE-636.</a:t>
+              <a:t>The professional/ethical close: finding a bug is step one; managing it to a fix (with SLAs) is the job. Coordinated disclosure + security.txt = how to receive reports responsibly. Connects to the course ethics theme. ~3 min.</a:t>
             </a:r>
             <a:endParaRPr lang="en-US" dirty="0"/>
           </a:p>
@@ -1053,7 +1053,8 @@
           <a:p>
             <a:r>
               <a:rPr lang="en-US" dirty="0"/>
-              <a:t>Interactive companion to the diagram above; every response and log line was captured from the real :8090/:8091 containers. Click "no token" (8090 leaks, 8091 logs a WARNING), then "user, not admin" (both deny: the bug lives only on the error path), then "real admin" (both unlock). ~3 min.</a:t>
+              <a:t>The synthesis slide, and arguably the whole course's closing argument: "secure by default" means someone has to have DECIDED the default, twice here — once in YAML severity filters, once in an except block. Keep the two apart: a severity threshold is a policy someone can defend (or not), while an except branch that grants access on error is a bug (A10, CWE-636). Walk both panels, land on the bottom line before the game. ~5 min.
+Diagram: Two panels showing the same yes-or-no decision at two different times. Build time: the CI gate's HIGH/CRITICAL severity filter, not the scanner itself, decides what a build refuses — root user (DS-0002, HIGH) is caught, :latest (DS-0001, MEDIUM) slips past the filter. Run time: the /admin handler makes the identical decision on an exception — fail-open returns 200 and logs nothing (silent bypass, A09); fail-closed returns 403 and logs event=authz_failure without ever logging the token itself (CWE-532). At build time, letting MEDIUM through is a risk decision — fine if someone made it on purpose, a gap if nobody looked. At run time, the except branch that returns 200 is the actual fail-open bug: A10, CWE-636.</a:t>
             </a:r>
             <a:endParaRPr lang="en-US" dirty="0"/>
           </a:p>
@@ -1141,7 +1142,7 @@
           <a:p>
             <a:r>
               <a:rPr lang="en-US" dirty="0"/>
-              <a:t>The capstone game. Both roles teach: Blue learns to configure gates, Red learns where gates have blind spots — but Red's menu is fixed to 3 attacks that actually map to a gate, not open-ended. Run it as live PRs against the pipeline. The weekly quiz no longer asks for the gate/what-it-blocks/flag (dropped — quiz runs before the lab) — that's required in the worksheet instead, don't drop the flag half there, it's still graded. ~3 min.</a:t>
+              <a:t>Interactive companion to the diagram above; every response and log line was captured from the real :8090/:8091 containers. Click "no token" (8090 leaks, 8091 logs a WARNING), then "user, not admin" (both deny: the bug lives only on the error path), then "real admin" (both unlock). ~3 min.</a:t>
             </a:r>
             <a:endParaRPr lang="en-US" dirty="0"/>
           </a:p>
@@ -1229,8 +1230,7 @@
           <a:p>
             <a:r>
               <a:rPr lang="en-US" dirty="0"/>
-              <a:t>The rules of the game on one board. Top rows = Task 3 (Blue must clear these first or every Red PR is already red); dashed cells = cross-hits, one defect turning two jobs red. ~2 min.
-Diagram: The Break the Build game board, measured by running security-ci.yml's own gate commands on the real lab files. Columns: Semgrep gate, Trivy SCA gate, Trivy IaC gate, Gitleaks gate. Blue's baseline is red before Red does anything: unpinned @v4/@v3 action tags and host="0.0.0.0" trip Semgrep, and the docs' own curl examples with the toy alice-token header trip Gitleaks' curl-auth-header (a false positive). Red's attacks, one per PR on Blue's green baseline: urllib3==1.24.1 trips only Trivy SCA (7 HIGH, e.g. CVE-2019-11324). A Dockerfile running as root trips Trivy IaC (DS-0002 HIGH) and also Semgrep (missing-user or last-user-is-root). A ghp_ GitHub token trips Gitleaks (github-pat) and also Trivy SCA, whose secret scanner rates it CRITICAL. Decoys stay green: chmod 777 has no rule, and FROM python:latest is DS-0001 MEDIUM, which the gate filters out.</a:t>
+              <a:t>The capstone game. Both roles teach: Blue learns to configure gates, Red learns where gates have blind spots. Task 4 (the graded screenshot) needs a defect that maps to a gate; anything that slips through instead is a Task 5 Red point, exactly as the worksheet scores it. Run it as live PRs against the pipeline. The weekly quiz no longer asks for the gate/what-it-blocks/flag (dropped — quiz runs before the lab) — that's required in the worksheet instead, don't drop the flag half there, it's still graded. ~3 min.</a:t>
             </a:r>
             <a:endParaRPr lang="en-US" dirty="0"/>
           </a:p>
@@ -1318,7 +1318,8 @@
           <a:p>
             <a:r>
               <a:rPr lang="en-US" dirty="0"/>
-              <a:t>Click "untouched lab" first: Semgrep + Gitleaks are red before Red does anything. Then "Blue's clean baseline", then each Red preset. End on "two defects in one PR": the IaC gate shows skipped, which is why the worksheet says one defect per PR. ~3 min.</a:t>
+              <a:t>The rules of the game on one board. Top rows = Task 3 (Blue must clear these first or every Red PR is already red); dashed cells = cross-hits, one defect turning two jobs red. ~2 min.
+Diagram: The Break the Build game board, measured by running security-ci.yml's own gate commands on the real lab files. Columns: Semgrep gate, Trivy SCA gate, Trivy IaC gate, Gitleaks gate. Blue's baseline is red before Red does anything: unpinned @v4/@v3 action tags and host="0.0.0.0" trip Semgrep, and the docs' own curl examples with the toy alice-token header trip Gitleaks' curl-auth-header (a false positive). Red's attacks, one per PR on Blue's green baseline: urllib3==1.24.1 trips only Trivy SCA (7 HIGH, e.g. CVE-2019-11324). A Dockerfile running as root trips Trivy IaC (DS-0002 HIGH) and also Semgrep (missing-user or last-user-is-root). A ghp_ GitHub token trips Gitleaks (github-pat) and also Trivy SCA, whose secret scanner rates it CRITICAL. Decoys stay green: chmod 777 has no rule, and FROM python:latest is DS-0001 MEDIUM, which the gate filters out.</a:t>
             </a:r>
             <a:endParaRPr lang="en-US" dirty="0"/>
           </a:p>
@@ -1406,8 +1407,7 @@
           <a:p>
             <a:r>
               <a:rPr lang="en-US" dirty="0"/>
-              <a:t>The lab briefing for path (a), in the order students do it: ① compose up, ② same request to both ports, ③ docker compose logs, ④ alice-token still works. ~2 min.
-Diagram: Task 1b at a glance. From the lab folder, docker compose up starts two containers from the same python:3.12-slim image, both mounting the lab folder: insecure_service.py on localhost:8090 and secure_service.py on localhost:8091. Send both the same GET /admin with no token. :8090 answers 200 with the panel and the FLAG, because the USERS dictionary lookup raises KeyError and the except branch grants access; its log shows only a 200 access line. :8091 answers 403 forbidden and logs a WARNING on the security logger (event=authz_failure outcome=deny reason=unauthenticated). Then prove the fix keeps admins in: alice-token still unlocks :8091, and the auto-grader checks both. Submit the flag, both responses and the failing-open except line; a local run returns the public demo flag, the graded one comes from your hosted instance.</a:t>
+              <a:t>Click "untouched lab" first: Semgrep + Gitleaks are red before Red does anything. Then "Blue's clean baseline", then each Red preset. End on "two defects in one PR": the IaC gate shows skipped, which is why the worksheet says one defect per PR. ~3 min.</a:t>
             </a:r>
             <a:endParaRPr lang="en-US" dirty="0"/>
           </a:p>
@@ -1583,7 +1583,8 @@
           <a:p>
             <a:r>
               <a:rPr lang="en-US" dirty="0"/>
-              <a:t>Two separate targets this week, both graded: security-ci.yml is the CI gate; insecure_service.py/secure_service.py (compose, :8090/:8091) is where the local (public demo) flag lives; graded per-student flags come from the hosted instance. The "build failing" screenshots are the proof the gate actually blocks — a green pipeline that never fails is useless, and one category alone undersells the deliverable. AI-resilient tasks count. This is also the last weekly quiz.</a:t>
+              <a:t>The lab briefing for path (a), in the order students do it: ① compose up, ② same request to both ports, ③ docker compose logs, ④ alice-token still works. ~2 min.
+Diagram: Task 1b at a glance. From the lab folder, docker compose up starts two containers from the same python:3.12-slim image, both mounting the lab folder: insecure_service.py on localhost:8090 and secure_service.py on localhost:8091. Send both the same GET /admin with no token. :8090 answers 200 with the panel and the FLAG, because the USERS dictionary lookup raises KeyError and the except branch grants access; its log shows only a 200 access line. :8091 answers 403 forbidden and logs a WARNING on the security logger (event=authz_failure outcome=deny reason=unauthenticated). Then prove the fix keeps admins in: alice-token still unlocks :8091, and the auto-grader checks both. Submit the flag, both responses and the failing-open except line; a local run returns the public demo flag, the graded one comes from your hosted instance.</a:t>
             </a:r>
             <a:endParaRPr lang="en-US" dirty="0"/>
           </a:p>
@@ -1671,7 +1672,7 @@
           <a:p>
             <a:r>
               <a:rPr lang="en-US" dirty="0"/>
-              <a:t>Two separate targets this week, both graded: security-ci.yml is the CI gate; insecure_service.py/secure_service.py (compose, :8090/:8091) is where the local (public demo) flag lives; graded per-student flags come from the hosted instance. The "build failing" screenshots are the proof the gate actually blocks — a green pipeline that never fails is useless, and one category alone undersells the deliverable. AI-resilient tasks count. This is also the last weekly quiz.</a:t>
+              <a:t>Two separate targets this week, both graded: security-ci.yml is the CI gate; insecure_service.py/secure_service.py (compose, :8090/:8091) is where the local (public demo) flag lives; graded per-student flags come from the hosted instance. The "build failing" screenshot is the proof the gate actually says no — a green pipeline that never fails is useless. The worksheet grades one planted defect (Task 4); encourage all three if time allows. AI-resilient tasks count. This is also the last weekly quiz.</a:t>
             </a:r>
             <a:endParaRPr lang="en-US" dirty="0"/>
           </a:p>
@@ -1759,7 +1760,7 @@
           <a:p>
             <a:r>
               <a:rPr lang="en-US" dirty="0"/>
-              <a:t>Recap + course wrap of the technical units. Cold-call: "why must the gate FAIL the build, not just warn?" (warnings get ignored). ~2 min.</a:t>
+              <a:t>Two separate targets this week, both graded: security-ci.yml is the CI gate; insecure_service.py/secure_service.py (compose, :8090/:8091) is where the local (public demo) flag lives; graded per-student flags come from the hosted instance. The "build failing" screenshot is the proof the gate actually says no — a green pipeline that never fails is useless. The worksheet grades one planted defect (Task 4); encourage all three if time allows. AI-resilient tasks count. This is also the last weekly quiz.</a:t>
             </a:r>
             <a:endParaRPr lang="en-US" dirty="0"/>
           </a:p>
@@ -1847,7 +1848,7 @@
           <a:p>
             <a:r>
               <a:rPr lang="en-US" dirty="0"/>
-              <a:t>Wrap: "Teaching is done — next is your capstone: ship something secure, then defend it in the final CTF. Bring your project to the studio."</a:t>
+              <a:t>Recap + course wrap of the technical units. Cold-call: "why must the gate FAIL the build, not just warn?" (warnings get ignored). ~2 min.</a:t>
             </a:r>
             <a:endParaRPr lang="en-US" dirty="0"/>
           </a:p>
@@ -1871,6 +1872,94 @@
             <a:fld id="{F7021451-1387-4CA6-816F-3879F97B5CBC}" type="slidenum">
               <a:rPr lang="en-US"/>
               <a:t>23</a:t>
+            </a:fld>
+            <a:endParaRPr lang="en-US"/>
+          </a:p>
+        </p:txBody>
+      </p:sp>
+    </p:spTree>
+    <p:extLst>
+      <p:ext uri="{BB962C8B-B14F-4D97-AF65-F5344CB8AC3E}">
+        <p14:creationId xmlns:p14="http://schemas.microsoft.com/office/powerpoint/2010/main" val="1024086991"/>
+      </p:ext>
+    </p:extLst>
+  </p:cSld>
+  <p:clrMapOvr>
+    <a:masterClrMapping/>
+  </p:clrMapOvr>
+</p:notes>
+</file>
+
+<file path=ppt/notesSlides/notesSlide24.xml><?xml version="1.0" encoding="utf-8"?>
+<p:notes xmlns:a="http://schemas.openxmlformats.org/drawingml/2006/main" xmlns:r="http://schemas.openxmlformats.org/officeDocument/2006/relationships" xmlns:p="http://schemas.openxmlformats.org/presentationml/2006/main">
+  <p:cSld>
+    <p:spTree>
+      <p:nvGrpSpPr>
+        <p:cNvPr id="1" name=""/>
+        <p:cNvGrpSpPr/>
+        <p:nvPr/>
+      </p:nvGrpSpPr>
+      <p:grpSpPr>
+        <a:xfrm>
+          <a:off x="0" y="0"/>
+          <a:ext cx="0" cy="0"/>
+          <a:chOff x="0" y="0"/>
+          <a:chExt cx="0" cy="0"/>
+        </a:xfrm>
+      </p:grpSpPr>
+      <p:sp>
+        <p:nvSpPr>
+          <p:cNvPr id="2" name="Slide Image Placeholder 1"/>
+          <p:cNvSpPr>
+            <a:spLocks noGrp="1" noRot="1" noChangeAspect="1"/>
+          </p:cNvSpPr>
+          <p:nvPr>
+            <p:ph type="sldImg"/>
+          </p:nvPr>
+        </p:nvSpPr>
+        <p:spPr/>
+      </p:sp>
+      <p:sp>
+        <p:nvSpPr>
+          <p:cNvPr id="3" name="Notes Placeholder 2"/>
+          <p:cNvSpPr>
+            <a:spLocks noGrp="1"/>
+          </p:cNvSpPr>
+          <p:nvPr>
+            <p:ph type="body" idx="1"/>
+          </p:nvPr>
+        </p:nvSpPr>
+        <p:spPr/>
+        <p:txBody>
+          <a:bodyPr/>
+          <a:lstStyle/>
+          <a:p>
+            <a:r>
+              <a:rPr lang="en-US" dirty="0"/>
+              <a:t>Wrap: "Teaching is done — next is your capstone: ship something secure, then defend it in the final CTF. Bring your project to the studio."</a:t>
+            </a:r>
+            <a:endParaRPr lang="en-US" dirty="0"/>
+          </a:p>
+        </p:txBody>
+      </p:sp>
+      <p:sp>
+        <p:nvSpPr>
+          <p:cNvPr id="4" name="Slide Number Placeholder 3"/>
+          <p:cNvSpPr>
+            <a:spLocks noGrp="1"/>
+          </p:cNvSpPr>
+          <p:nvPr>
+            <p:ph type="sldNum" sz="quarter" idx="10"/>
+          </p:nvPr>
+        </p:nvSpPr>
+        <p:spPr/>
+        <p:txBody>
+          <a:bodyPr/>
+          <a:lstStyle/>
+          <a:p>
+            <a:fld id="{F7021451-1387-4CA6-816F-3879F97B5CBC}" type="slidenum">
+              <a:rPr lang="en-US"/>
+              <a:t>24</a:t>
             </a:fld>
             <a:endParaRPr lang="en-US"/>
           </a:p>
@@ -1935,7 +2024,8 @@
           <a:p>
             <a:r>
               <a:rPr lang="en-US" dirty="0"/>
-              <a:t>The synthesis slide — walk back through the term: every tool we used by hand now runs automatically on every PR. Manual scanning doesn't scale and humans forget; pipelines don't. ~4 min.</a:t>
+              <a:t>The story spine one last time: W13's image and IAM mistakes and W14's injection and XSS are exactly what this pipeline is built to catch on every push. The synthesis slide — walk back through the term: every tool we used by hand now runs automatically on every PR. Manual scanning doesn't scale and humans forget; pipelines don't. ~4 min.
+Diagram: One app, three layers. You are here: W15. W13, where it runs: a secret baked into an image layer and an IAM policy with Action * on Resource *; fix with a hardened image and least privilege. W14, what it says: the app gets a chatbot; typed text overrides its rules (prompt injection) and its reply goes into the page unescaped (XSS); fix with guardrails, secret redaction and output escaping. W15, how it ships: Semgrep, Trivy and Gitleaks check every push, a red gate fails the PR, and the app denies on error.</a:t>
             </a:r>
             <a:endParaRPr lang="en-US" dirty="0"/>
           </a:p>
@@ -2023,8 +2113,8 @@
           <a:p>
             <a:r>
               <a:rPr lang="en-US" dirty="0"/>
-              <a:t>Walk it left to right before the YAML: ① report never fails, ② upload always runs, ③ only the gate can turn the build red — that's Part 2 Q1 in one picture. Point at the footnote: the Security tab shows MEDIUM findings like DS-0001 that the gate lets through. ~2 min.
-Diagram: The security-ci.yml pipeline at a glance. A push or PR to main starts three jobs in parallel: Semgrep (SAST), Trivy (SCA plus IaC) and Gitleaks (secrets, whole git history). Each job runs the same three phases. The report step never fails (|| true or exit-code "0"). The upload step (if: always()) sends the SARIF to the GitHub Security tab, where every finding of every severity shows. The gate step re-scans and can fail the build. Semgrep's --error and Gitleaks' --exit-code 1 fail on any finding. Trivy's two gates fail only on HIGH or CRITICAL, and the IaC gate is skipped if the SCA gate already failed. The report shows everything; the gate decides.</a:t>
+              <a:t>The story spine one last time: W13's image and IAM mistakes and W14's injection and XSS are exactly what this pipeline is built to catch on every push. The synthesis slide — walk back through the term: every tool we used by hand now runs automatically on every PR. Manual scanning doesn't scale and humans forget; pipelines don't. ~4 min.
+Diagram: One app, three layers. You are here: W15. W13, where it runs: a secret baked into an image layer and an IAM policy with Action * on Resource *; fix with a hardened image and least privilege. W14, what it says: the app gets a chatbot; typed text overrides its rules (prompt injection) and its reply goes into the page unescaped (XSS); fix with guardrails, secret redaction and output escaping. W15, how it ships: Semgrep, Trivy and Gitleaks check every push, a red gate fails the PR, and the app denies on error.</a:t>
             </a:r>
             <a:endParaRPr lang="en-US" dirty="0"/>
           </a:p>
@@ -2112,7 +2202,8 @@
           <a:p>
             <a:r>
               <a:rPr lang="en-US" dirty="0"/>
-              <a:t>The worked example — this is the lab's actual pipeline. Be precise: Trivy's active jobs are fs (SCA) and config (IaC) — the image-scan step exists in the YAML but is commented out/optional, don't claim it's active. The "runs twice" pattern (report step + separate gate step) is what Part 2 Q1 is built around — say it explicitly. The sim's 2 decoys are the actual worksheet nuance: chmod 777 has no Trivy rule at any severity, while FROM:latest IS detected (DS-0001) but rated MEDIUM and filtered by severity:HIGH,CRITICAL — same green build, different reason. The KEY line is "fail build on HIGH/CRITICAL": a gate that only warns gets ignored. ~6 min.</a:t>
+              <a:t>Walk it left to right before the YAML: ① report never fails, ② upload always runs, ③ the gate is the step meant to turn the build red — that's Part 2 Q1 in one picture. (An upload can still fail on its own, e.g. a private repo without code scanning — that's why the lab uses a public throwaway repo.) Point at the footnote: the Security tab shows MEDIUM findings like DS-0001 that the gate lets through. ~2 min.
+Diagram: The security-ci.yml pipeline at a glance. A push or PR to main starts three jobs in parallel: Semgrep (SAST), Trivy (SCA plus IaC) and Gitleaks (secrets, whole git history). Each job runs the same three phases. The report step never fails (|| true or exit-code "0"). The upload step (if: always()) sends the SARIF to the GitHub Security tab, where every finding of every severity shows. The gate step re-scans and can fail the build. Semgrep's --error and Gitleaks' --exit-code 1 fail on any finding. Trivy's two gates fail only on HIGH or CRITICAL, and the IaC gate is skipped if the SCA gate already failed. The report shows everything; the gate decides.</a:t>
             </a:r>
             <a:endParaRPr lang="en-US" dirty="0"/>
           </a:p>
@@ -2288,7 +2379,7 @@
           <a:p>
             <a:r>
               <a:rPr lang="en-US" dirty="0"/>
-              <a:t>The managed equivalent they'll meet in industry. Same concept, less YAML to maintain. Mention SonarQube as the common quality-gate they'll see in internships. ~3 min.</a:t>
+              <a:t>The worked example — this is the lab's actual pipeline. Be precise: Trivy's active jobs are fs (SCA) and config (IaC) — the image-scan step exists in the YAML but is commented out/optional, don't claim it's active. The "runs twice" pattern (report step + separate gate step) is what Part 2 Q1 is built around — say it explicitly. The sim's 2 decoys are the actual worksheet nuance: chmod 777 has no Trivy rule at any severity, while FROM:latest IS detected (DS-0001) but rated MEDIUM and filtered by severity:HIGH,CRITICAL — same green build, different reason. The KEY line is "fail build on HIGH/CRITICAL": a gate that only warns gets ignored. ~6 min.</a:t>
             </a:r>
             <a:endParaRPr lang="en-US" dirty="0"/>
           </a:p>
@@ -2376,7 +2467,7 @@
           <a:p>
             <a:r>
               <a:rPr lang="en-US" dirty="0"/>
-              <a:t>Shift from prevention to detection. A09 (logging/monitoring failures) is a Top 10 risk because you can't respond to what you can't see. The CWE-532 point is graded (Part 2 Q4) and easy to skip if you only say "log security events" — a log line that captures the bad token has just created a new secrets-in-logs problem. Recall W6: we read attacker actions FROM logs — but only if they were logged. ~4 min.</a:t>
+              <a:t>The managed equivalent they'll meet in industry. Same concept, less YAML to maintain. Mention SonarQube as the common quality-gate they'll see in internships. ~3 min.</a:t>
             </a:r>
             <a:endParaRPr lang="en-US" dirty="0"/>
           </a:p>
@@ -2464,7 +2555,7 @@
           <a:p>
             <a:r>
               <a:rPr lang="en-US" dirty="0"/>
-              <a:t>Awareness of the defender's toolkit. NIDS watches the wire, HIDS watches the host, SIEM correlates everything. TAP vs SPAN is a practical gotcha: SPAN ports drop packets under load — you miss attacks. Keep brisk. ~3 min.</a:t>
+              <a:t>Shift from prevention to detection. A09 (logging/monitoring failures) is a Top 10 risk because you can't respond to what you can't see. The CWE-532 point is graded (Part 2 Q4) and easy to skip if you only say "log security events" — a log line that captures the bad token has just created a new secrets-in-logs problem. Recall W6: we read attacker actions FROM logs — but only if they were logged. ~4 min.</a:t>
             </a:r>
             <a:endParaRPr lang="en-US" dirty="0"/>
           </a:p>
@@ -2839,7 +2930,7 @@
       </p:grpSpPr>
       <p:pic>
         <p:nvPicPr>
-          <p:cNvPr id="2" name="Image 0" descr="/private/tmp/claude-501/-Users-pop7-Library-CloudStorage-OneDrive-MonsterConnectCo--Ltd-Lecture-KOSEN69---software-security/f63a82af-e1ad-40ed-89c4-03c6ca776e3f/scratchpad/vis-w15/slides/pptx/assets/logo-small.png">    </p:cNvPr>
+          <p:cNvPr id="2" name="Image 0" descr="/private/tmp/claude-501/-Users-pop7-Library-CloudStorage-OneDrive-MonsterConnectCo--Ltd-Lecture-KOSEN69---software-security/f63a82af-e1ad-40ed-89c4-03c6ca776e3f/scratchpad/lq-anim/slides/pptx/assets/logo-small.png">    </p:cNvPr>
           <p:cNvPicPr>
             <a:picLocks noChangeAspect="1"/>
           </p:cNvPicPr>
@@ -3097,6 +3188,328 @@
                 <a:ea typeface="Arial" pitchFamily="34" charset="-122"/>
                 <a:cs typeface="Arial" pitchFamily="34" charset="-120"/>
               </a:rPr>
+              <a:t>Detection tooling</a:t>
+            </a:r>
+            <a:endParaRPr lang="en-US" sz="2600" dirty="0"/>
+          </a:p>
+        </p:txBody>
+      </p:sp>
+      <p:sp>
+        <p:nvSpPr>
+          <p:cNvPr id="5" name="Shape 2"/>
+          <p:cNvSpPr/>
+          <p:nvPr/>
+        </p:nvSpPr>
+        <p:spPr>
+          <a:xfrm>
+            <a:off x="457200" y="1325880"/>
+            <a:ext cx="8229600" cy="1517904"/>
+          </a:xfrm>
+          <a:prstGeom prst="roundRect">
+            <a:avLst>
+              <a:gd name="adj" fmla="val 4819"/>
+            </a:avLst>
+          </a:prstGeom>
+          <a:solidFill>
+            <a:srgbClr val="F1F5F9"/>
+          </a:solidFill>
+          <a:ln/>
+          <a:effectLst>
+            <a:outerShdw sx="100000" sy="100000" kx="0" ky="0" algn="bl" rotWithShape="0" blurRad="76200" dist="25400" dir="5400000">
+              <a:srgbClr val="000000">
+                <a:alpha val="12000"/>
+              </a:srgbClr>
+            </a:outerShdw>
+          </a:effectLst>
+        </p:spPr>
+      </p:sp>
+      <p:sp>
+        <p:nvSpPr>
+          <p:cNvPr id="6" name="Text 3"/>
+          <p:cNvSpPr/>
+          <p:nvPr/>
+        </p:nvSpPr>
+        <p:spPr>
+          <a:xfrm>
+            <a:off x="731520" y="1435608"/>
+            <a:ext cx="7680960" cy="1298448"/>
+          </a:xfrm>
+          <a:prstGeom prst="rect">
+            <a:avLst/>
+          </a:prstGeom>
+          <a:noFill/>
+          <a:ln/>
+        </p:spPr>
+        <p:txBody>
+          <a:bodyPr wrap="square" lIns="0" tIns="0" rIns="0" bIns="0" rtlCol="0" anchor="t">
+            <a:normAutofit/>
+          </a:bodyPr>
+          <a:lstStyle/>
+          <a:p>
+            <a:pPr marL="342900" indent="-342900">
+              <a:spcAft>
+                <a:spcPts val="600"/>
+              </a:spcAft>
+              <a:buSzPct val="100000"/>
+              <a:buChar char="•"/>
+            </a:pPr>
+            <a:r>
+              <a:rPr lang="en-US" sz="1400" dirty="0">
+                <a:solidFill>
+                  <a:srgbClr val="1F2937"/>
+                </a:solidFill>
+                <a:latin typeface="Calibri" pitchFamily="34" charset="0"/>
+                <a:ea typeface="Calibri" pitchFamily="34" charset="-122"/>
+                <a:cs typeface="Calibri" pitchFamily="34" charset="-120"/>
+              </a:rPr>
+              <a:t>NIDS — Snort / Suricata (network signatures)</a:t>
+            </a:r>
+            <a:endParaRPr lang="en-US" sz="1400" dirty="0"/>
+          </a:p>
+          <a:p>
+            <a:pPr marL="342900" indent="-342900">
+              <a:spcAft>
+                <a:spcPts val="600"/>
+              </a:spcAft>
+              <a:buSzPct val="100000"/>
+              <a:buChar char="•"/>
+            </a:pPr>
+            <a:r>
+              <a:rPr lang="en-US" sz="1400" dirty="0">
+                <a:solidFill>
+                  <a:srgbClr val="1F2937"/>
+                </a:solidFill>
+                <a:latin typeface="Calibri" pitchFamily="34" charset="0"/>
+                <a:ea typeface="Calibri" pitchFamily="34" charset="-122"/>
+                <a:cs typeface="Calibri" pitchFamily="34" charset="-120"/>
+              </a:rPr>
+              <a:t>HIDS — OSSEC (host-based)</a:t>
+            </a:r>
+            <a:endParaRPr lang="en-US" sz="1400" dirty="0"/>
+          </a:p>
+          <a:p>
+            <a:pPr marL="342900" indent="-342900">
+              <a:spcAft>
+                <a:spcPts val="600"/>
+              </a:spcAft>
+              <a:buSzPct val="100000"/>
+              <a:buChar char="•"/>
+            </a:pPr>
+            <a:r>
+              <a:rPr lang="en-US" sz="1400" dirty="0">
+                <a:solidFill>
+                  <a:srgbClr val="1F2937"/>
+                </a:solidFill>
+                <a:latin typeface="Calibri" pitchFamily="34" charset="0"/>
+                <a:ea typeface="Calibri" pitchFamily="34" charset="-122"/>
+                <a:cs typeface="Calibri" pitchFamily="34" charset="-120"/>
+              </a:rPr>
+              <a:t>SIEM / stack — Security Onion bundles them + analysis</a:t>
+            </a:r>
+            <a:endParaRPr lang="en-US" sz="1400" dirty="0"/>
+          </a:p>
+          <a:p>
+            <a:pPr marL="342900" indent="-342900">
+              <a:spcAft>
+                <a:spcPts val="600"/>
+              </a:spcAft>
+              <a:buSzPct val="100000"/>
+              <a:buChar char="•"/>
+            </a:pPr>
+            <a:r>
+              <a:rPr lang="en-US" sz="1400" dirty="0">
+                <a:solidFill>
+                  <a:srgbClr val="1F2937"/>
+                </a:solidFill>
+                <a:latin typeface="Calibri" pitchFamily="34" charset="0"/>
+                <a:ea typeface="Calibri" pitchFamily="34" charset="-122"/>
+                <a:cs typeface="Calibri" pitchFamily="34" charset="-120"/>
+              </a:rPr>
+              <a:t>Network visibility: TAP (lossless) vs SPAN (cheap, can drop)</a:t>
+            </a:r>
+            <a:endParaRPr lang="en-US" sz="1400" dirty="0"/>
+          </a:p>
+        </p:txBody>
+      </p:sp>
+      <p:sp>
+        <p:nvSpPr>
+          <p:cNvPr id="7" name="Text 4"/>
+          <p:cNvSpPr/>
+          <p:nvPr/>
+        </p:nvSpPr>
+        <p:spPr>
+          <a:xfrm>
+            <a:off x="457200" y="4800600"/>
+            <a:ext cx="6949440" cy="274320"/>
+          </a:xfrm>
+          <a:prstGeom prst="rect">
+            <a:avLst/>
+          </a:prstGeom>
+          <a:noFill/>
+          <a:ln/>
+        </p:spPr>
+        <p:txBody>
+          <a:bodyPr wrap="square" lIns="0" tIns="0" rIns="0" bIns="0" rtlCol="0" anchor="ctr"/>
+          <a:lstStyle/>
+          <a:p>
+            <a:pPr indent="0" marL="0">
+              <a:buNone/>
+            </a:pPr>
+            <a:r>
+              <a:rPr lang="en-US" sz="900" dirty="0">
+                <a:solidFill>
+                  <a:srgbClr val="64748B"/>
+                </a:solidFill>
+                <a:latin typeface="Calibri" pitchFamily="34" charset="0"/>
+                <a:ea typeface="Calibri" pitchFamily="34" charset="-122"/>
+                <a:cs typeface="Calibri" pitchFamily="34" charset="-120"/>
+              </a:rPr>
+              <a:t>Software Security · Week 15</a:t>
+            </a:r>
+            <a:endParaRPr lang="en-US" sz="900" dirty="0"/>
+          </a:p>
+        </p:txBody>
+      </p:sp>
+      <p:pic>
+        <p:nvPicPr>
+          <p:cNvPr id="8" name="Image 1" descr="/private/tmp/claude-501/-Users-pop7-Library-CloudStorage-OneDrive-MonsterConnectCo--Ltd-Lecture-KOSEN69---software-security/f63a82af-e1ad-40ed-89c4-03c6ca776e3f/scratchpad/lq-anim/slides/pptx/assets/logo-small.png">    </p:cNvPr>
+          <p:cNvPicPr>
+            <a:picLocks noChangeAspect="1"/>
+          </p:cNvPicPr>
+          <p:nvPr/>
+        </p:nvPicPr>
+        <p:blipFill>
+          <a:blip r:embed="rId2"/>
+          <a:stretch>
+            <a:fillRect/>
+          </a:stretch>
+        </p:blipFill>
+        <p:spPr>
+          <a:xfrm>
+            <a:off x="7882128" y="4700016"/>
+            <a:ext cx="768096" cy="356616"/>
+          </a:xfrm>
+          <a:prstGeom prst="rect">
+            <a:avLst/>
+          </a:prstGeom>
+        </p:spPr>
+      </p:pic>
+    </p:spTree>
+  </p:cSld>
+  <p:clrMapOvr>
+    <a:masterClrMapping/>
+  </p:clrMapOvr>
+</p:sld>
+</file>
+
+<file path=ppt/slides/slide11.xml><?xml version="1.0" encoding="utf-8"?>
+<p:sld xmlns:a="http://schemas.openxmlformats.org/drawingml/2006/main" xmlns:r="http://schemas.openxmlformats.org/officeDocument/2006/relationships" xmlns:p="http://schemas.openxmlformats.org/presentationml/2006/main">
+  <p:cSld name="Slide 11">
+    <p:bg>
+      <p:bgPr>
+        <a:solidFill>
+          <a:srgbClr val="FFFFFF"/>
+        </a:solidFill>
+      </p:bgPr>
+    </p:bg>
+    <p:spTree>
+      <p:nvGrpSpPr>
+        <p:cNvPr id="1" name=""/>
+        <p:cNvGrpSpPr/>
+        <p:nvPr/>
+      </p:nvGrpSpPr>
+      <p:grpSpPr>
+        <a:xfrm>
+          <a:off x="0" y="0"/>
+          <a:ext cx="0" cy="0"/>
+          <a:chOff x="0" y="0"/>
+          <a:chExt cx="0" cy="0"/>
+        </a:xfrm>
+      </p:grpSpPr>
+      <p:sp>
+        <p:nvSpPr>
+          <p:cNvPr id="2" name="Shape 0"/>
+          <p:cNvSpPr/>
+          <p:nvPr/>
+        </p:nvSpPr>
+        <p:spPr>
+          <a:xfrm>
+            <a:off x="457200" y="384048"/>
+            <a:ext cx="530352" cy="530352"/>
+          </a:xfrm>
+          <a:prstGeom prst="ellipse">
+            <a:avLst/>
+          </a:prstGeom>
+          <a:solidFill>
+            <a:srgbClr val="E35205"/>
+          </a:solidFill>
+          <a:ln/>
+          <a:effectLst>
+            <a:outerShdw sx="100000" sy="100000" kx="0" ky="0" algn="bl" rotWithShape="0" blurRad="76200" dist="25400" dir="5400000">
+              <a:srgbClr val="000000">
+                <a:alpha val="12000"/>
+              </a:srgbClr>
+            </a:outerShdw>
+          </a:effectLst>
+        </p:spPr>
+      </p:sp>
+      <p:pic>
+        <p:nvPicPr>
+          <p:cNvPr id="3" name="Image 0" descr="preencoded.png">    </p:cNvPr>
+          <p:cNvPicPr>
+            <a:picLocks noChangeAspect="1"/>
+          </p:cNvPicPr>
+          <p:nvPr/>
+        </p:nvPicPr>
+        <p:blipFill>
+          <a:blip r:embed="rId1"/>
+          <a:stretch>
+            <a:fillRect/>
+          </a:stretch>
+        </p:blipFill>
+        <p:spPr>
+          <a:xfrm>
+            <a:off x="594360" y="521208"/>
+            <a:ext cx="256032" cy="256032"/>
+          </a:xfrm>
+          <a:prstGeom prst="rect">
+            <a:avLst/>
+          </a:prstGeom>
+        </p:spPr>
+      </p:pic>
+      <p:sp>
+        <p:nvSpPr>
+          <p:cNvPr id="4" name="Text 1"/>
+          <p:cNvSpPr/>
+          <p:nvPr/>
+        </p:nvSpPr>
+        <p:spPr>
+          <a:xfrm>
+            <a:off x="1143000" y="329184"/>
+            <a:ext cx="7498080" cy="603504"/>
+          </a:xfrm>
+          <a:prstGeom prst="rect">
+            <a:avLst/>
+          </a:prstGeom>
+          <a:noFill/>
+          <a:ln/>
+        </p:spPr>
+        <p:txBody>
+          <a:bodyPr wrap="square" lIns="0" tIns="0" rIns="0" bIns="0" rtlCol="0" anchor="ctr"/>
+          <a:lstStyle/>
+          <a:p>
+            <a:pPr indent="0" marL="0">
+              <a:buNone/>
+            </a:pPr>
+            <a:r>
+              <a:rPr lang="en-US" sz="2600" b="1" dirty="0">
+                <a:solidFill>
+                  <a:srgbClr val="1F2937"/>
+                </a:solidFill>
+                <a:latin typeface="Arial" pitchFamily="34" charset="0"/>
+                <a:ea typeface="Arial" pitchFamily="34" charset="-122"/>
+                <a:cs typeface="Arial" pitchFamily="34" charset="-120"/>
+              </a:rPr>
               <a:t>Alerts — the confusion matrix</a:t>
             </a:r>
             <a:endParaRPr lang="en-US" sz="2600" dirty="0"/>
@@ -3105,7 +3518,7 @@
       </p:sp>
       <p:graphicFrame>
         <p:nvGraphicFramePr>
-          <p:cNvPr id="11" name="Table 0"/>
+          <p:cNvPr id="12" name="Table 0"/>
           <p:cNvGraphicFramePr>
             <a:graphicFrameLocks noGrp="1"/>
           </p:cNvGraphicFramePr>
@@ -3817,328 +4230,7 @@
       </p:sp>
       <p:pic>
         <p:nvPicPr>
-          <p:cNvPr id="9" name="Image 1" descr="/private/tmp/claude-501/-Users-pop7-Library-CloudStorage-OneDrive-MonsterConnectCo--Ltd-Lecture-KOSEN69---software-security/f63a82af-e1ad-40ed-89c4-03c6ca776e3f/scratchpad/vis-w15/slides/pptx/assets/logo-small.png">    </p:cNvPr>
-          <p:cNvPicPr>
-            <a:picLocks noChangeAspect="1"/>
-          </p:cNvPicPr>
-          <p:nvPr/>
-        </p:nvPicPr>
-        <p:blipFill>
-          <a:blip r:embed="rId2"/>
-          <a:stretch>
-            <a:fillRect/>
-          </a:stretch>
-        </p:blipFill>
-        <p:spPr>
-          <a:xfrm>
-            <a:off x="7882128" y="4700016"/>
-            <a:ext cx="768096" cy="356616"/>
-          </a:xfrm>
-          <a:prstGeom prst="rect">
-            <a:avLst/>
-          </a:prstGeom>
-        </p:spPr>
-      </p:pic>
-    </p:spTree>
-  </p:cSld>
-  <p:clrMapOvr>
-    <a:masterClrMapping/>
-  </p:clrMapOvr>
-</p:sld>
-</file>
-
-<file path=ppt/slides/slide11.xml><?xml version="1.0" encoding="utf-8"?>
-<p:sld xmlns:a="http://schemas.openxmlformats.org/drawingml/2006/main" xmlns:r="http://schemas.openxmlformats.org/officeDocument/2006/relationships" xmlns:p="http://schemas.openxmlformats.org/presentationml/2006/main">
-  <p:cSld name="Slide 11">
-    <p:bg>
-      <p:bgPr>
-        <a:solidFill>
-          <a:srgbClr val="FFFFFF"/>
-        </a:solidFill>
-      </p:bgPr>
-    </p:bg>
-    <p:spTree>
-      <p:nvGrpSpPr>
-        <p:cNvPr id="1" name=""/>
-        <p:cNvGrpSpPr/>
-        <p:nvPr/>
-      </p:nvGrpSpPr>
-      <p:grpSpPr>
-        <a:xfrm>
-          <a:off x="0" y="0"/>
-          <a:ext cx="0" cy="0"/>
-          <a:chOff x="0" y="0"/>
-          <a:chExt cx="0" cy="0"/>
-        </a:xfrm>
-      </p:grpSpPr>
-      <p:sp>
-        <p:nvSpPr>
-          <p:cNvPr id="2" name="Shape 0"/>
-          <p:cNvSpPr/>
-          <p:nvPr/>
-        </p:nvSpPr>
-        <p:spPr>
-          <a:xfrm>
-            <a:off x="457200" y="384048"/>
-            <a:ext cx="530352" cy="530352"/>
-          </a:xfrm>
-          <a:prstGeom prst="ellipse">
-            <a:avLst/>
-          </a:prstGeom>
-          <a:solidFill>
-            <a:srgbClr val="E35205"/>
-          </a:solidFill>
-          <a:ln/>
-          <a:effectLst>
-            <a:outerShdw sx="100000" sy="100000" kx="0" ky="0" algn="bl" rotWithShape="0" blurRad="76200" dist="25400" dir="5400000">
-              <a:srgbClr val="000000">
-                <a:alpha val="12000"/>
-              </a:srgbClr>
-            </a:outerShdw>
-          </a:effectLst>
-        </p:spPr>
-      </p:sp>
-      <p:pic>
-        <p:nvPicPr>
-          <p:cNvPr id="3" name="Image 0" descr="preencoded.png">    </p:cNvPr>
-          <p:cNvPicPr>
-            <a:picLocks noChangeAspect="1"/>
-          </p:cNvPicPr>
-          <p:nvPr/>
-        </p:nvPicPr>
-        <p:blipFill>
-          <a:blip r:embed="rId1"/>
-          <a:stretch>
-            <a:fillRect/>
-          </a:stretch>
-        </p:blipFill>
-        <p:spPr>
-          <a:xfrm>
-            <a:off x="594360" y="521208"/>
-            <a:ext cx="256032" cy="256032"/>
-          </a:xfrm>
-          <a:prstGeom prst="rect">
-            <a:avLst/>
-          </a:prstGeom>
-        </p:spPr>
-      </p:pic>
-      <p:sp>
-        <p:nvSpPr>
-          <p:cNvPr id="4" name="Text 1"/>
-          <p:cNvSpPr/>
-          <p:nvPr/>
-        </p:nvSpPr>
-        <p:spPr>
-          <a:xfrm>
-            <a:off x="1143000" y="329184"/>
-            <a:ext cx="7498080" cy="603504"/>
-          </a:xfrm>
-          <a:prstGeom prst="rect">
-            <a:avLst/>
-          </a:prstGeom>
-          <a:noFill/>
-          <a:ln/>
-        </p:spPr>
-        <p:txBody>
-          <a:bodyPr wrap="square" lIns="0" tIns="0" rIns="0" bIns="0" rtlCol="0" anchor="ctr"/>
-          <a:lstStyle/>
-          <a:p>
-            <a:pPr indent="0" marL="0">
-              <a:buNone/>
-            </a:pPr>
-            <a:r>
-              <a:rPr lang="en-US" sz="2600" b="1" dirty="0">
-                <a:solidFill>
-                  <a:srgbClr val="1F2937"/>
-                </a:solidFill>
-                <a:latin typeface="Arial" pitchFamily="34" charset="0"/>
-                <a:ea typeface="Arial" pitchFamily="34" charset="-122"/>
-                <a:cs typeface="Arial" pitchFamily="34" charset="-120"/>
-              </a:rPr>
-              <a:t>When something happens (NIST SP 800-86)</a:t>
-            </a:r>
-            <a:endParaRPr lang="en-US" sz="2600" dirty="0"/>
-          </a:p>
-        </p:txBody>
-      </p:sp>
-      <p:sp>
-        <p:nvSpPr>
-          <p:cNvPr id="5" name="Text 2"/>
-          <p:cNvSpPr/>
-          <p:nvPr/>
-        </p:nvSpPr>
-        <p:spPr>
-          <a:xfrm>
-            <a:off x="548640" y="1325880"/>
-            <a:ext cx="8046720" cy="548640"/>
-          </a:xfrm>
-          <a:prstGeom prst="rect">
-            <a:avLst/>
-          </a:prstGeom>
-          <a:noFill/>
-          <a:ln/>
-        </p:spPr>
-        <p:txBody>
-          <a:bodyPr wrap="square" lIns="0" tIns="0" rIns="0" bIns="0" rtlCol="0" anchor="t">
-            <a:normAutofit/>
-          </a:bodyPr>
-          <a:lstStyle/>
-          <a:p>
-            <a:pPr indent="0" marL="0">
-              <a:buNone/>
-            </a:pPr>
-            <a:r>
-              <a:rPr lang="en-US" sz="1400" dirty="0">
-                <a:solidFill>
-                  <a:srgbClr val="1F2937"/>
-                </a:solidFill>
-                <a:latin typeface="Calibri" pitchFamily="34" charset="0"/>
-                <a:ea typeface="Calibri" pitchFamily="34" charset="-122"/>
-                <a:cs typeface="Calibri" pitchFamily="34" charset="-120"/>
-              </a:rPr>
-              <a:t>Collection → Examination → Analysis → Reporting</a:t>
-            </a:r>
-            <a:endParaRPr lang="en-US" sz="1400" dirty="0"/>
-          </a:p>
-        </p:txBody>
-      </p:sp>
-      <p:sp>
-        <p:nvSpPr>
-          <p:cNvPr id="6" name="Shape 3"/>
-          <p:cNvSpPr/>
-          <p:nvPr/>
-        </p:nvSpPr>
-        <p:spPr>
-          <a:xfrm>
-            <a:off x="457200" y="1965960"/>
-            <a:ext cx="8229600" cy="896112"/>
-          </a:xfrm>
-          <a:prstGeom prst="roundRect">
-            <a:avLst>
-              <a:gd name="adj" fmla="val 8163"/>
-            </a:avLst>
-          </a:prstGeom>
-          <a:solidFill>
-            <a:srgbClr val="F1F5F9"/>
-          </a:solidFill>
-          <a:ln/>
-          <a:effectLst>
-            <a:outerShdw sx="100000" sy="100000" kx="0" ky="0" algn="bl" rotWithShape="0" blurRad="76200" dist="25400" dir="5400000">
-              <a:srgbClr val="000000">
-                <a:alpha val="12000"/>
-              </a:srgbClr>
-            </a:outerShdw>
-          </a:effectLst>
-        </p:spPr>
-      </p:sp>
-      <p:sp>
-        <p:nvSpPr>
-          <p:cNvPr id="7" name="Text 4"/>
-          <p:cNvSpPr/>
-          <p:nvPr/>
-        </p:nvSpPr>
-        <p:spPr>
-          <a:xfrm>
-            <a:off x="731520" y="2075688"/>
-            <a:ext cx="7680960" cy="676656"/>
-          </a:xfrm>
-          <a:prstGeom prst="rect">
-            <a:avLst/>
-          </a:prstGeom>
-          <a:noFill/>
-          <a:ln/>
-        </p:spPr>
-        <p:txBody>
-          <a:bodyPr wrap="square" lIns="0" tIns="0" rIns="0" bIns="0" rtlCol="0" anchor="t">
-            <a:normAutofit/>
-          </a:bodyPr>
-          <a:lstStyle/>
-          <a:p>
-            <a:pPr marL="342900" indent="-342900">
-              <a:spcAft>
-                <a:spcPts val="600"/>
-              </a:spcAft>
-              <a:buSzPct val="100000"/>
-              <a:buChar char="•"/>
-            </a:pPr>
-            <a:r>
-              <a:rPr lang="en-US" sz="1400" dirty="0">
-                <a:solidFill>
-                  <a:srgbClr val="1F2937"/>
-                </a:solidFill>
-                <a:latin typeface="Calibri" pitchFamily="34" charset="0"/>
-                <a:ea typeface="Calibri" pitchFamily="34" charset="-122"/>
-                <a:cs typeface="Calibri" pitchFamily="34" charset="-120"/>
-              </a:rPr>
-              <a:t>Preserve order of volatility: memory → temp files → disk → logs</a:t>
-            </a:r>
-            <a:endParaRPr lang="en-US" sz="1400" dirty="0"/>
-          </a:p>
-          <a:p>
-            <a:pPr marL="342900" indent="-342900">
-              <a:spcAft>
-                <a:spcPts val="600"/>
-              </a:spcAft>
-              <a:buSzPct val="100000"/>
-              <a:buChar char="•"/>
-            </a:pPr>
-            <a:r>
-              <a:rPr lang="en-US" sz="1400" dirty="0">
-                <a:solidFill>
-                  <a:srgbClr val="1F2937"/>
-                </a:solidFill>
-                <a:latin typeface="Calibri" pitchFamily="34" charset="0"/>
-                <a:ea typeface="Calibri" pitchFamily="34" charset="-122"/>
-                <a:cs typeface="Calibri" pitchFamily="34" charset="-120"/>
-              </a:rPr>
-              <a:t>Failed/success logins: Windows Event 4625 / 4624</a:t>
-            </a:r>
-            <a:endParaRPr lang="en-US" sz="1400" dirty="0"/>
-          </a:p>
-        </p:txBody>
-      </p:sp>
-      <p:sp>
-        <p:nvSpPr>
-          <p:cNvPr id="8" name="Text 5"/>
-          <p:cNvSpPr/>
-          <p:nvPr/>
-        </p:nvSpPr>
-        <p:spPr>
-          <a:xfrm>
-            <a:off x="457200" y="4800600"/>
-            <a:ext cx="6949440" cy="274320"/>
-          </a:xfrm>
-          <a:prstGeom prst="rect">
-            <a:avLst/>
-          </a:prstGeom>
-          <a:noFill/>
-          <a:ln/>
-        </p:spPr>
-        <p:txBody>
-          <a:bodyPr wrap="square" lIns="0" tIns="0" rIns="0" bIns="0" rtlCol="0" anchor="ctr"/>
-          <a:lstStyle/>
-          <a:p>
-            <a:pPr indent="0" marL="0">
-              <a:buNone/>
-            </a:pPr>
-            <a:r>
-              <a:rPr lang="en-US" sz="900" dirty="0">
-                <a:solidFill>
-                  <a:srgbClr val="64748B"/>
-                </a:solidFill>
-                <a:latin typeface="Calibri" pitchFamily="34" charset="0"/>
-                <a:ea typeface="Calibri" pitchFamily="34" charset="-122"/>
-                <a:cs typeface="Calibri" pitchFamily="34" charset="-120"/>
-              </a:rPr>
-              <a:t>Software Security · Week 15</a:t>
-            </a:r>
-            <a:endParaRPr lang="en-US" sz="900" dirty="0"/>
-          </a:p>
-        </p:txBody>
-      </p:sp>
-      <p:pic>
-        <p:nvPicPr>
-          <p:cNvPr id="9" name="Image 1" descr="/private/tmp/claude-501/-Users-pop7-Library-CloudStorage-OneDrive-MonsterConnectCo--Ltd-Lecture-KOSEN69---software-security/f63a82af-e1ad-40ed-89c4-03c6ca776e3f/scratchpad/vis-w15/slides/pptx/assets/logo-small.png">    </p:cNvPr>
+          <p:cNvPr id="9" name="Image 1" descr="/private/tmp/claude-501/-Users-pop7-Library-CloudStorage-OneDrive-MonsterConnectCo--Ltd-Lecture-KOSEN69---software-security/f63a82af-e1ad-40ed-89c4-03c6ca776e3f/scratchpad/lq-anim/slides/pptx/assets/logo-small.png">    </p:cNvPr>
           <p:cNvPicPr>
             <a:picLocks noChangeAspect="1"/>
           </p:cNvPicPr>
@@ -4276,7 +4368,7 @@
                 <a:ea typeface="Arial" pitchFamily="34" charset="-122"/>
                 <a:cs typeface="Arial" pitchFamily="34" charset="-120"/>
               </a:rPr>
-              <a:t>Fail safely</a:t>
+              <a:t>When something happens (NIST SP 800-86)</a:t>
             </a:r>
             <a:endParaRPr lang="en-US" sz="2600" dirty="0"/>
           </a:p>
@@ -4284,18 +4376,59 @@
       </p:sp>
       <p:sp>
         <p:nvSpPr>
-          <p:cNvPr id="5" name="Shape 2"/>
-          <p:cNvSpPr/>
-          <p:nvPr/>
-        </p:nvSpPr>
-        <p:spPr>
-          <a:xfrm>
-            <a:off x="457200" y="1325880"/>
-            <a:ext cx="8229600" cy="1207008"/>
+          <p:cNvPr id="5" name="Text 2"/>
+          <p:cNvSpPr/>
+          <p:nvPr/>
+        </p:nvSpPr>
+        <p:spPr>
+          <a:xfrm>
+            <a:off x="548640" y="1325880"/>
+            <a:ext cx="8046720" cy="548640"/>
+          </a:xfrm>
+          <a:prstGeom prst="rect">
+            <a:avLst/>
+          </a:prstGeom>
+          <a:noFill/>
+          <a:ln/>
+        </p:spPr>
+        <p:txBody>
+          <a:bodyPr wrap="square" lIns="0" tIns="0" rIns="0" bIns="0" rtlCol="0" anchor="t">
+            <a:normAutofit/>
+          </a:bodyPr>
+          <a:lstStyle/>
+          <a:p>
+            <a:pPr indent="0" marL="0">
+              <a:buNone/>
+            </a:pPr>
+            <a:r>
+              <a:rPr lang="en-US" sz="1400" dirty="0">
+                <a:solidFill>
+                  <a:srgbClr val="1F2937"/>
+                </a:solidFill>
+                <a:latin typeface="Calibri" pitchFamily="34" charset="0"/>
+                <a:ea typeface="Calibri" pitchFamily="34" charset="-122"/>
+                <a:cs typeface="Calibri" pitchFamily="34" charset="-120"/>
+              </a:rPr>
+              <a:t>Collection → Examination → Analysis → Reporting</a:t>
+            </a:r>
+            <a:endParaRPr lang="en-US" sz="1400" dirty="0"/>
+          </a:p>
+        </p:txBody>
+      </p:sp>
+      <p:sp>
+        <p:nvSpPr>
+          <p:cNvPr id="6" name="Shape 3"/>
+          <p:cNvSpPr/>
+          <p:nvPr/>
+        </p:nvSpPr>
+        <p:spPr>
+          <a:xfrm>
+            <a:off x="457200" y="1965960"/>
+            <a:ext cx="8229600" cy="896112"/>
           </a:xfrm>
           <a:prstGeom prst="roundRect">
             <a:avLst>
-              <a:gd name="adj" fmla="val 6061"/>
+              <a:gd name="adj" fmla="val 8163"/>
             </a:avLst>
           </a:prstGeom>
           <a:solidFill>
@@ -4313,14 +4446,14 @@
       </p:sp>
       <p:sp>
         <p:nvSpPr>
-          <p:cNvPr id="6" name="Text 3"/>
-          <p:cNvSpPr/>
-          <p:nvPr/>
-        </p:nvSpPr>
-        <p:spPr>
-          <a:xfrm>
-            <a:off x="731520" y="1435608"/>
-            <a:ext cx="7680960" cy="987552"/>
+          <p:cNvPr id="7" name="Text 4"/>
+          <p:cNvSpPr/>
+          <p:nvPr/>
+        </p:nvSpPr>
+        <p:spPr>
+          <a:xfrm>
+            <a:off x="731520" y="2075688"/>
+            <a:ext cx="7680960" cy="676656"/>
           </a:xfrm>
           <a:prstGeom prst="rect">
             <a:avLst/>
@@ -4350,7 +4483,7 @@
                 <a:ea typeface="Calibri" pitchFamily="34" charset="-122"/>
                 <a:cs typeface="Calibri" pitchFamily="34" charset="-120"/>
               </a:rPr>
-              <a:t>A10:2025 — mishandled errors leak info / fail open</a:t>
+              <a:t>Preserve order of volatility: memory → temp files → disk → logs</a:t>
             </a:r>
             <a:endParaRPr lang="en-US" sz="1400" dirty="0"/>
           </a:p>
@@ -4371,66 +4504,45 @@
                 <a:ea typeface="Calibri" pitchFamily="34" charset="-122"/>
                 <a:cs typeface="Calibri" pitchFamily="34" charset="-120"/>
               </a:rPr>
-              <a:t>Fail closed: deny on error, don't bypass checks</a:t>
+              <a:t>Failed/success logins: Windows Event 4625 / 4624</a:t>
             </a:r>
             <a:endParaRPr lang="en-US" sz="1400" dirty="0"/>
           </a:p>
-          <a:p>
-            <a:pPr marL="342900" indent="-342900">
-              <a:spcAft>
-                <a:spcPts val="600"/>
-              </a:spcAft>
-              <a:buSzPct val="100000"/>
-              <a:buChar char="•"/>
-            </a:pPr>
-            <a:r>
-              <a:rPr lang="en-US" sz="1400" dirty="0">
-                <a:solidFill>
-                  <a:srgbClr val="1F2937"/>
+        </p:txBody>
+      </p:sp>
+      <p:sp>
+        <p:nvSpPr>
+          <p:cNvPr id="8" name="Text 5"/>
+          <p:cNvSpPr/>
+          <p:nvPr/>
+        </p:nvSpPr>
+        <p:spPr>
+          <a:xfrm>
+            <a:off x="457200" y="4800600"/>
+            <a:ext cx="6949440" cy="274320"/>
+          </a:xfrm>
+          <a:prstGeom prst="rect">
+            <a:avLst/>
+          </a:prstGeom>
+          <a:noFill/>
+          <a:ln/>
+        </p:spPr>
+        <p:txBody>
+          <a:bodyPr wrap="square" lIns="0" tIns="0" rIns="0" bIns="0" rtlCol="0" anchor="ctr"/>
+          <a:lstStyle/>
+          <a:p>
+            <a:pPr indent="0" marL="0">
+              <a:buNone/>
+            </a:pPr>
+            <a:r>
+              <a:rPr lang="en-US" sz="900" dirty="0">
+                <a:solidFill>
+                  <a:srgbClr val="64748B"/>
                 </a:solidFill>
                 <a:latin typeface="Calibri" pitchFamily="34" charset="0"/>
                 <a:ea typeface="Calibri" pitchFamily="34" charset="-122"/>
                 <a:cs typeface="Calibri" pitchFamily="34" charset="-120"/>
               </a:rPr>
-              <a:t>Don't expose stack traces / secrets in errors</a:t>
-            </a:r>
-            <a:endParaRPr lang="en-US" sz="1400" dirty="0"/>
-          </a:p>
-        </p:txBody>
-      </p:sp>
-      <p:sp>
-        <p:nvSpPr>
-          <p:cNvPr id="7" name="Text 4"/>
-          <p:cNvSpPr/>
-          <p:nvPr/>
-        </p:nvSpPr>
-        <p:spPr>
-          <a:xfrm>
-            <a:off x="457200" y="4800600"/>
-            <a:ext cx="6949440" cy="274320"/>
-          </a:xfrm>
-          <a:prstGeom prst="rect">
-            <a:avLst/>
-          </a:prstGeom>
-          <a:noFill/>
-          <a:ln/>
-        </p:spPr>
-        <p:txBody>
-          <a:bodyPr wrap="square" lIns="0" tIns="0" rIns="0" bIns="0" rtlCol="0" anchor="ctr"/>
-          <a:lstStyle/>
-          <a:p>
-            <a:pPr indent="0" marL="0">
-              <a:buNone/>
-            </a:pPr>
-            <a:r>
-              <a:rPr lang="en-US" sz="900" dirty="0">
-                <a:solidFill>
-                  <a:srgbClr val="64748B"/>
-                </a:solidFill>
-                <a:latin typeface="Calibri" pitchFamily="34" charset="0"/>
-                <a:ea typeface="Calibri" pitchFamily="34" charset="-122"/>
-                <a:cs typeface="Calibri" pitchFamily="34" charset="-120"/>
-              </a:rPr>
               <a:t>Software Security · Week 15</a:t>
             </a:r>
             <a:endParaRPr lang="en-US" sz="900" dirty="0"/>
@@ -4439,7 +4551,7 @@
       </p:sp>
       <p:pic>
         <p:nvPicPr>
-          <p:cNvPr id="8" name="Image 1" descr="/private/tmp/claude-501/-Users-pop7-Library-CloudStorage-OneDrive-MonsterConnectCo--Ltd-Lecture-KOSEN69---software-security/f63a82af-e1ad-40ed-89c4-03c6ca776e3f/scratchpad/vis-w15/slides/pptx/assets/logo-small.png">    </p:cNvPr>
+          <p:cNvPr id="9" name="Image 1" descr="/private/tmp/claude-501/-Users-pop7-Library-CloudStorage-OneDrive-MonsterConnectCo--Ltd-Lecture-KOSEN69---software-security/f63a82af-e1ad-40ed-89c4-03c6ca776e3f/scratchpad/lq-anim/slides/pptx/assets/logo-small.png">    </p:cNvPr>
           <p:cNvPicPr>
             <a:picLocks noChangeAspect="1"/>
           </p:cNvPicPr>
@@ -4577,7 +4689,7 @@
                 <a:ea typeface="Arial" pitchFamily="34" charset="-122"/>
                 <a:cs typeface="Arial" pitchFamily="34" charset="-120"/>
               </a:rPr>
-              <a:t>Vulnerability management &amp; disclosure</a:t>
+              <a:t>Fail safely</a:t>
             </a:r>
             <a:endParaRPr lang="en-US" sz="2600" dirty="0"/>
           </a:p>
@@ -4651,7 +4763,7 @@
                 <a:ea typeface="Calibri" pitchFamily="34" charset="-122"/>
                 <a:cs typeface="Calibri" pitchFamily="34" charset="-120"/>
               </a:rPr>
-              <a:t>Triage by severity; track to remediation (SLAs)</a:t>
+              <a:t>A10:2025 — mishandled errors leak info / fail open</a:t>
             </a:r>
             <a:endParaRPr lang="en-US" sz="1400" dirty="0"/>
           </a:p>
@@ -4672,7 +4784,7 @@
                 <a:ea typeface="Calibri" pitchFamily="34" charset="-122"/>
                 <a:cs typeface="Calibri" pitchFamily="34" charset="-120"/>
               </a:rPr>
-              <a:t>Coordinated disclosure &amp; bug bounties</a:t>
+              <a:t>Fail closed: deny on error, don't bypass checks</a:t>
             </a:r>
             <a:endParaRPr lang="en-US" sz="1400" dirty="0"/>
           </a:p>
@@ -4693,7 +4805,7 @@
                 <a:ea typeface="Calibri" pitchFamily="34" charset="-122"/>
                 <a:cs typeface="Calibri" pitchFamily="34" charset="-120"/>
               </a:rPr>
-              <a:t>security.txt; a path for researchers to report</a:t>
+              <a:t>Don't expose stack traces / secrets in errors</a:t>
             </a:r>
             <a:endParaRPr lang="en-US" sz="1400" dirty="0"/>
           </a:p>
@@ -4740,7 +4852,7 @@
       </p:sp>
       <p:pic>
         <p:nvPicPr>
-          <p:cNvPr id="8" name="Image 1" descr="/private/tmp/claude-501/-Users-pop7-Library-CloudStorage-OneDrive-MonsterConnectCo--Ltd-Lecture-KOSEN69---software-security/f63a82af-e1ad-40ed-89c4-03c6ca776e3f/scratchpad/vis-w15/slides/pptx/assets/logo-small.png">    </p:cNvPr>
+          <p:cNvPr id="8" name="Image 1" descr="/private/tmp/claude-501/-Users-pop7-Library-CloudStorage-OneDrive-MonsterConnectCo--Ltd-Lecture-KOSEN69---software-security/f63a82af-e1ad-40ed-89c4-03c6ca776e3f/scratchpad/lq-anim/slides/pptx/assets/logo-small.png">    </p:cNvPr>
           <p:cNvPicPr>
             <a:picLocks noChangeAspect="1"/>
           </p:cNvPicPr>
@@ -4878,15 +4990,170 @@
                 <a:ea typeface="Arial" pitchFamily="34" charset="-122"/>
                 <a:cs typeface="Arial" pitchFamily="34" charset="-120"/>
               </a:rPr>
-              <a:t>One decision, made twice</a:t>
+              <a:t>Vulnerability management &amp; disclosure</a:t>
             </a:r>
             <a:endParaRPr lang="en-US" sz="2600" dirty="0"/>
+          </a:p>
+        </p:txBody>
+      </p:sp>
+      <p:sp>
+        <p:nvSpPr>
+          <p:cNvPr id="5" name="Shape 2"/>
+          <p:cNvSpPr/>
+          <p:nvPr/>
+        </p:nvSpPr>
+        <p:spPr>
+          <a:xfrm>
+            <a:off x="457200" y="1325880"/>
+            <a:ext cx="8229600" cy="1207008"/>
+          </a:xfrm>
+          <a:prstGeom prst="roundRect">
+            <a:avLst>
+              <a:gd name="adj" fmla="val 6061"/>
+            </a:avLst>
+          </a:prstGeom>
+          <a:solidFill>
+            <a:srgbClr val="F1F5F9"/>
+          </a:solidFill>
+          <a:ln/>
+          <a:effectLst>
+            <a:outerShdw sx="100000" sy="100000" kx="0" ky="0" algn="bl" rotWithShape="0" blurRad="76200" dist="25400" dir="5400000">
+              <a:srgbClr val="000000">
+                <a:alpha val="12000"/>
+              </a:srgbClr>
+            </a:outerShdw>
+          </a:effectLst>
+        </p:spPr>
+      </p:sp>
+      <p:sp>
+        <p:nvSpPr>
+          <p:cNvPr id="6" name="Text 3"/>
+          <p:cNvSpPr/>
+          <p:nvPr/>
+        </p:nvSpPr>
+        <p:spPr>
+          <a:xfrm>
+            <a:off x="731520" y="1435608"/>
+            <a:ext cx="7680960" cy="987552"/>
+          </a:xfrm>
+          <a:prstGeom prst="rect">
+            <a:avLst/>
+          </a:prstGeom>
+          <a:noFill/>
+          <a:ln/>
+        </p:spPr>
+        <p:txBody>
+          <a:bodyPr wrap="square" lIns="0" tIns="0" rIns="0" bIns="0" rtlCol="0" anchor="t">
+            <a:normAutofit/>
+          </a:bodyPr>
+          <a:lstStyle/>
+          <a:p>
+            <a:pPr marL="342900" indent="-342900">
+              <a:spcAft>
+                <a:spcPts val="600"/>
+              </a:spcAft>
+              <a:buSzPct val="100000"/>
+              <a:buChar char="•"/>
+            </a:pPr>
+            <a:r>
+              <a:rPr lang="en-US" sz="1400" dirty="0">
+                <a:solidFill>
+                  <a:srgbClr val="1F2937"/>
+                </a:solidFill>
+                <a:latin typeface="Calibri" pitchFamily="34" charset="0"/>
+                <a:ea typeface="Calibri" pitchFamily="34" charset="-122"/>
+                <a:cs typeface="Calibri" pitchFamily="34" charset="-120"/>
+              </a:rPr>
+              <a:t>Triage by severity; track to remediation (SLAs)</a:t>
+            </a:r>
+            <a:endParaRPr lang="en-US" sz="1400" dirty="0"/>
+          </a:p>
+          <a:p>
+            <a:pPr marL="342900" indent="-342900">
+              <a:spcAft>
+                <a:spcPts val="600"/>
+              </a:spcAft>
+              <a:buSzPct val="100000"/>
+              <a:buChar char="•"/>
+            </a:pPr>
+            <a:r>
+              <a:rPr lang="en-US" sz="1400" dirty="0">
+                <a:solidFill>
+                  <a:srgbClr val="1F2937"/>
+                </a:solidFill>
+                <a:latin typeface="Calibri" pitchFamily="34" charset="0"/>
+                <a:ea typeface="Calibri" pitchFamily="34" charset="-122"/>
+                <a:cs typeface="Calibri" pitchFamily="34" charset="-120"/>
+              </a:rPr>
+              <a:t>Coordinated disclosure &amp; bug bounties</a:t>
+            </a:r>
+            <a:endParaRPr lang="en-US" sz="1400" dirty="0"/>
+          </a:p>
+          <a:p>
+            <a:pPr marL="342900" indent="-342900">
+              <a:spcAft>
+                <a:spcPts val="600"/>
+              </a:spcAft>
+              <a:buSzPct val="100000"/>
+              <a:buChar char="•"/>
+            </a:pPr>
+            <a:r>
+              <a:rPr lang="en-US" sz="1400" dirty="0">
+                <a:solidFill>
+                  <a:srgbClr val="1F2937"/>
+                </a:solidFill>
+                <a:latin typeface="Calibri" pitchFamily="34" charset="0"/>
+                <a:ea typeface="Calibri" pitchFamily="34" charset="-122"/>
+                <a:cs typeface="Calibri" pitchFamily="34" charset="-120"/>
+              </a:rPr>
+              <a:t>security.txt; a path for researchers to report</a:t>
+            </a:r>
+            <a:endParaRPr lang="en-US" sz="1400" dirty="0"/>
+          </a:p>
+        </p:txBody>
+      </p:sp>
+      <p:sp>
+        <p:nvSpPr>
+          <p:cNvPr id="7" name="Text 4"/>
+          <p:cNvSpPr/>
+          <p:nvPr/>
+        </p:nvSpPr>
+        <p:spPr>
+          <a:xfrm>
+            <a:off x="457200" y="4800600"/>
+            <a:ext cx="6949440" cy="274320"/>
+          </a:xfrm>
+          <a:prstGeom prst="rect">
+            <a:avLst/>
+          </a:prstGeom>
+          <a:noFill/>
+          <a:ln/>
+        </p:spPr>
+        <p:txBody>
+          <a:bodyPr wrap="square" lIns="0" tIns="0" rIns="0" bIns="0" rtlCol="0" anchor="ctr"/>
+          <a:lstStyle/>
+          <a:p>
+            <a:pPr indent="0" marL="0">
+              <a:buNone/>
+            </a:pPr>
+            <a:r>
+              <a:rPr lang="en-US" sz="900" dirty="0">
+                <a:solidFill>
+                  <a:srgbClr val="64748B"/>
+                </a:solidFill>
+                <a:latin typeface="Calibri" pitchFamily="34" charset="0"/>
+                <a:ea typeface="Calibri" pitchFamily="34" charset="-122"/>
+                <a:cs typeface="Calibri" pitchFamily="34" charset="-120"/>
+              </a:rPr>
+              <a:t>Software Security · Week 15</a:t>
+            </a:r>
+            <a:endParaRPr lang="en-US" sz="900" dirty="0"/>
           </a:p>
         </p:txBody>
       </p:sp>
       <p:pic>
         <p:nvPicPr>
-          <p:cNvPr id="5" name="Image 1" descr="Two panels showing the same yes-or-no decision at two different times. Build time: the CI gate's HIGH/CRITICAL severity filter, not the scanner itself, decides what a build refuses — root user (DS-0002, HIGH) is caught, :latest (DS-0001, MEDIUM) slips past the filter. Run time: the /admin handler makes the identical decision on an exception — fail-open returns 200 and logs nothing (silent bypass, A09); fail-closed returns 403 and logs event=authz_failure without ever logging the token itself (CWE-532). Both defaults, unexamined, are yes: the gate exits 0 on anything it wasn't told to fail on, the handler returns 200 on anything that threw. Nobody chose — that silence is A10, CWE-636.">    </p:cNvPr>
+          <p:cNvPr id="8" name="Image 1" descr="/private/tmp/claude-501/-Users-pop7-Library-CloudStorage-OneDrive-MonsterConnectCo--Ltd-Lecture-KOSEN69---software-security/f63a82af-e1ad-40ed-89c4-03c6ca776e3f/scratchpad/lq-anim/slides/pptx/assets/logo-small.png">    </p:cNvPr>
           <p:cNvPicPr>
             <a:picLocks noChangeAspect="1"/>
           </p:cNvPicPr>
@@ -4894,69 +5161,6 @@
         </p:nvPicPr>
         <p:blipFill>
           <a:blip r:embed="rId2"/>
-          <a:stretch>
-            <a:fillRect/>
-          </a:stretch>
-        </p:blipFill>
-        <p:spPr>
-          <a:xfrm>
-            <a:off x="2431769" y="1097280"/>
-            <a:ext cx="4280462" cy="3566160"/>
-          </a:xfrm>
-          <a:prstGeom prst="rect">
-            <a:avLst/>
-          </a:prstGeom>
-        </p:spPr>
-      </p:pic>
-      <p:sp>
-        <p:nvSpPr>
-          <p:cNvPr id="6" name="Text 2"/>
-          <p:cNvSpPr/>
-          <p:nvPr/>
-        </p:nvSpPr>
-        <p:spPr>
-          <a:xfrm>
-            <a:off x="457200" y="4800600"/>
-            <a:ext cx="6949440" cy="274320"/>
-          </a:xfrm>
-          <a:prstGeom prst="rect">
-            <a:avLst/>
-          </a:prstGeom>
-          <a:noFill/>
-          <a:ln/>
-        </p:spPr>
-        <p:txBody>
-          <a:bodyPr wrap="square" lIns="0" tIns="0" rIns="0" bIns="0" rtlCol="0" anchor="ctr"/>
-          <a:lstStyle/>
-          <a:p>
-            <a:pPr indent="0" marL="0">
-              <a:buNone/>
-            </a:pPr>
-            <a:r>
-              <a:rPr lang="en-US" sz="900" dirty="0">
-                <a:solidFill>
-                  <a:srgbClr val="64748B"/>
-                </a:solidFill>
-                <a:latin typeface="Calibri" pitchFamily="34" charset="0"/>
-                <a:ea typeface="Calibri" pitchFamily="34" charset="-122"/>
-                <a:cs typeface="Calibri" pitchFamily="34" charset="-120"/>
-              </a:rPr>
-              <a:t>Software Security · Week 15</a:t>
-            </a:r>
-            <a:endParaRPr lang="en-US" sz="900" dirty="0"/>
-          </a:p>
-        </p:txBody>
-      </p:sp>
-      <p:pic>
-        <p:nvPicPr>
-          <p:cNvPr id="7" name="Image 2" descr="/private/tmp/claude-501/-Users-pop7-Library-CloudStorage-OneDrive-MonsterConnectCo--Ltd-Lecture-KOSEN69---software-security/f63a82af-e1ad-40ed-89c4-03c6ca776e3f/scratchpad/vis-w15/slides/pptx/assets/logo-small.png">    </p:cNvPr>
-          <p:cNvPicPr>
-            <a:picLocks noChangeAspect="1"/>
-          </p:cNvPicPr>
-          <p:nvPr/>
-        </p:nvPicPr>
-        <p:blipFill>
-          <a:blip r:embed="rId3"/>
           <a:stretch>
             <a:fillRect/>
           </a:stretch>
@@ -5087,22 +5291,46 @@
                 <a:ea typeface="Arial" pitchFamily="34" charset="-122"/>
                 <a:cs typeface="Arial" pitchFamily="34" charset="-120"/>
               </a:rPr>
-              <a:t>Try it — same request, two services</a:t>
+              <a:t>One decision, made twice</a:t>
             </a:r>
             <a:endParaRPr lang="en-US" sz="2600" dirty="0"/>
           </a:p>
         </p:txBody>
       </p:sp>
-      <p:sp>
-        <p:nvSpPr>
-          <p:cNvPr id="5" name="Text 2"/>
-          <p:cNvSpPr/>
-          <p:nvPr/>
-        </p:nvSpPr>
-        <p:spPr>
-          <a:xfrm>
-            <a:off x="548640" y="1325880"/>
-            <a:ext cx="8046720" cy="822960"/>
+      <p:pic>
+        <p:nvPicPr>
+          <p:cNvPr id="5" name="Image 1" descr="Two panels showing the same yes-or-no decision at two different times. Build time: the CI gate's HIGH/CRITICAL severity filter, not the scanner itself, decides what a build refuses — root user (DS-0002, HIGH) is caught, :latest (DS-0001, MEDIUM) slips past the filter. Run time: the /admin handler makes the identical decision on an exception — fail-open returns 200 and logs nothing (silent bypass, A09); fail-closed returns 403 and logs event=authz_failure without ever logging the token itself (CWE-532). At build time, letting MEDIUM through is a risk decision — fine if someone made it on purpose, a gap if nobody looked. At run time, the except branch that returns 200 is the actual fail-open bug: A10, CWE-636.">    </p:cNvPr>
+          <p:cNvPicPr>
+            <a:picLocks noChangeAspect="1"/>
+          </p:cNvPicPr>
+          <p:nvPr/>
+        </p:nvPicPr>
+        <p:blipFill>
+          <a:blip r:embed="rId2"/>
+          <a:stretch>
+            <a:fillRect/>
+          </a:stretch>
+        </p:blipFill>
+        <p:spPr>
+          <a:xfrm>
+            <a:off x="2431769" y="1097280"/>
+            <a:ext cx="4280462" cy="3566160"/>
+          </a:xfrm>
+          <a:prstGeom prst="rect">
+            <a:avLst/>
+          </a:prstGeom>
+        </p:spPr>
+      </p:pic>
+      <p:sp>
+        <p:nvSpPr>
+          <p:cNvPr id="6" name="Text 2"/>
+          <p:cNvSpPr/>
+          <p:nvPr/>
+        </p:nvSpPr>
+        <p:spPr>
+          <a:xfrm>
+            <a:off x="457200" y="4800600"/>
+            <a:ext cx="6949440" cy="274320"/>
           </a:xfrm>
           <a:prstGeom prst="rect">
             <a:avLst/>
@@ -5111,79 +5339,21 @@
           <a:ln/>
         </p:spPr>
         <p:txBody>
-          <a:bodyPr wrap="square" lIns="0" tIns="0" rIns="0" bIns="0" rtlCol="0" anchor="t">
-            <a:normAutofit/>
-          </a:bodyPr>
+          <a:bodyPr wrap="square" lIns="0" tIns="0" rIns="0" bIns="0" rtlCol="0" anchor="ctr"/>
           <a:lstStyle/>
           <a:p>
             <a:pPr indent="0" marL="0">
               <a:buNone/>
             </a:pPr>
             <a:r>
-              <a:rPr lang="en-US" sz="1400" dirty="0">
-                <a:solidFill>
-                  <a:srgbClr val="1F2937"/>
+              <a:rPr lang="en-US" sz="900" dirty="0">
+                <a:solidFill>
+                  <a:srgbClr val="64748B"/>
                 </a:solidFill>
                 <a:latin typeface="Calibri" pitchFamily="34" charset="0"/>
                 <a:ea typeface="Calibri" pitchFamily="34" charset="-122"/>
                 <a:cs typeface="Calibri" pitchFamily="34" charset="-120"/>
               </a:rPr>
-              <a:t>Pick a token. Both real services answer, and you see what each one logs.</a:t>
-            </a:r>
-            <a:endParaRPr lang="en-US" sz="1400" dirty="0"/>
-          </a:p>
-          <a:p>
-            <a:pPr indent="0" marL="0">
-              <a:buNone/>
-            </a:pPr>
-            <a:r>
-              <a:rPr lang="en-US" sz="1400" dirty="0">
-                <a:solidFill>
-                  <a:srgbClr val="1F2937"/>
-                </a:solidFill>
-                <a:latin typeface="Calibri" pitchFamily="34" charset="0"/>
-                <a:ea typeface="Calibri" pitchFamily="34" charset="-122"/>
-                <a:cs typeface="Calibri" pitchFamily="34" charset="-120"/>
-              </a:rPr>
-              <a:t>Try it live: /sim/fail-open (interactive simulation, web only)</a:t>
-            </a:r>
-            <a:endParaRPr lang="en-US" sz="1400" dirty="0"/>
-          </a:p>
-        </p:txBody>
-      </p:sp>
-      <p:sp>
-        <p:nvSpPr>
-          <p:cNvPr id="6" name="Text 3"/>
-          <p:cNvSpPr/>
-          <p:nvPr/>
-        </p:nvSpPr>
-        <p:spPr>
-          <a:xfrm>
-            <a:off x="457200" y="4800600"/>
-            <a:ext cx="6949440" cy="274320"/>
-          </a:xfrm>
-          <a:prstGeom prst="rect">
-            <a:avLst/>
-          </a:prstGeom>
-          <a:noFill/>
-          <a:ln/>
-        </p:spPr>
-        <p:txBody>
-          <a:bodyPr wrap="square" lIns="0" tIns="0" rIns="0" bIns="0" rtlCol="0" anchor="ctr"/>
-          <a:lstStyle/>
-          <a:p>
-            <a:pPr indent="0" marL="0">
-              <a:buNone/>
-            </a:pPr>
-            <a:r>
-              <a:rPr lang="en-US" sz="900" dirty="0">
-                <a:solidFill>
-                  <a:srgbClr val="64748B"/>
-                </a:solidFill>
-                <a:latin typeface="Calibri" pitchFamily="34" charset="0"/>
-                <a:ea typeface="Calibri" pitchFamily="34" charset="-122"/>
-                <a:cs typeface="Calibri" pitchFamily="34" charset="-120"/>
-              </a:rPr>
               <a:t>Software Security · Week 15</a:t>
             </a:r>
             <a:endParaRPr lang="en-US" sz="900" dirty="0"/>
@@ -5192,14 +5362,14 @@
       </p:sp>
       <p:pic>
         <p:nvPicPr>
-          <p:cNvPr id="7" name="Image 1" descr="/private/tmp/claude-501/-Users-pop7-Library-CloudStorage-OneDrive-MonsterConnectCo--Ltd-Lecture-KOSEN69---software-security/f63a82af-e1ad-40ed-89c4-03c6ca776e3f/scratchpad/vis-w15/slides/pptx/assets/logo-small.png">    </p:cNvPr>
+          <p:cNvPr id="7" name="Image 2" descr="/private/tmp/claude-501/-Users-pop7-Library-CloudStorage-OneDrive-MonsterConnectCo--Ltd-Lecture-KOSEN69---software-security/f63a82af-e1ad-40ed-89c4-03c6ca776e3f/scratchpad/lq-anim/slides/pptx/assets/logo-small.png">    </p:cNvPr>
           <p:cNvPicPr>
             <a:picLocks noChangeAspect="1"/>
           </p:cNvPicPr>
           <p:nvPr/>
         </p:nvPicPr>
         <p:blipFill>
-          <a:blip r:embed="rId2"/>
+          <a:blip r:embed="rId3"/>
           <a:stretch>
             <a:fillRect/>
           </a:stretch>
@@ -5330,7 +5500,7 @@
                 <a:ea typeface="Arial" pitchFamily="34" charset="-122"/>
                 <a:cs typeface="Arial" pitchFamily="34" charset="-120"/>
               </a:rPr>
-              <a:t>🔴🔵 Game — Break the Build</a:t>
+              <a:t>Try it — same request, two services</a:t>
             </a:r>
             <a:endParaRPr lang="en-US" sz="2600" dirty="0"/>
           </a:p>
@@ -5338,43 +5508,14 @@
       </p:sp>
       <p:sp>
         <p:nvSpPr>
-          <p:cNvPr id="5" name="Shape 2"/>
-          <p:cNvSpPr/>
-          <p:nvPr/>
-        </p:nvSpPr>
-        <p:spPr>
-          <a:xfrm>
-            <a:off x="457200" y="1325880"/>
-            <a:ext cx="8229600" cy="2212848"/>
-          </a:xfrm>
-          <a:prstGeom prst="roundRect">
-            <a:avLst>
-              <a:gd name="adj" fmla="val 3306"/>
-            </a:avLst>
-          </a:prstGeom>
-          <a:solidFill>
-            <a:srgbClr val="F1F5F9"/>
-          </a:solidFill>
-          <a:ln/>
-          <a:effectLst>
-            <a:outerShdw sx="100000" sy="100000" kx="0" ky="0" algn="bl" rotWithShape="0" blurRad="76200" dist="25400" dir="5400000">
-              <a:srgbClr val="000000">
-                <a:alpha val="12000"/>
-              </a:srgbClr>
-            </a:outerShdw>
-          </a:effectLst>
-        </p:spPr>
-      </p:sp>
-      <p:sp>
-        <p:nvSpPr>
-          <p:cNvPr id="6" name="Text 3"/>
-          <p:cNvSpPr/>
-          <p:nvPr/>
-        </p:nvSpPr>
-        <p:spPr>
-          <a:xfrm>
-            <a:off x="731520" y="1435608"/>
-            <a:ext cx="7680960" cy="1993392"/>
+          <p:cNvPr id="5" name="Text 2"/>
+          <p:cNvSpPr/>
+          <p:nvPr/>
+        </p:nvSpPr>
+        <p:spPr>
+          <a:xfrm>
+            <a:off x="548640" y="1325880"/>
+            <a:ext cx="8046720" cy="822960"/>
           </a:xfrm>
           <a:prstGeom prst="rect">
             <a:avLst/>
@@ -5388,12 +5529,8 @@
           </a:bodyPr>
           <a:lstStyle/>
           <a:p>
-            <a:pPr marL="342900" indent="-342900">
-              <a:spcAft>
-                <a:spcPts val="600"/>
-              </a:spcAft>
-              <a:buSzPct val="100000"/>
-              <a:buChar char="•"/>
+            <a:pPr indent="0" marL="0">
+              <a:buNone/>
             </a:pPr>
             <a:r>
               <a:rPr lang="en-US" sz="1400" dirty="0">
@@ -5404,17 +5541,13 @@
                 <a:ea typeface="Calibri" pitchFamily="34" charset="-122"/>
                 <a:cs typeface="Calibri" pitchFamily="34" charset="-120"/>
               </a:rPr>
-              <a:t>Blue: build the gate (Semgrep + Trivy + Gitleaks), fail on HIGH/CRITICAL, add security logging that fails closed</a:t>
+              <a:t>Pick a token. Both real services answer, and you see what each one logs.</a:t>
             </a:r>
             <a:endParaRPr lang="en-US" sz="1400" dirty="0"/>
           </a:p>
           <a:p>
-            <a:pPr marL="342900" indent="-342900">
-              <a:spcAft>
-                <a:spcPts val="600"/>
-              </a:spcAft>
-              <a:buSzPct val="100000"/>
-              <a:buChar char="•"/>
+            <a:pPr indent="0" marL="0">
+              <a:buNone/>
             </a:pPr>
             <a:r>
               <a:rPr lang="en-US" sz="1400" dirty="0">
@@ -5425,66 +5558,45 @@
                 <a:ea typeface="Calibri" pitchFamily="34" charset="-122"/>
                 <a:cs typeface="Calibri" pitchFamily="34" charset="-120"/>
               </a:rPr>
-              <a:t>Red: three gate-mapped attacks only — outdated dependency (Trivy SCA), a Dockerfile running as root (Trivy config), a hardcoded token (Gitleaks). chmod 777 and FROM:latest are decoys that stay green — not gate bypasses</a:t>
+              <a:t>Try it live: /sim/fail-open (interactive simulation, web only)</a:t>
             </a:r>
             <a:endParaRPr lang="en-US" sz="1400" dirty="0"/>
           </a:p>
-          <a:p>
-            <a:pPr marL="342900" indent="-342900">
-              <a:spcAft>
-                <a:spcPts val="600"/>
-              </a:spcAft>
-              <a:buSzPct val="100000"/>
-              <a:buChar char="•"/>
-            </a:pPr>
-            <a:r>
-              <a:rPr lang="en-US" sz="1400" dirty="0">
-                <a:solidFill>
-                  <a:srgbClr val="1F2937"/>
+        </p:txBody>
+      </p:sp>
+      <p:sp>
+        <p:nvSpPr>
+          <p:cNvPr id="6" name="Text 3"/>
+          <p:cNvSpPr/>
+          <p:nvPr/>
+        </p:nvSpPr>
+        <p:spPr>
+          <a:xfrm>
+            <a:off x="457200" y="4800600"/>
+            <a:ext cx="6949440" cy="274320"/>
+          </a:xfrm>
+          <a:prstGeom prst="rect">
+            <a:avLst/>
+          </a:prstGeom>
+          <a:noFill/>
+          <a:ln/>
+        </p:spPr>
+        <p:txBody>
+          <a:bodyPr wrap="square" lIns="0" tIns="0" rIns="0" bIns="0" rtlCol="0" anchor="ctr"/>
+          <a:lstStyle/>
+          <a:p>
+            <a:pPr indent="0" marL="0">
+              <a:buNone/>
+            </a:pPr>
+            <a:r>
+              <a:rPr lang="en-US" sz="900" dirty="0">
+                <a:solidFill>
+                  <a:srgbClr val="64748B"/>
                 </a:solidFill>
                 <a:latin typeface="Calibri" pitchFamily="34" charset="0"/>
                 <a:ea typeface="Calibri" pitchFamily="34" charset="-122"/>
                 <a:cs typeface="Calibri" pitchFamily="34" charset="-120"/>
               </a:rPr>
-              <a:t>Score: Blue per catch, Red per successful bypass; then leak the flag from the fail-open /admin bypass in insecure_service.py (a public demo value on a local run; your personal flag comes from your hosted instance)</a:t>
-            </a:r>
-            <a:endParaRPr lang="en-US" sz="1400" dirty="0"/>
-          </a:p>
-        </p:txBody>
-      </p:sp>
-      <p:sp>
-        <p:nvSpPr>
-          <p:cNvPr id="7" name="Text 4"/>
-          <p:cNvSpPr/>
-          <p:nvPr/>
-        </p:nvSpPr>
-        <p:spPr>
-          <a:xfrm>
-            <a:off x="457200" y="4800600"/>
-            <a:ext cx="6949440" cy="274320"/>
-          </a:xfrm>
-          <a:prstGeom prst="rect">
-            <a:avLst/>
-          </a:prstGeom>
-          <a:noFill/>
-          <a:ln/>
-        </p:spPr>
-        <p:txBody>
-          <a:bodyPr wrap="square" lIns="0" tIns="0" rIns="0" bIns="0" rtlCol="0" anchor="ctr"/>
-          <a:lstStyle/>
-          <a:p>
-            <a:pPr indent="0" marL="0">
-              <a:buNone/>
-            </a:pPr>
-            <a:r>
-              <a:rPr lang="en-US" sz="900" dirty="0">
-                <a:solidFill>
-                  <a:srgbClr val="64748B"/>
-                </a:solidFill>
-                <a:latin typeface="Calibri" pitchFamily="34" charset="0"/>
-                <a:ea typeface="Calibri" pitchFamily="34" charset="-122"/>
-                <a:cs typeface="Calibri" pitchFamily="34" charset="-120"/>
-              </a:rPr>
               <a:t>Software Security · Week 15</a:t>
             </a:r>
             <a:endParaRPr lang="en-US" sz="900" dirty="0"/>
@@ -5493,7 +5605,7 @@
       </p:sp>
       <p:pic>
         <p:nvPicPr>
-          <p:cNvPr id="8" name="Image 1" descr="/private/tmp/claude-501/-Users-pop7-Library-CloudStorage-OneDrive-MonsterConnectCo--Ltd-Lecture-KOSEN69---software-security/f63a82af-e1ad-40ed-89c4-03c6ca776e3f/scratchpad/vis-w15/slides/pptx/assets/logo-small.png">    </p:cNvPr>
+          <p:cNvPr id="7" name="Image 1" descr="/private/tmp/claude-501/-Users-pop7-Library-CloudStorage-OneDrive-MonsterConnectCo--Ltd-Lecture-KOSEN69---software-security/f63a82af-e1ad-40ed-89c4-03c6ca776e3f/scratchpad/lq-anim/slides/pptx/assets/logo-small.png">    </p:cNvPr>
           <p:cNvPicPr>
             <a:picLocks noChangeAspect="1"/>
           </p:cNvPicPr>
@@ -5631,15 +5743,170 @@
                 <a:ea typeface="Arial" pitchFamily="34" charset="-122"/>
                 <a:cs typeface="Arial" pitchFamily="34" charset="-120"/>
               </a:rPr>
-              <a:t>Break the Build — what each change turns red</a:t>
+              <a:t>🔴🔵 Game — Break the Build</a:t>
             </a:r>
             <a:endParaRPr lang="en-US" sz="2600" dirty="0"/>
+          </a:p>
+        </p:txBody>
+      </p:sp>
+      <p:sp>
+        <p:nvSpPr>
+          <p:cNvPr id="5" name="Shape 2"/>
+          <p:cNvSpPr/>
+          <p:nvPr/>
+        </p:nvSpPr>
+        <p:spPr>
+          <a:xfrm>
+            <a:off x="457200" y="1325880"/>
+            <a:ext cx="8229600" cy="2615184"/>
+          </a:xfrm>
+          <a:prstGeom prst="roundRect">
+            <a:avLst>
+              <a:gd name="adj" fmla="val 2797"/>
+            </a:avLst>
+          </a:prstGeom>
+          <a:solidFill>
+            <a:srgbClr val="F1F5F9"/>
+          </a:solidFill>
+          <a:ln/>
+          <a:effectLst>
+            <a:outerShdw sx="100000" sy="100000" kx="0" ky="0" algn="bl" rotWithShape="0" blurRad="76200" dist="25400" dir="5400000">
+              <a:srgbClr val="000000">
+                <a:alpha val="12000"/>
+              </a:srgbClr>
+            </a:outerShdw>
+          </a:effectLst>
+        </p:spPr>
+      </p:sp>
+      <p:sp>
+        <p:nvSpPr>
+          <p:cNvPr id="6" name="Text 3"/>
+          <p:cNvSpPr/>
+          <p:nvPr/>
+        </p:nvSpPr>
+        <p:spPr>
+          <a:xfrm>
+            <a:off x="731520" y="1435608"/>
+            <a:ext cx="7680960" cy="2395728"/>
+          </a:xfrm>
+          <a:prstGeom prst="rect">
+            <a:avLst/>
+          </a:prstGeom>
+          <a:noFill/>
+          <a:ln/>
+        </p:spPr>
+        <p:txBody>
+          <a:bodyPr wrap="square" lIns="0" tIns="0" rIns="0" bIns="0" rtlCol="0" anchor="t">
+            <a:normAutofit/>
+          </a:bodyPr>
+          <a:lstStyle/>
+          <a:p>
+            <a:pPr marL="342900" indent="-342900">
+              <a:spcAft>
+                <a:spcPts val="600"/>
+              </a:spcAft>
+              <a:buSzPct val="100000"/>
+              <a:buChar char="•"/>
+            </a:pPr>
+            <a:r>
+              <a:rPr lang="en-US" sz="1400" dirty="0">
+                <a:solidFill>
+                  <a:srgbClr val="1F2937"/>
+                </a:solidFill>
+                <a:latin typeface="Calibri" pitchFamily="34" charset="0"/>
+                <a:ea typeface="Calibri" pitchFamily="34" charset="-122"/>
+                <a:cs typeface="Calibri" pitchFamily="34" charset="-120"/>
+              </a:rPr>
+              <a:t>Blue: build the gate (Semgrep + Trivy + Gitleaks), fail on HIGH/CRITICAL, add security logging that fails closed</a:t>
+            </a:r>
+            <a:endParaRPr lang="en-US" sz="1400" dirty="0"/>
+          </a:p>
+          <a:p>
+            <a:pPr marL="342900" indent="-342900">
+              <a:spcAft>
+                <a:spcPts val="600"/>
+              </a:spcAft>
+              <a:buSzPct val="100000"/>
+              <a:buChar char="•"/>
+            </a:pPr>
+            <a:r>
+              <a:rPr lang="en-US" sz="1400" dirty="0">
+                <a:solidFill>
+                  <a:srgbClr val="1F2937"/>
+                </a:solidFill>
+                <a:latin typeface="Calibri" pitchFamily="34" charset="0"/>
+                <a:ea typeface="Calibri" pitchFamily="34" charset="-122"/>
+                <a:cs typeface="Calibri" pitchFamily="34" charset="-120"/>
+              </a:rPr>
+              <a:t>Red: one planted defect per PR, aimed at a gate — outdated dependency (Trivy SCA), a Dockerfile running as root (Trivy config), a hardcoded token (Gitleaks). chmod 777 and FROM:latest stay green: that's a blind spot, not a Task 4 screenshot</a:t>
+            </a:r>
+            <a:endParaRPr lang="en-US" sz="1400" dirty="0"/>
+          </a:p>
+          <a:p>
+            <a:pPr marL="342900" indent="-342900">
+              <a:spcAft>
+                <a:spcPts val="600"/>
+              </a:spcAft>
+              <a:buSzPct val="100000"/>
+              <a:buChar char="•"/>
+            </a:pPr>
+            <a:r>
+              <a:rPr lang="en-US" sz="1400" dirty="0">
+                <a:solidFill>
+                  <a:srgbClr val="1F2937"/>
+                </a:solidFill>
+                <a:latin typeface="Calibri" pitchFamily="34" charset="0"/>
+                <a:ea typeface="Calibri" pitchFamily="34" charset="-122"/>
+                <a:cs typeface="Calibri" pitchFamily="34" charset="-120"/>
+              </a:rPr>
+              <a:t>Score: Blue per catch, Red per defect that slips through (a blind spot found — propose the rule that would catch it); then leak the flag from the fail-open /admin bypass in insecure_service.py (a public demo value on a local run; your personal flag comes from your hosted instance)</a:t>
+            </a:r>
+            <a:endParaRPr lang="en-US" sz="1400" dirty="0"/>
+          </a:p>
+        </p:txBody>
+      </p:sp>
+      <p:sp>
+        <p:nvSpPr>
+          <p:cNvPr id="7" name="Text 4"/>
+          <p:cNvSpPr/>
+          <p:nvPr/>
+        </p:nvSpPr>
+        <p:spPr>
+          <a:xfrm>
+            <a:off x="457200" y="4800600"/>
+            <a:ext cx="6949440" cy="274320"/>
+          </a:xfrm>
+          <a:prstGeom prst="rect">
+            <a:avLst/>
+          </a:prstGeom>
+          <a:noFill/>
+          <a:ln/>
+        </p:spPr>
+        <p:txBody>
+          <a:bodyPr wrap="square" lIns="0" tIns="0" rIns="0" bIns="0" rtlCol="0" anchor="ctr"/>
+          <a:lstStyle/>
+          <a:p>
+            <a:pPr indent="0" marL="0">
+              <a:buNone/>
+            </a:pPr>
+            <a:r>
+              <a:rPr lang="en-US" sz="900" dirty="0">
+                <a:solidFill>
+                  <a:srgbClr val="64748B"/>
+                </a:solidFill>
+                <a:latin typeface="Calibri" pitchFamily="34" charset="0"/>
+                <a:ea typeface="Calibri" pitchFamily="34" charset="-122"/>
+                <a:cs typeface="Calibri" pitchFamily="34" charset="-120"/>
+              </a:rPr>
+              <a:t>Software Security · Week 15</a:t>
+            </a:r>
+            <a:endParaRPr lang="en-US" sz="900" dirty="0"/>
           </a:p>
         </p:txBody>
       </p:sp>
       <p:pic>
         <p:nvPicPr>
-          <p:cNvPr id="5" name="Image 1" descr="The Break the Build game board, measured by running security-ci.yml's own gate commands on the real lab files. Columns: Semgrep gate, Trivy SCA gate, Trivy IaC gate, Gitleaks gate. Blue's baseline is red before Red does anything: unpinned @v4/@v3 action tags and host=&quot;0.0.0.0&quot; trip Semgrep, and the docs' own curl examples with the toy alice-token header trip Gitleaks' curl-auth-header (a false positive). Red's attacks, one per PR on Blue's green baseline: urllib3==1.24.1 trips only Trivy SCA (7 HIGH, e.g. CVE-2019-11324). A Dockerfile running as root trips Trivy IaC (DS-0002 HIGH) and also Semgrep (missing-user or last-user-is-root). A ghp_ GitHub token trips Gitleaks (github-pat) and also Trivy SCA, whose secret scanner rates it CRITICAL. Decoys stay green: chmod 777 has no rule, and FROM python:latest is DS-0001 MEDIUM, which the gate filters out.">    </p:cNvPr>
+          <p:cNvPr id="8" name="Image 1" descr="/private/tmp/claude-501/-Users-pop7-Library-CloudStorage-OneDrive-MonsterConnectCo--Ltd-Lecture-KOSEN69---software-security/f63a82af-e1ad-40ed-89c4-03c6ca776e3f/scratchpad/lq-anim/slides/pptx/assets/logo-small.png">    </p:cNvPr>
           <p:cNvPicPr>
             <a:picLocks noChangeAspect="1"/>
           </p:cNvPicPr>
@@ -5647,69 +5914,6 @@
         </p:nvPicPr>
         <p:blipFill>
           <a:blip r:embed="rId2"/>
-          <a:stretch>
-            <a:fillRect/>
-          </a:stretch>
-        </p:blipFill>
-        <p:spPr>
-          <a:xfrm>
-            <a:off x="1559404" y="1097280"/>
-            <a:ext cx="6025191" cy="3566160"/>
-          </a:xfrm>
-          <a:prstGeom prst="rect">
-            <a:avLst/>
-          </a:prstGeom>
-        </p:spPr>
-      </p:pic>
-      <p:sp>
-        <p:nvSpPr>
-          <p:cNvPr id="6" name="Text 2"/>
-          <p:cNvSpPr/>
-          <p:nvPr/>
-        </p:nvSpPr>
-        <p:spPr>
-          <a:xfrm>
-            <a:off x="457200" y="4800600"/>
-            <a:ext cx="6949440" cy="274320"/>
-          </a:xfrm>
-          <a:prstGeom prst="rect">
-            <a:avLst/>
-          </a:prstGeom>
-          <a:noFill/>
-          <a:ln/>
-        </p:spPr>
-        <p:txBody>
-          <a:bodyPr wrap="square" lIns="0" tIns="0" rIns="0" bIns="0" rtlCol="0" anchor="ctr"/>
-          <a:lstStyle/>
-          <a:p>
-            <a:pPr indent="0" marL="0">
-              <a:buNone/>
-            </a:pPr>
-            <a:r>
-              <a:rPr lang="en-US" sz="900" dirty="0">
-                <a:solidFill>
-                  <a:srgbClr val="64748B"/>
-                </a:solidFill>
-                <a:latin typeface="Calibri" pitchFamily="34" charset="0"/>
-                <a:ea typeface="Calibri" pitchFamily="34" charset="-122"/>
-                <a:cs typeface="Calibri" pitchFamily="34" charset="-120"/>
-              </a:rPr>
-              <a:t>Software Security · Week 15</a:t>
-            </a:r>
-            <a:endParaRPr lang="en-US" sz="900" dirty="0"/>
-          </a:p>
-        </p:txBody>
-      </p:sp>
-      <p:pic>
-        <p:nvPicPr>
-          <p:cNvPr id="7" name="Image 2" descr="/private/tmp/claude-501/-Users-pop7-Library-CloudStorage-OneDrive-MonsterConnectCo--Ltd-Lecture-KOSEN69---software-security/f63a82af-e1ad-40ed-89c4-03c6ca776e3f/scratchpad/vis-w15/slides/pptx/assets/logo-small.png">    </p:cNvPr>
-          <p:cNvPicPr>
-            <a:picLocks noChangeAspect="1"/>
-          </p:cNvPicPr>
-          <p:nvPr/>
-        </p:nvPicPr>
-        <p:blipFill>
-          <a:blip r:embed="rId3"/>
           <a:stretch>
             <a:fillRect/>
           </a:stretch>
@@ -5840,22 +6044,46 @@
                 <a:ea typeface="Arial" pitchFamily="34" charset="-122"/>
                 <a:cs typeface="Arial" pitchFamily="34" charset="-120"/>
               </a:rPr>
-              <a:t>Try it — which job goes red?</a:t>
+              <a:t>Break the Build — what each change turns red</a:t>
             </a:r>
             <a:endParaRPr lang="en-US" sz="2600" dirty="0"/>
           </a:p>
         </p:txBody>
       </p:sp>
-      <p:sp>
-        <p:nvSpPr>
-          <p:cNvPr id="5" name="Text 2"/>
-          <p:cNvSpPr/>
-          <p:nvPr/>
-        </p:nvSpPr>
-        <p:spPr>
-          <a:xfrm>
-            <a:off x="548640" y="1325880"/>
-            <a:ext cx="8046720" cy="1097280"/>
+      <p:pic>
+        <p:nvPicPr>
+          <p:cNvPr id="5" name="Image 1" descr="The Break the Build game board, measured by running security-ci.yml's own gate commands on the real lab files. Columns: Semgrep gate, Trivy SCA gate, Trivy IaC gate, Gitleaks gate. Blue's baseline is red before Red does anything: unpinned @v4/@v3 action tags and host=&quot;0.0.0.0&quot; trip Semgrep, and the docs' own curl examples with the toy alice-token header trip Gitleaks' curl-auth-header (a false positive). Red's attacks, one per PR on Blue's green baseline: urllib3==1.24.1 trips only Trivy SCA (7 HIGH, e.g. CVE-2019-11324). A Dockerfile running as root trips Trivy IaC (DS-0002 HIGH) and also Semgrep (missing-user or last-user-is-root). A ghp_ GitHub token trips Gitleaks (github-pat) and also Trivy SCA, whose secret scanner rates it CRITICAL. Decoys stay green: chmod 777 has no rule, and FROM python:latest is DS-0001 MEDIUM, which the gate filters out.">    </p:cNvPr>
+          <p:cNvPicPr>
+            <a:picLocks noChangeAspect="1"/>
+          </p:cNvPicPr>
+          <p:nvPr/>
+        </p:nvPicPr>
+        <p:blipFill>
+          <a:blip r:embed="rId2"/>
+          <a:stretch>
+            <a:fillRect/>
+          </a:stretch>
+        </p:blipFill>
+        <p:spPr>
+          <a:xfrm>
+            <a:off x="1559404" y="1097280"/>
+            <a:ext cx="6025191" cy="3566160"/>
+          </a:xfrm>
+          <a:prstGeom prst="rect">
+            <a:avLst/>
+          </a:prstGeom>
+        </p:spPr>
+      </p:pic>
+      <p:sp>
+        <p:nvSpPr>
+          <p:cNvPr id="6" name="Text 2"/>
+          <p:cNvSpPr/>
+          <p:nvPr/>
+        </p:nvSpPr>
+        <p:spPr>
+          <a:xfrm>
+            <a:off x="457200" y="4800600"/>
+            <a:ext cx="6949440" cy="274320"/>
           </a:xfrm>
           <a:prstGeom prst="rect">
             <a:avLst/>
@@ -5864,79 +6092,21 @@
           <a:ln/>
         </p:spPr>
         <p:txBody>
-          <a:bodyPr wrap="square" lIns="0" tIns="0" rIns="0" bIns="0" rtlCol="0" anchor="t">
-            <a:normAutofit/>
-          </a:bodyPr>
+          <a:bodyPr wrap="square" lIns="0" tIns="0" rIns="0" bIns="0" rtlCol="0" anchor="ctr"/>
           <a:lstStyle/>
           <a:p>
             <a:pPr indent="0" marL="0">
               <a:buNone/>
             </a:pPr>
             <a:r>
-              <a:rPr lang="en-US" sz="1400" dirty="0">
-                <a:solidFill>
-                  <a:srgbClr val="1F2937"/>
+              <a:rPr lang="en-US" sz="900" dirty="0">
+                <a:solidFill>
+                  <a:srgbClr val="64748B"/>
                 </a:solidFill>
                 <a:latin typeface="Calibri" pitchFamily="34" charset="0"/>
                 <a:ea typeface="Calibri" pitchFamily="34" charset="-122"/>
                 <a:cs typeface="Calibri" pitchFamily="34" charset="-120"/>
               </a:rPr>
-              <a:t>Start from the untouched lab or Blue's fixes, plant a defect, read the run step by step.</a:t>
-            </a:r>
-            <a:endParaRPr lang="en-US" sz="1400" dirty="0"/>
-          </a:p>
-          <a:p>
-            <a:pPr indent="0" marL="0">
-              <a:buNone/>
-            </a:pPr>
-            <a:r>
-              <a:rPr lang="en-US" sz="1400" dirty="0">
-                <a:solidFill>
-                  <a:srgbClr val="1F2937"/>
-                </a:solidFill>
-                <a:latin typeface="Calibri" pitchFamily="34" charset="0"/>
-                <a:ea typeface="Calibri" pitchFamily="34" charset="-122"/>
-                <a:cs typeface="Calibri" pitchFamily="34" charset="-120"/>
-              </a:rPr>
-              <a:t>Try it live: /sim/red-team-pr (interactive simulation, web only)</a:t>
-            </a:r>
-            <a:endParaRPr lang="en-US" sz="1400" dirty="0"/>
-          </a:p>
-        </p:txBody>
-      </p:sp>
-      <p:sp>
-        <p:nvSpPr>
-          <p:cNvPr id="6" name="Text 3"/>
-          <p:cNvSpPr/>
-          <p:nvPr/>
-        </p:nvSpPr>
-        <p:spPr>
-          <a:xfrm>
-            <a:off x="457200" y="4800600"/>
-            <a:ext cx="6949440" cy="274320"/>
-          </a:xfrm>
-          <a:prstGeom prst="rect">
-            <a:avLst/>
-          </a:prstGeom>
-          <a:noFill/>
-          <a:ln/>
-        </p:spPr>
-        <p:txBody>
-          <a:bodyPr wrap="square" lIns="0" tIns="0" rIns="0" bIns="0" rtlCol="0" anchor="ctr"/>
-          <a:lstStyle/>
-          <a:p>
-            <a:pPr indent="0" marL="0">
-              <a:buNone/>
-            </a:pPr>
-            <a:r>
-              <a:rPr lang="en-US" sz="900" dirty="0">
-                <a:solidFill>
-                  <a:srgbClr val="64748B"/>
-                </a:solidFill>
-                <a:latin typeface="Calibri" pitchFamily="34" charset="0"/>
-                <a:ea typeface="Calibri" pitchFamily="34" charset="-122"/>
-                <a:cs typeface="Calibri" pitchFamily="34" charset="-120"/>
-              </a:rPr>
               <a:t>Software Security · Week 15</a:t>
             </a:r>
             <a:endParaRPr lang="en-US" sz="900" dirty="0"/>
@@ -5945,14 +6115,14 @@
       </p:sp>
       <p:pic>
         <p:nvPicPr>
-          <p:cNvPr id="7" name="Image 1" descr="/private/tmp/claude-501/-Users-pop7-Library-CloudStorage-OneDrive-MonsterConnectCo--Ltd-Lecture-KOSEN69---software-security/f63a82af-e1ad-40ed-89c4-03c6ca776e3f/scratchpad/vis-w15/slides/pptx/assets/logo-small.png">    </p:cNvPr>
+          <p:cNvPr id="7" name="Image 2" descr="/private/tmp/claude-501/-Users-pop7-Library-CloudStorage-OneDrive-MonsterConnectCo--Ltd-Lecture-KOSEN69---software-security/f63a82af-e1ad-40ed-89c4-03c6ca776e3f/scratchpad/lq-anim/slides/pptx/assets/logo-small.png">    </p:cNvPr>
           <p:cNvPicPr>
             <a:picLocks noChangeAspect="1"/>
           </p:cNvPicPr>
           <p:nvPr/>
         </p:nvPicPr>
         <p:blipFill>
-          <a:blip r:embed="rId2"/>
+          <a:blip r:embed="rId3"/>
           <a:stretch>
             <a:fillRect/>
           </a:stretch>
@@ -6083,15 +6253,112 @@
                 <a:ea typeface="Arial" pitchFamily="34" charset="-122"/>
                 <a:cs typeface="Arial" pitchFamily="34" charset="-120"/>
               </a:rPr>
-              <a:t>Task 1b at a glance</a:t>
+              <a:t>Try it — which job goes red?</a:t>
             </a:r>
             <a:endParaRPr lang="en-US" sz="2600" dirty="0"/>
+          </a:p>
+        </p:txBody>
+      </p:sp>
+      <p:sp>
+        <p:nvSpPr>
+          <p:cNvPr id="5" name="Text 2"/>
+          <p:cNvSpPr/>
+          <p:nvPr/>
+        </p:nvSpPr>
+        <p:spPr>
+          <a:xfrm>
+            <a:off x="548640" y="1325880"/>
+            <a:ext cx="8046720" cy="1097280"/>
+          </a:xfrm>
+          <a:prstGeom prst="rect">
+            <a:avLst/>
+          </a:prstGeom>
+          <a:noFill/>
+          <a:ln/>
+        </p:spPr>
+        <p:txBody>
+          <a:bodyPr wrap="square" lIns="0" tIns="0" rIns="0" bIns="0" rtlCol="0" anchor="t">
+            <a:normAutofit/>
+          </a:bodyPr>
+          <a:lstStyle/>
+          <a:p>
+            <a:pPr indent="0" marL="0">
+              <a:buNone/>
+            </a:pPr>
+            <a:r>
+              <a:rPr lang="en-US" sz="1400" dirty="0">
+                <a:solidFill>
+                  <a:srgbClr val="1F2937"/>
+                </a:solidFill>
+                <a:latin typeface="Calibri" pitchFamily="34" charset="0"/>
+                <a:ea typeface="Calibri" pitchFamily="34" charset="-122"/>
+                <a:cs typeface="Calibri" pitchFamily="34" charset="-120"/>
+              </a:rPr>
+              <a:t>Start from the untouched lab or Blue's fixes, plant a defect, read the run step by step.</a:t>
+            </a:r>
+            <a:endParaRPr lang="en-US" sz="1400" dirty="0"/>
+          </a:p>
+          <a:p>
+            <a:pPr indent="0" marL="0">
+              <a:buNone/>
+            </a:pPr>
+            <a:r>
+              <a:rPr lang="en-US" sz="1400" dirty="0">
+                <a:solidFill>
+                  <a:srgbClr val="1F2937"/>
+                </a:solidFill>
+                <a:latin typeface="Calibri" pitchFamily="34" charset="0"/>
+                <a:ea typeface="Calibri" pitchFamily="34" charset="-122"/>
+                <a:cs typeface="Calibri" pitchFamily="34" charset="-120"/>
+              </a:rPr>
+              <a:t>Try it live: /sim/red-team-pr (interactive simulation, web only)</a:t>
+            </a:r>
+            <a:endParaRPr lang="en-US" sz="1400" dirty="0"/>
+          </a:p>
+        </p:txBody>
+      </p:sp>
+      <p:sp>
+        <p:nvSpPr>
+          <p:cNvPr id="6" name="Text 3"/>
+          <p:cNvSpPr/>
+          <p:nvPr/>
+        </p:nvSpPr>
+        <p:spPr>
+          <a:xfrm>
+            <a:off x="457200" y="4800600"/>
+            <a:ext cx="6949440" cy="274320"/>
+          </a:xfrm>
+          <a:prstGeom prst="rect">
+            <a:avLst/>
+          </a:prstGeom>
+          <a:noFill/>
+          <a:ln/>
+        </p:spPr>
+        <p:txBody>
+          <a:bodyPr wrap="square" lIns="0" tIns="0" rIns="0" bIns="0" rtlCol="0" anchor="ctr"/>
+          <a:lstStyle/>
+          <a:p>
+            <a:pPr indent="0" marL="0">
+              <a:buNone/>
+            </a:pPr>
+            <a:r>
+              <a:rPr lang="en-US" sz="900" dirty="0">
+                <a:solidFill>
+                  <a:srgbClr val="64748B"/>
+                </a:solidFill>
+                <a:latin typeface="Calibri" pitchFamily="34" charset="0"/>
+                <a:ea typeface="Calibri" pitchFamily="34" charset="-122"/>
+                <a:cs typeface="Calibri" pitchFamily="34" charset="-120"/>
+              </a:rPr>
+              <a:t>Software Security · Week 15</a:t>
+            </a:r>
+            <a:endParaRPr lang="en-US" sz="900" dirty="0"/>
           </a:p>
         </p:txBody>
       </p:sp>
       <p:pic>
         <p:nvPicPr>
-          <p:cNvPr id="5" name="Image 1" descr="Task 1b at a glance. From the lab folder, docker compose up starts two containers from the same python:3.12-slim image, both mounting the lab folder: insecure_service.py on localhost:8090 and secure_service.py on localhost:8091. Send both the same GET /admin with no token. :8090 answers 200 with the panel and the FLAG, because the USERS dictionary lookup raises KeyError and the except branch grants access; its log shows only a 200 access line. :8091 answers 403 forbidden and logs a WARNING on the security logger (event=authz_failure outcome=deny reason=unauthenticated). Then prove the fix keeps admins in: alice-token still unlocks :8091, and the auto-grader checks both. Submit the flag, both responses and the failing-open except line; a local run returns the public demo flag, the graded one comes from your hosted instance.">    </p:cNvPr>
+          <p:cNvPr id="7" name="Image 1" descr="/private/tmp/claude-501/-Users-pop7-Library-CloudStorage-OneDrive-MonsterConnectCo--Ltd-Lecture-KOSEN69---software-security/f63a82af-e1ad-40ed-89c4-03c6ca776e3f/scratchpad/lq-anim/slides/pptx/assets/logo-small.png">    </p:cNvPr>
           <p:cNvPicPr>
             <a:picLocks noChangeAspect="1"/>
           </p:cNvPicPr>
@@ -6099,69 +6366,6 @@
         </p:nvPicPr>
         <p:blipFill>
           <a:blip r:embed="rId2"/>
-          <a:stretch>
-            <a:fillRect/>
-          </a:stretch>
-        </p:blipFill>
-        <p:spPr>
-          <a:xfrm>
-            <a:off x="1304041" y="1097280"/>
-            <a:ext cx="6535918" cy="3566160"/>
-          </a:xfrm>
-          <a:prstGeom prst="rect">
-            <a:avLst/>
-          </a:prstGeom>
-        </p:spPr>
-      </p:pic>
-      <p:sp>
-        <p:nvSpPr>
-          <p:cNvPr id="6" name="Text 2"/>
-          <p:cNvSpPr/>
-          <p:nvPr/>
-        </p:nvSpPr>
-        <p:spPr>
-          <a:xfrm>
-            <a:off x="457200" y="4800600"/>
-            <a:ext cx="6949440" cy="274320"/>
-          </a:xfrm>
-          <a:prstGeom prst="rect">
-            <a:avLst/>
-          </a:prstGeom>
-          <a:noFill/>
-          <a:ln/>
-        </p:spPr>
-        <p:txBody>
-          <a:bodyPr wrap="square" lIns="0" tIns="0" rIns="0" bIns="0" rtlCol="0" anchor="ctr"/>
-          <a:lstStyle/>
-          <a:p>
-            <a:pPr indent="0" marL="0">
-              <a:buNone/>
-            </a:pPr>
-            <a:r>
-              <a:rPr lang="en-US" sz="900" dirty="0">
-                <a:solidFill>
-                  <a:srgbClr val="64748B"/>
-                </a:solidFill>
-                <a:latin typeface="Calibri" pitchFamily="34" charset="0"/>
-                <a:ea typeface="Calibri" pitchFamily="34" charset="-122"/>
-                <a:cs typeface="Calibri" pitchFamily="34" charset="-120"/>
-              </a:rPr>
-              <a:t>Software Security · Week 15</a:t>
-            </a:r>
-            <a:endParaRPr lang="en-US" sz="900" dirty="0"/>
-          </a:p>
-        </p:txBody>
-      </p:sp>
-      <p:pic>
-        <p:nvPicPr>
-          <p:cNvPr id="7" name="Image 2" descr="/private/tmp/claude-501/-Users-pop7-Library-CloudStorage-OneDrive-MonsterConnectCo--Ltd-Lecture-KOSEN69---software-security/f63a82af-e1ad-40ed-89c4-03c6ca776e3f/scratchpad/vis-w15/slides/pptx/assets/logo-small.png">    </p:cNvPr>
-          <p:cNvPicPr>
-            <a:picLocks noChangeAspect="1"/>
-          </p:cNvPicPr>
-          <p:nvPr/>
-        </p:nvPicPr>
-        <p:blipFill>
-          <a:blip r:embed="rId3"/>
           <a:stretch>
             <a:fillRect/>
           </a:stretch>
@@ -6497,7 +6701,7 @@
       </p:sp>
       <p:pic>
         <p:nvPicPr>
-          <p:cNvPr id="8" name="Image 1" descr="/private/tmp/claude-501/-Users-pop7-Library-CloudStorage-OneDrive-MonsterConnectCo--Ltd-Lecture-KOSEN69---software-security/f63a82af-e1ad-40ed-89c4-03c6ca776e3f/scratchpad/vis-w15/slides/pptx/assets/logo-small.png">    </p:cNvPr>
+          <p:cNvPr id="8" name="Image 1" descr="/private/tmp/claude-501/-Users-pop7-Library-CloudStorage-OneDrive-MonsterConnectCo--Ltd-Lecture-KOSEN69---software-security/f63a82af-e1ad-40ed-89c4-03c6ca776e3f/scratchpad/lq-anim/slides/pptx/assets/logo-small.png">    </p:cNvPr>
           <p:cNvPicPr>
             <a:picLocks noChangeAspect="1"/>
           </p:cNvPicPr>
@@ -6635,44 +6839,46 @@
                 <a:ea typeface="Arial" pitchFamily="34" charset="-122"/>
                 <a:cs typeface="Arial" pitchFamily="34" charset="-120"/>
               </a:rPr>
-              <a:t>Deliverable</a:t>
+              <a:t>Task 1b at a glance</a:t>
             </a:r>
             <a:endParaRPr lang="en-US" sz="2600" dirty="0"/>
           </a:p>
         </p:txBody>
       </p:sp>
-      <p:sp>
-        <p:nvSpPr>
-          <p:cNvPr id="5" name="Shape 2"/>
-          <p:cNvSpPr/>
-          <p:nvPr/>
-        </p:nvSpPr>
-        <p:spPr>
-          <a:xfrm>
-            <a:off x="457200" y="1325880"/>
-            <a:ext cx="8229600" cy="1097280"/>
-          </a:xfrm>
-          <a:prstGeom prst="roundRect">
-            <a:avLst>
-              <a:gd name="adj" fmla="val 6667"/>
-            </a:avLst>
-          </a:prstGeom>
-          <a:solidFill>
-            <a:srgbClr val="E8EDF3"/>
-          </a:solidFill>
-          <a:ln/>
-        </p:spPr>
-      </p:sp>
-      <p:sp>
-        <p:nvSpPr>
-          <p:cNvPr id="6" name="Text 3"/>
-          <p:cNvSpPr/>
-          <p:nvPr/>
-        </p:nvSpPr>
-        <p:spPr>
-          <a:xfrm>
-            <a:off x="731520" y="1325880"/>
-            <a:ext cx="7680960" cy="1097280"/>
+      <p:pic>
+        <p:nvPicPr>
+          <p:cNvPr id="5" name="Image 1" descr="Task 1b at a glance. From the lab folder, docker compose up starts two containers from the same python:3.12-slim image, both mounting the lab folder: insecure_service.py on localhost:8090 and secure_service.py on localhost:8091. Send both the same GET /admin with no token. :8090 answers 200 with the panel and the FLAG, because the USERS dictionary lookup raises KeyError and the except branch grants access; its log shows only a 200 access line. :8091 answers 403 forbidden and logs a WARNING on the security logger (event=authz_failure outcome=deny reason=unauthenticated). Then prove the fix keeps admins in: alice-token still unlocks :8091, and the auto-grader checks both. Submit the flag, both responses and the failing-open except line; a local run returns the public demo flag, the graded one comes from your hosted instance.">    </p:cNvPr>
+          <p:cNvPicPr>
+            <a:picLocks noChangeAspect="1"/>
+          </p:cNvPicPr>
+          <p:nvPr/>
+        </p:nvPicPr>
+        <p:blipFill>
+          <a:blip r:embed="rId2"/>
+          <a:stretch>
+            <a:fillRect/>
+          </a:stretch>
+        </p:blipFill>
+        <p:spPr>
+          <a:xfrm>
+            <a:off x="1304041" y="1097280"/>
+            <a:ext cx="6535918" cy="3566160"/>
+          </a:xfrm>
+          <a:prstGeom prst="rect">
+            <a:avLst/>
+          </a:prstGeom>
+        </p:spPr>
+      </p:pic>
+      <p:sp>
+        <p:nvSpPr>
+          <p:cNvPr id="6" name="Text 2"/>
+          <p:cNvSpPr/>
+          <p:nvPr/>
+        </p:nvSpPr>
+        <p:spPr>
+          <a:xfrm>
+            <a:off x="457200" y="4800600"/>
+            <a:ext cx="6949440" cy="274320"/>
           </a:xfrm>
           <a:prstGeom prst="rect">
             <a:avLst/>
@@ -6681,178 +6887,21 @@
           <a:ln/>
         </p:spPr>
         <p:txBody>
-          <a:bodyPr wrap="square" lIns="0" tIns="0" rIns="0" bIns="0" rtlCol="0" anchor="ctr">
-            <a:normAutofit/>
-          </a:bodyPr>
+          <a:bodyPr wrap="square" lIns="0" tIns="0" rIns="0" bIns="0" rtlCol="0" anchor="ctr"/>
           <a:lstStyle/>
           <a:p>
             <a:pPr indent="0" marL="0">
               <a:buNone/>
             </a:pPr>
             <a:r>
-              <a:rPr lang="en-US" sz="1400" i="1" dirty="0">
-                <a:solidFill>
-                  <a:srgbClr val="E35205"/>
+              <a:rPr lang="en-US" sz="900" dirty="0">
+                <a:solidFill>
+                  <a:srgbClr val="64748B"/>
                 </a:solidFill>
                 <a:latin typeface="Calibri" pitchFamily="34" charset="0"/>
                 <a:ea typeface="Calibri" pitchFamily="34" charset="-122"/>
                 <a:cs typeface="Calibri" pitchFamily="34" charset="-120"/>
               </a:rPr>
-              <a:t>📋 Worksheet 15 — labs/week15-devsecops-pipeline/worksheet.md (Part 3) · kickoff: push security-ci.yml → GitHub Actions; separately, docker compose up → :8090 (insecure) / :8091 (secure) for the flag task</a:t>
-            </a:r>
-            <a:endParaRPr lang="en-US" sz="1400" dirty="0"/>
-          </a:p>
-        </p:txBody>
-      </p:sp>
-      <p:sp>
-        <p:nvSpPr>
-          <p:cNvPr id="7" name="Shape 4"/>
-          <p:cNvSpPr/>
-          <p:nvPr/>
-        </p:nvSpPr>
-        <p:spPr>
-          <a:xfrm>
-            <a:off x="457200" y="2587752"/>
-            <a:ext cx="8229600" cy="1810512"/>
-          </a:xfrm>
-          <a:prstGeom prst="roundRect">
-            <a:avLst>
-              <a:gd name="adj" fmla="val 4040"/>
-            </a:avLst>
-          </a:prstGeom>
-          <a:solidFill>
-            <a:srgbClr val="F1F5F9"/>
-          </a:solidFill>
-          <a:ln/>
-          <a:effectLst>
-            <a:outerShdw sx="100000" sy="100000" kx="0" ky="0" algn="bl" rotWithShape="0" blurRad="76200" dist="25400" dir="5400000">
-              <a:srgbClr val="000000">
-                <a:alpha val="12000"/>
-              </a:srgbClr>
-            </a:outerShdw>
-          </a:effectLst>
-        </p:spPr>
-      </p:sp>
-      <p:sp>
-        <p:nvSpPr>
-          <p:cNvPr id="8" name="Text 5"/>
-          <p:cNvSpPr/>
-          <p:nvPr/>
-        </p:nvSpPr>
-        <p:spPr>
-          <a:xfrm>
-            <a:off x="731520" y="2697480"/>
-            <a:ext cx="7680960" cy="1591056"/>
-          </a:xfrm>
-          <a:prstGeom prst="rect">
-            <a:avLst/>
-          </a:prstGeom>
-          <a:noFill/>
-          <a:ln/>
-        </p:spPr>
-        <p:txBody>
-          <a:bodyPr wrap="square" lIns="0" tIns="0" rIns="0" bIns="0" rtlCol="0" anchor="t">
-            <a:normAutofit/>
-          </a:bodyPr>
-          <a:lstStyle/>
-          <a:p>
-            <a:pPr marL="342900" indent="-342900">
-              <a:spcAft>
-                <a:spcPts val="600"/>
-              </a:spcAft>
-              <a:buSzPct val="100000"/>
-              <a:buChar char="•"/>
-            </a:pPr>
-            <a:r>
-              <a:rPr lang="en-US" sz="1400" dirty="0">
-                <a:solidFill>
-                  <a:srgbClr val="1F2937"/>
-                </a:solidFill>
-                <a:latin typeface="Calibri" pitchFamily="34" charset="0"/>
-                <a:ea typeface="Calibri" pitchFamily="34" charset="-122"/>
-                <a:cs typeface="Calibri" pitchFamily="34" charset="-120"/>
-              </a:rPr>
-              <a:t>A passing PR that adds the pipeline</a:t>
-            </a:r>
-            <a:endParaRPr lang="en-US" sz="1400" dirty="0"/>
-          </a:p>
-          <a:p>
-            <a:pPr marL="342900" indent="-342900">
-              <a:spcAft>
-                <a:spcPts val="600"/>
-              </a:spcAft>
-              <a:buSzPct val="100000"/>
-              <a:buChar char="•"/>
-            </a:pPr>
-            <a:r>
-              <a:rPr lang="en-US" sz="1400" dirty="0">
-                <a:solidFill>
-                  <a:srgbClr val="1F2937"/>
-                </a:solidFill>
-                <a:latin typeface="Calibri" pitchFamily="34" charset="0"/>
-                <a:ea typeface="Calibri" pitchFamily="34" charset="-122"/>
-                <a:cs typeface="Calibri" pitchFamily="34" charset="-120"/>
-              </a:rPr>
-              <a:t>Screenshot: build failing on each of the 3 Red-team categories (dependency, root Dockerfile, hardcoded token) — not just one</a:t>
-            </a:r>
-            <a:endParaRPr lang="en-US" sz="1400" dirty="0"/>
-          </a:p>
-          <a:p>
-            <a:pPr marL="342900" indent="-342900">
-              <a:spcAft>
-                <a:spcPts val="600"/>
-              </a:spcAft>
-              <a:buSzPct val="100000"/>
-              <a:buChar char="•"/>
-            </a:pPr>
-            <a:r>
-              <a:rPr lang="en-US" sz="1400" dirty="0">
-                <a:solidFill>
-                  <a:srgbClr val="1F2937"/>
-                </a:solidFill>
-                <a:latin typeface="Calibri" pitchFamily="34" charset="0"/>
-                <a:ea typeface="Calibri" pitchFamily="34" charset="-122"/>
-                <a:cs typeface="Calibri" pitchFamily="34" charset="-120"/>
-              </a:rPr>
-              <a:t>The FLAG{...} from the fail-open /admin bypass, in the worksheet (not the weekly quiz, which runs before the lab); your personal flag comes from your hosted instance</a:t>
-            </a:r>
-            <a:endParaRPr lang="en-US" sz="1400" dirty="0"/>
-          </a:p>
-        </p:txBody>
-      </p:sp>
-      <p:sp>
-        <p:nvSpPr>
-          <p:cNvPr id="9" name="Text 6"/>
-          <p:cNvSpPr/>
-          <p:nvPr/>
-        </p:nvSpPr>
-        <p:spPr>
-          <a:xfrm>
-            <a:off x="457200" y="4800600"/>
-            <a:ext cx="6949440" cy="274320"/>
-          </a:xfrm>
-          <a:prstGeom prst="rect">
-            <a:avLst/>
-          </a:prstGeom>
-          <a:noFill/>
-          <a:ln/>
-        </p:spPr>
-        <p:txBody>
-          <a:bodyPr wrap="square" lIns="0" tIns="0" rIns="0" bIns="0" rtlCol="0" anchor="ctr"/>
-          <a:lstStyle/>
-          <a:p>
-            <a:pPr indent="0" marL="0">
-              <a:buNone/>
-            </a:pPr>
-            <a:r>
-              <a:rPr lang="en-US" sz="900" dirty="0">
-                <a:solidFill>
-                  <a:srgbClr val="64748B"/>
-                </a:solidFill>
-                <a:latin typeface="Calibri" pitchFamily="34" charset="0"/>
-                <a:ea typeface="Calibri" pitchFamily="34" charset="-122"/>
-                <a:cs typeface="Calibri" pitchFamily="34" charset="-120"/>
-              </a:rPr>
               <a:t>Software Security · Week 15</a:t>
             </a:r>
             <a:endParaRPr lang="en-US" sz="900" dirty="0"/>
@@ -6861,14 +6910,14 @@
       </p:sp>
       <p:pic>
         <p:nvPicPr>
-          <p:cNvPr id="10" name="Image 1" descr="/private/tmp/claude-501/-Users-pop7-Library-CloudStorage-OneDrive-MonsterConnectCo--Ltd-Lecture-KOSEN69---software-security/f63a82af-e1ad-40ed-89c4-03c6ca776e3f/scratchpad/vis-w15/slides/pptx/assets/logo-small.png">    </p:cNvPr>
+          <p:cNvPr id="7" name="Image 2" descr="/private/tmp/claude-501/-Users-pop7-Library-CloudStorage-OneDrive-MonsterConnectCo--Ltd-Lecture-KOSEN69---software-security/f63a82af-e1ad-40ed-89c4-03c6ca776e3f/scratchpad/lq-anim/slides/pptx/assets/logo-small.png">    </p:cNvPr>
           <p:cNvPicPr>
             <a:picLocks noChangeAspect="1"/>
           </p:cNvPicPr>
           <p:nvPr/>
         </p:nvPicPr>
         <p:blipFill>
-          <a:blip r:embed="rId2"/>
+          <a:blip r:embed="rId3"/>
           <a:stretch>
             <a:fillRect/>
           </a:stretch>
@@ -6999,7 +7048,7 @@
                 <a:ea typeface="Arial" pitchFamily="34" charset="-122"/>
                 <a:cs typeface="Arial" pitchFamily="34" charset="-120"/>
               </a:rPr>
-              <a:t>Deliverable (cont.)</a:t>
+              <a:t>Deliverable</a:t>
             </a:r>
             <a:endParaRPr lang="en-US" sz="2600" dirty="0"/>
           </a:p>
@@ -7014,11 +7063,74 @@
         <p:spPr>
           <a:xfrm>
             <a:off x="457200" y="1325880"/>
-            <a:ext cx="8229600" cy="585216"/>
+            <a:ext cx="8229600" cy="1097280"/>
           </a:xfrm>
           <a:prstGeom prst="roundRect">
             <a:avLst>
-              <a:gd name="adj" fmla="val 12500"/>
+              <a:gd name="adj" fmla="val 6667"/>
+            </a:avLst>
+          </a:prstGeom>
+          <a:solidFill>
+            <a:srgbClr val="E8EDF3"/>
+          </a:solidFill>
+          <a:ln/>
+        </p:spPr>
+      </p:sp>
+      <p:sp>
+        <p:nvSpPr>
+          <p:cNvPr id="6" name="Text 3"/>
+          <p:cNvSpPr/>
+          <p:nvPr/>
+        </p:nvSpPr>
+        <p:spPr>
+          <a:xfrm>
+            <a:off x="731520" y="1325880"/>
+            <a:ext cx="7680960" cy="1097280"/>
+          </a:xfrm>
+          <a:prstGeom prst="rect">
+            <a:avLst/>
+          </a:prstGeom>
+          <a:noFill/>
+          <a:ln/>
+        </p:spPr>
+        <p:txBody>
+          <a:bodyPr wrap="square" lIns="0" tIns="0" rIns="0" bIns="0" rtlCol="0" anchor="ctr">
+            <a:normAutofit/>
+          </a:bodyPr>
+          <a:lstStyle/>
+          <a:p>
+            <a:pPr indent="0" marL="0">
+              <a:buNone/>
+            </a:pPr>
+            <a:r>
+              <a:rPr lang="en-US" sz="1400" i="1" dirty="0">
+                <a:solidFill>
+                  <a:srgbClr val="E35205"/>
+                </a:solidFill>
+                <a:latin typeface="Calibri" pitchFamily="34" charset="0"/>
+                <a:ea typeface="Calibri" pitchFamily="34" charset="-122"/>
+                <a:cs typeface="Calibri" pitchFamily="34" charset="-120"/>
+              </a:rPr>
+              <a:t>📋 Worksheet 15 — labs/week15-devsecops-pipeline/worksheet.md (Part 3) · kickoff: push security-ci.yml → GitHub Actions; separately, docker compose up → :8090 (insecure) / :8091 (secure) for the flag task</a:t>
+            </a:r>
+            <a:endParaRPr lang="en-US" sz="1400" dirty="0"/>
+          </a:p>
+        </p:txBody>
+      </p:sp>
+      <p:sp>
+        <p:nvSpPr>
+          <p:cNvPr id="7" name="Shape 4"/>
+          <p:cNvSpPr/>
+          <p:nvPr/>
+        </p:nvSpPr>
+        <p:spPr>
+          <a:xfrm>
+            <a:off x="457200" y="2587752"/>
+            <a:ext cx="8229600" cy="1810512"/>
+          </a:xfrm>
+          <a:prstGeom prst="roundRect">
+            <a:avLst>
+              <a:gd name="adj" fmla="val 4040"/>
             </a:avLst>
           </a:prstGeom>
           <a:solidFill>
@@ -7036,14 +7148,14 @@
       </p:sp>
       <p:sp>
         <p:nvSpPr>
-          <p:cNvPr id="6" name="Text 3"/>
-          <p:cNvSpPr/>
-          <p:nvPr/>
-        </p:nvSpPr>
-        <p:spPr>
-          <a:xfrm>
-            <a:off x="731520" y="1435608"/>
-            <a:ext cx="7680960" cy="365760"/>
+          <p:cNvPr id="8" name="Text 5"/>
+          <p:cNvSpPr/>
+          <p:nvPr/>
+        </p:nvSpPr>
+        <p:spPr>
+          <a:xfrm>
+            <a:off x="731520" y="2697480"/>
+            <a:ext cx="7680960" cy="1591056"/>
           </a:xfrm>
           <a:prstGeom prst="rect">
             <a:avLst/>
@@ -7073,45 +7185,87 @@
                 <a:ea typeface="Calibri" pitchFamily="34" charset="-122"/>
                 <a:cs typeface="Calibri" pitchFamily="34" charset="-120"/>
               </a:rPr>
-              <a:t>+ Audit the AI / EiPE / Prompt Problem (see worksheet)</a:t>
+              <a:t>A passing PR that adds the pipeline</a:t>
             </a:r>
             <a:endParaRPr lang="en-US" sz="1400" dirty="0"/>
           </a:p>
-        </p:txBody>
-      </p:sp>
-      <p:sp>
-        <p:nvSpPr>
-          <p:cNvPr id="7" name="Text 4"/>
-          <p:cNvSpPr/>
-          <p:nvPr/>
-        </p:nvSpPr>
-        <p:spPr>
-          <a:xfrm>
-            <a:off x="457200" y="4800600"/>
-            <a:ext cx="6949440" cy="274320"/>
-          </a:xfrm>
-          <a:prstGeom prst="rect">
-            <a:avLst/>
-          </a:prstGeom>
-          <a:noFill/>
-          <a:ln/>
-        </p:spPr>
-        <p:txBody>
-          <a:bodyPr wrap="square" lIns="0" tIns="0" rIns="0" bIns="0" rtlCol="0" anchor="ctr"/>
-          <a:lstStyle/>
-          <a:p>
-            <a:pPr indent="0" marL="0">
-              <a:buNone/>
-            </a:pPr>
-            <a:r>
-              <a:rPr lang="en-US" sz="900" dirty="0">
-                <a:solidFill>
-                  <a:srgbClr val="64748B"/>
+          <a:p>
+            <a:pPr marL="342900" indent="-342900">
+              <a:spcAft>
+                <a:spcPts val="600"/>
+              </a:spcAft>
+              <a:buSzPct val="100000"/>
+              <a:buChar char="•"/>
+            </a:pPr>
+            <a:r>
+              <a:rPr lang="en-US" sz="1400" dirty="0">
+                <a:solidFill>
+                  <a:srgbClr val="1F2937"/>
                 </a:solidFill>
                 <a:latin typeface="Calibri" pitchFamily="34" charset="0"/>
                 <a:ea typeface="Calibri" pitchFamily="34" charset="-122"/>
                 <a:cs typeface="Calibri" pitchFamily="34" charset="-120"/>
               </a:rPr>
+              <a:t>Screenshot: the failing gate step for your planted defect, and which job caught it (one defect per PR; trying all 3 categories is good practice)</a:t>
+            </a:r>
+            <a:endParaRPr lang="en-US" sz="1400" dirty="0"/>
+          </a:p>
+          <a:p>
+            <a:pPr marL="342900" indent="-342900">
+              <a:spcAft>
+                <a:spcPts val="600"/>
+              </a:spcAft>
+              <a:buSzPct val="100000"/>
+              <a:buChar char="•"/>
+            </a:pPr>
+            <a:r>
+              <a:rPr lang="en-US" sz="1400" dirty="0">
+                <a:solidFill>
+                  <a:srgbClr val="1F2937"/>
+                </a:solidFill>
+                <a:latin typeface="Calibri" pitchFamily="34" charset="0"/>
+                <a:ea typeface="Calibri" pitchFamily="34" charset="-122"/>
+                <a:cs typeface="Calibri" pitchFamily="34" charset="-120"/>
+              </a:rPr>
+              <a:t>The FLAG{...} from the fail-open /admin bypass, in the worksheet (not the weekly quiz, which runs before the lab); your personal flag comes from your hosted instance</a:t>
+            </a:r>
+            <a:endParaRPr lang="en-US" sz="1400" dirty="0"/>
+          </a:p>
+        </p:txBody>
+      </p:sp>
+      <p:sp>
+        <p:nvSpPr>
+          <p:cNvPr id="9" name="Text 6"/>
+          <p:cNvSpPr/>
+          <p:nvPr/>
+        </p:nvSpPr>
+        <p:spPr>
+          <a:xfrm>
+            <a:off x="457200" y="4800600"/>
+            <a:ext cx="6949440" cy="274320"/>
+          </a:xfrm>
+          <a:prstGeom prst="rect">
+            <a:avLst/>
+          </a:prstGeom>
+          <a:noFill/>
+          <a:ln/>
+        </p:spPr>
+        <p:txBody>
+          <a:bodyPr wrap="square" lIns="0" tIns="0" rIns="0" bIns="0" rtlCol="0" anchor="ctr"/>
+          <a:lstStyle/>
+          <a:p>
+            <a:pPr indent="0" marL="0">
+              <a:buNone/>
+            </a:pPr>
+            <a:r>
+              <a:rPr lang="en-US" sz="900" dirty="0">
+                <a:solidFill>
+                  <a:srgbClr val="64748B"/>
+                </a:solidFill>
+                <a:latin typeface="Calibri" pitchFamily="34" charset="0"/>
+                <a:ea typeface="Calibri" pitchFamily="34" charset="-122"/>
+                <a:cs typeface="Calibri" pitchFamily="34" charset="-120"/>
+              </a:rPr>
               <a:t>Software Security · Week 15</a:t>
             </a:r>
             <a:endParaRPr lang="en-US" sz="900" dirty="0"/>
@@ -7120,7 +7274,7 @@
       </p:sp>
       <p:pic>
         <p:nvPicPr>
-          <p:cNvPr id="8" name="Image 1" descr="/private/tmp/claude-501/-Users-pop7-Library-CloudStorage-OneDrive-MonsterConnectCo--Ltd-Lecture-KOSEN69---software-security/f63a82af-e1ad-40ed-89c4-03c6ca776e3f/scratchpad/vis-w15/slides/pptx/assets/logo-small.png">    </p:cNvPr>
+          <p:cNvPr id="10" name="Image 1" descr="/private/tmp/claude-501/-Users-pop7-Library-CloudStorage-OneDrive-MonsterConnectCo--Ltd-Lecture-KOSEN69---software-security/f63a82af-e1ad-40ed-89c4-03c6ca776e3f/scratchpad/lq-anim/slides/pptx/assets/logo-small.png">    </p:cNvPr>
           <p:cNvPicPr>
             <a:picLocks noChangeAspect="1"/>
           </p:cNvPicPr>
@@ -7258,7 +7412,7 @@
                 <a:ea typeface="Arial" pitchFamily="34" charset="-122"/>
                 <a:cs typeface="Arial" pitchFamily="34" charset="-120"/>
               </a:rPr>
-              <a:t>Key takeaways</a:t>
+              <a:t>Deliverable (cont.)</a:t>
             </a:r>
             <a:endParaRPr lang="en-US" sz="2600" dirty="0"/>
           </a:p>
@@ -7273,11 +7427,11 @@
         <p:spPr>
           <a:xfrm>
             <a:off x="457200" y="1325880"/>
-            <a:ext cx="8229600" cy="1207008"/>
+            <a:ext cx="8229600" cy="585216"/>
           </a:xfrm>
           <a:prstGeom prst="roundRect">
             <a:avLst>
-              <a:gd name="adj" fmla="val 6061"/>
+              <a:gd name="adj" fmla="val 12500"/>
             </a:avLst>
           </a:prstGeom>
           <a:solidFill>
@@ -7302,7 +7456,7 @@
         <p:spPr>
           <a:xfrm>
             <a:off x="731520" y="1435608"/>
-            <a:ext cx="7680960" cy="987552"/>
+            <a:ext cx="7680960" cy="365760"/>
           </a:xfrm>
           <a:prstGeom prst="rect">
             <a:avLst/>
@@ -7332,87 +7486,45 @@
                 <a:ea typeface="Calibri" pitchFamily="34" charset="-122"/>
                 <a:cs typeface="Calibri" pitchFamily="34" charset="-120"/>
               </a:rPr>
-              <a:t>Automate security gates — humans forget, pipelines don't</a:t>
+              <a:t>+ Audit the AI / EiPE / Prompt Problem (see worksheet)</a:t>
             </a:r>
             <a:endParaRPr lang="en-US" sz="1400" dirty="0"/>
           </a:p>
-          <a:p>
-            <a:pPr marL="342900" indent="-342900">
-              <a:spcAft>
-                <a:spcPts val="600"/>
-              </a:spcAft>
-              <a:buSzPct val="100000"/>
-              <a:buChar char="•"/>
-            </a:pPr>
-            <a:r>
-              <a:rPr lang="en-US" sz="1400" dirty="0">
-                <a:solidFill>
-                  <a:srgbClr val="1F2937"/>
+        </p:txBody>
+      </p:sp>
+      <p:sp>
+        <p:nvSpPr>
+          <p:cNvPr id="7" name="Text 4"/>
+          <p:cNvSpPr/>
+          <p:nvPr/>
+        </p:nvSpPr>
+        <p:spPr>
+          <a:xfrm>
+            <a:off x="457200" y="4800600"/>
+            <a:ext cx="6949440" cy="274320"/>
+          </a:xfrm>
+          <a:prstGeom prst="rect">
+            <a:avLst/>
+          </a:prstGeom>
+          <a:noFill/>
+          <a:ln/>
+        </p:spPr>
+        <p:txBody>
+          <a:bodyPr wrap="square" lIns="0" tIns="0" rIns="0" bIns="0" rtlCol="0" anchor="ctr"/>
+          <a:lstStyle/>
+          <a:p>
+            <a:pPr indent="0" marL="0">
+              <a:buNone/>
+            </a:pPr>
+            <a:r>
+              <a:rPr lang="en-US" sz="900" dirty="0">
+                <a:solidFill>
+                  <a:srgbClr val="64748B"/>
                 </a:solidFill>
                 <a:latin typeface="Calibri" pitchFamily="34" charset="0"/>
                 <a:ea typeface="Calibri" pitchFamily="34" charset="-122"/>
                 <a:cs typeface="Calibri" pitchFamily="34" charset="-120"/>
               </a:rPr>
-              <a:t>You can't defend what you don't log</a:t>
-            </a:r>
-            <a:endParaRPr lang="en-US" sz="1400" dirty="0"/>
-          </a:p>
-          <a:p>
-            <a:pPr marL="342900" indent="-342900">
-              <a:spcAft>
-                <a:spcPts val="600"/>
-              </a:spcAft>
-              <a:buSzPct val="100000"/>
-              <a:buChar char="•"/>
-            </a:pPr>
-            <a:r>
-              <a:rPr lang="en-US" sz="1400" dirty="0">
-                <a:solidFill>
-                  <a:srgbClr val="1F2937"/>
-                </a:solidFill>
-                <a:latin typeface="Calibri" pitchFamily="34" charset="0"/>
-                <a:ea typeface="Calibri" pitchFamily="34" charset="-122"/>
-                <a:cs typeface="Calibri" pitchFamily="34" charset="-120"/>
-              </a:rPr>
-              <a:t>Fail closed; disclose responsibly</a:t>
-            </a:r>
-            <a:endParaRPr lang="en-US" sz="1400" dirty="0"/>
-          </a:p>
-        </p:txBody>
-      </p:sp>
-      <p:sp>
-        <p:nvSpPr>
-          <p:cNvPr id="7" name="Text 4"/>
-          <p:cNvSpPr/>
-          <p:nvPr/>
-        </p:nvSpPr>
-        <p:spPr>
-          <a:xfrm>
-            <a:off x="457200" y="4800600"/>
-            <a:ext cx="6949440" cy="274320"/>
-          </a:xfrm>
-          <a:prstGeom prst="rect">
-            <a:avLst/>
-          </a:prstGeom>
-          <a:noFill/>
-          <a:ln/>
-        </p:spPr>
-        <p:txBody>
-          <a:bodyPr wrap="square" lIns="0" tIns="0" rIns="0" bIns="0" rtlCol="0" anchor="ctr"/>
-          <a:lstStyle/>
-          <a:p>
-            <a:pPr indent="0" marL="0">
-              <a:buNone/>
-            </a:pPr>
-            <a:r>
-              <a:rPr lang="en-US" sz="900" dirty="0">
-                <a:solidFill>
-                  <a:srgbClr val="64748B"/>
-                </a:solidFill>
-                <a:latin typeface="Calibri" pitchFamily="34" charset="0"/>
-                <a:ea typeface="Calibri" pitchFamily="34" charset="-122"/>
-                <a:cs typeface="Calibri" pitchFamily="34" charset="-120"/>
-              </a:rPr>
               <a:t>Software Security · Week 15</a:t>
             </a:r>
             <a:endParaRPr lang="en-US" sz="900" dirty="0"/>
@@ -7421,7 +7533,7 @@
       </p:sp>
       <p:pic>
         <p:nvPicPr>
-          <p:cNvPr id="8" name="Image 1" descr="/private/tmp/claude-501/-Users-pop7-Library-CloudStorage-OneDrive-MonsterConnectCo--Ltd-Lecture-KOSEN69---software-security/f63a82af-e1ad-40ed-89c4-03c6ca776e3f/scratchpad/vis-w15/slides/pptx/assets/logo-small.png">    </p:cNvPr>
+          <p:cNvPr id="8" name="Image 1" descr="/private/tmp/claude-501/-Users-pop7-Library-CloudStorage-OneDrive-MonsterConnectCo--Ltd-Lecture-KOSEN69---software-security/f63a82af-e1ad-40ed-89c4-03c6ca776e3f/scratchpad/lq-anim/slides/pptx/assets/logo-small.png">    </p:cNvPr>
           <p:cNvPicPr>
             <a:picLocks noChangeAspect="1"/>
           </p:cNvPicPr>
@@ -7477,14 +7589,65 @@
       </p:grpSpPr>
       <p:sp>
         <p:nvSpPr>
-          <p:cNvPr id="2" name="Text 0"/>
-          <p:cNvSpPr/>
-          <p:nvPr/>
-        </p:nvSpPr>
-        <p:spPr>
-          <a:xfrm>
-            <a:off x="640080" y="1737360"/>
-            <a:ext cx="7863840" cy="1097280"/>
+          <p:cNvPr id="2" name="Shape 0"/>
+          <p:cNvSpPr/>
+          <p:nvPr/>
+        </p:nvSpPr>
+        <p:spPr>
+          <a:xfrm>
+            <a:off x="457200" y="384048"/>
+            <a:ext cx="530352" cy="530352"/>
+          </a:xfrm>
+          <a:prstGeom prst="ellipse">
+            <a:avLst/>
+          </a:prstGeom>
+          <a:solidFill>
+            <a:srgbClr val="E35205"/>
+          </a:solidFill>
+          <a:ln/>
+          <a:effectLst>
+            <a:outerShdw sx="100000" sy="100000" kx="0" ky="0" algn="bl" rotWithShape="0" blurRad="76200" dist="25400" dir="5400000">
+              <a:srgbClr val="000000">
+                <a:alpha val="12000"/>
+              </a:srgbClr>
+            </a:outerShdw>
+          </a:effectLst>
+        </p:spPr>
+      </p:sp>
+      <p:pic>
+        <p:nvPicPr>
+          <p:cNvPr id="3" name="Image 0" descr="preencoded.png">    </p:cNvPr>
+          <p:cNvPicPr>
+            <a:picLocks noChangeAspect="1"/>
+          </p:cNvPicPr>
+          <p:nvPr/>
+        </p:nvPicPr>
+        <p:blipFill>
+          <a:blip r:embed="rId1"/>
+          <a:stretch>
+            <a:fillRect/>
+          </a:stretch>
+        </p:blipFill>
+        <p:spPr>
+          <a:xfrm>
+            <a:off x="594360" y="521208"/>
+            <a:ext cx="256032" cy="256032"/>
+          </a:xfrm>
+          <a:prstGeom prst="rect">
+            <a:avLst/>
+          </a:prstGeom>
+        </p:spPr>
+      </p:pic>
+      <p:sp>
+        <p:nvSpPr>
+          <p:cNvPr id="4" name="Text 1"/>
+          <p:cNvSpPr/>
+          <p:nvPr/>
+        </p:nvSpPr>
+        <p:spPr>
+          <a:xfrm>
+            <a:off x="1143000" y="329184"/>
+            <a:ext cx="7498080" cy="603504"/>
           </a:xfrm>
           <a:prstGeom prst="rect">
             <a:avLst/>
@@ -7500,7 +7663,7 @@
               <a:buNone/>
             </a:pPr>
             <a:r>
-              <a:rPr lang="en-US" sz="4600" b="1" dirty="0">
+              <a:rPr lang="en-US" sz="2600" b="1" dirty="0">
                 <a:solidFill>
                   <a:srgbClr val="1F2937"/>
                 </a:solidFill>
@@ -7508,22 +7671,51 @@
                 <a:ea typeface="Arial" pitchFamily="34" charset="-122"/>
                 <a:cs typeface="Arial" pitchFamily="34" charset="-120"/>
               </a:rPr>
-              <a:t>Questions?</a:t>
-            </a:r>
-            <a:endParaRPr lang="en-US" sz="4600" dirty="0"/>
-          </a:p>
-        </p:txBody>
-      </p:sp>
-      <p:sp>
-        <p:nvSpPr>
-          <p:cNvPr id="3" name="Text 1"/>
-          <p:cNvSpPr/>
-          <p:nvPr/>
-        </p:nvSpPr>
-        <p:spPr>
-          <a:xfrm>
-            <a:off x="658368" y="2834640"/>
-            <a:ext cx="7863840" cy="731520"/>
+              <a:t>Key takeaways</a:t>
+            </a:r>
+            <a:endParaRPr lang="en-US" sz="2600" dirty="0"/>
+          </a:p>
+        </p:txBody>
+      </p:sp>
+      <p:sp>
+        <p:nvSpPr>
+          <p:cNvPr id="5" name="Shape 2"/>
+          <p:cNvSpPr/>
+          <p:nvPr/>
+        </p:nvSpPr>
+        <p:spPr>
+          <a:xfrm>
+            <a:off x="457200" y="1325880"/>
+            <a:ext cx="8229600" cy="1207008"/>
+          </a:xfrm>
+          <a:prstGeom prst="roundRect">
+            <a:avLst>
+              <a:gd name="adj" fmla="val 6061"/>
+            </a:avLst>
+          </a:prstGeom>
+          <a:solidFill>
+            <a:srgbClr val="F1F5F9"/>
+          </a:solidFill>
+          <a:ln/>
+          <a:effectLst>
+            <a:outerShdw sx="100000" sy="100000" kx="0" ky="0" algn="bl" rotWithShape="0" blurRad="76200" dist="25400" dir="5400000">
+              <a:srgbClr val="000000">
+                <a:alpha val="12000"/>
+              </a:srgbClr>
+            </a:outerShdw>
+          </a:effectLst>
+        </p:spPr>
+      </p:sp>
+      <p:sp>
+        <p:nvSpPr>
+          <p:cNvPr id="6" name="Text 3"/>
+          <p:cNvSpPr/>
+          <p:nvPr/>
+        </p:nvSpPr>
+        <p:spPr>
+          <a:xfrm>
+            <a:off x="731520" y="1435608"/>
+            <a:ext cx="7680960" cy="987552"/>
           </a:xfrm>
           <a:prstGeom prst="rect">
             <a:avLst/>
@@ -7532,30 +7724,251 @@
           <a:ln/>
         </p:spPr>
         <p:txBody>
-          <a:bodyPr wrap="square" lIns="0" tIns="0" rIns="0" bIns="0" rtlCol="0" anchor="ctr"/>
-          <a:lstStyle/>
-          <a:p>
-            <a:pPr indent="0" marL="0">
-              <a:buNone/>
-            </a:pPr>
-            <a:r>
-              <a:rPr lang="en-US" sz="1800" dirty="0">
-                <a:solidFill>
-                  <a:srgbClr val="E35205"/>
+          <a:bodyPr wrap="square" lIns="0" tIns="0" rIns="0" bIns="0" rtlCol="0" anchor="t">
+            <a:normAutofit/>
+          </a:bodyPr>
+          <a:lstStyle/>
+          <a:p>
+            <a:pPr marL="342900" indent="-342900">
+              <a:spcAft>
+                <a:spcPts val="600"/>
+              </a:spcAft>
+              <a:buSzPct val="100000"/>
+              <a:buChar char="•"/>
+            </a:pPr>
+            <a:r>
+              <a:rPr lang="en-US" sz="1400" dirty="0">
+                <a:solidFill>
+                  <a:srgbClr val="1F2937"/>
                 </a:solidFill>
                 <a:latin typeface="Calibri" pitchFamily="34" charset="0"/>
                 <a:ea typeface="Calibri" pitchFamily="34" charset="-122"/>
                 <a:cs typeface="Calibri" pitchFamily="34" charset="-120"/>
               </a:rPr>
-              <a:t>Next week: Capstone studio &amp; CTF warm-up</a:t>
-            </a:r>
-            <a:endParaRPr lang="en-US" sz="1800" dirty="0"/>
+              <a:t>Automate security gates — humans forget, pipelines don't</a:t>
+            </a:r>
+            <a:endParaRPr lang="en-US" sz="1400" dirty="0"/>
+          </a:p>
+          <a:p>
+            <a:pPr marL="342900" indent="-342900">
+              <a:spcAft>
+                <a:spcPts val="600"/>
+              </a:spcAft>
+              <a:buSzPct val="100000"/>
+              <a:buChar char="•"/>
+            </a:pPr>
+            <a:r>
+              <a:rPr lang="en-US" sz="1400" dirty="0">
+                <a:solidFill>
+                  <a:srgbClr val="1F2937"/>
+                </a:solidFill>
+                <a:latin typeface="Calibri" pitchFamily="34" charset="0"/>
+                <a:ea typeface="Calibri" pitchFamily="34" charset="-122"/>
+                <a:cs typeface="Calibri" pitchFamily="34" charset="-120"/>
+              </a:rPr>
+              <a:t>You can't defend what you don't log</a:t>
+            </a:r>
+            <a:endParaRPr lang="en-US" sz="1400" dirty="0"/>
+          </a:p>
+          <a:p>
+            <a:pPr marL="342900" indent="-342900">
+              <a:spcAft>
+                <a:spcPts val="600"/>
+              </a:spcAft>
+              <a:buSzPct val="100000"/>
+              <a:buChar char="•"/>
+            </a:pPr>
+            <a:r>
+              <a:rPr lang="en-US" sz="1400" dirty="0">
+                <a:solidFill>
+                  <a:srgbClr val="1F2937"/>
+                </a:solidFill>
+                <a:latin typeface="Calibri" pitchFamily="34" charset="0"/>
+                <a:ea typeface="Calibri" pitchFamily="34" charset="-122"/>
+                <a:cs typeface="Calibri" pitchFamily="34" charset="-120"/>
+              </a:rPr>
+              <a:t>Fail closed; disclose responsibly</a:t>
+            </a:r>
+            <a:endParaRPr lang="en-US" sz="1400" dirty="0"/>
+          </a:p>
+        </p:txBody>
+      </p:sp>
+      <p:sp>
+        <p:nvSpPr>
+          <p:cNvPr id="7" name="Text 4"/>
+          <p:cNvSpPr/>
+          <p:nvPr/>
+        </p:nvSpPr>
+        <p:spPr>
+          <a:xfrm>
+            <a:off x="457200" y="4800600"/>
+            <a:ext cx="6949440" cy="274320"/>
+          </a:xfrm>
+          <a:prstGeom prst="rect">
+            <a:avLst/>
+          </a:prstGeom>
+          <a:noFill/>
+          <a:ln/>
+        </p:spPr>
+        <p:txBody>
+          <a:bodyPr wrap="square" lIns="0" tIns="0" rIns="0" bIns="0" rtlCol="0" anchor="ctr"/>
+          <a:lstStyle/>
+          <a:p>
+            <a:pPr indent="0" marL="0">
+              <a:buNone/>
+            </a:pPr>
+            <a:r>
+              <a:rPr lang="en-US" sz="900" dirty="0">
+                <a:solidFill>
+                  <a:srgbClr val="64748B"/>
+                </a:solidFill>
+                <a:latin typeface="Calibri" pitchFamily="34" charset="0"/>
+                <a:ea typeface="Calibri" pitchFamily="34" charset="-122"/>
+                <a:cs typeface="Calibri" pitchFamily="34" charset="-120"/>
+              </a:rPr>
+              <a:t>Software Security · Week 15</a:t>
+            </a:r>
+            <a:endParaRPr lang="en-US" sz="900" dirty="0"/>
           </a:p>
         </p:txBody>
       </p:sp>
       <p:pic>
         <p:nvPicPr>
-          <p:cNvPr id="4" name="Image 0" descr="/private/tmp/claude-501/-Users-pop7-Library-CloudStorage-OneDrive-MonsterConnectCo--Ltd-Lecture-KOSEN69---software-security/f63a82af-e1ad-40ed-89c4-03c6ca776e3f/scratchpad/vis-w15/slides/pptx/assets/logo-small.png">    </p:cNvPr>
+          <p:cNvPr id="8" name="Image 1" descr="/private/tmp/claude-501/-Users-pop7-Library-CloudStorage-OneDrive-MonsterConnectCo--Ltd-Lecture-KOSEN69---software-security/f63a82af-e1ad-40ed-89c4-03c6ca776e3f/scratchpad/lq-anim/slides/pptx/assets/logo-small.png">    </p:cNvPr>
+          <p:cNvPicPr>
+            <a:picLocks noChangeAspect="1"/>
+          </p:cNvPicPr>
+          <p:nvPr/>
+        </p:nvPicPr>
+        <p:blipFill>
+          <a:blip r:embed="rId2"/>
+          <a:stretch>
+            <a:fillRect/>
+          </a:stretch>
+        </p:blipFill>
+        <p:spPr>
+          <a:xfrm>
+            <a:off x="7882128" y="4700016"/>
+            <a:ext cx="768096" cy="356616"/>
+          </a:xfrm>
+          <a:prstGeom prst="rect">
+            <a:avLst/>
+          </a:prstGeom>
+        </p:spPr>
+      </p:pic>
+    </p:spTree>
+  </p:cSld>
+  <p:clrMapOvr>
+    <a:masterClrMapping/>
+  </p:clrMapOvr>
+</p:sld>
+</file>
+
+<file path=ppt/slides/slide24.xml><?xml version="1.0" encoding="utf-8"?>
+<p:sld xmlns:a="http://schemas.openxmlformats.org/drawingml/2006/main" xmlns:r="http://schemas.openxmlformats.org/officeDocument/2006/relationships" xmlns:p="http://schemas.openxmlformats.org/presentationml/2006/main">
+  <p:cSld name="Slide 24">
+    <p:bg>
+      <p:bgPr>
+        <a:solidFill>
+          <a:srgbClr val="FFFFFF"/>
+        </a:solidFill>
+      </p:bgPr>
+    </p:bg>
+    <p:spTree>
+      <p:nvGrpSpPr>
+        <p:cNvPr id="1" name=""/>
+        <p:cNvGrpSpPr/>
+        <p:nvPr/>
+      </p:nvGrpSpPr>
+      <p:grpSpPr>
+        <a:xfrm>
+          <a:off x="0" y="0"/>
+          <a:ext cx="0" cy="0"/>
+          <a:chOff x="0" y="0"/>
+          <a:chExt cx="0" cy="0"/>
+        </a:xfrm>
+      </p:grpSpPr>
+      <p:sp>
+        <p:nvSpPr>
+          <p:cNvPr id="2" name="Text 0"/>
+          <p:cNvSpPr/>
+          <p:nvPr/>
+        </p:nvSpPr>
+        <p:spPr>
+          <a:xfrm>
+            <a:off x="640080" y="1737360"/>
+            <a:ext cx="7863840" cy="1097280"/>
+          </a:xfrm>
+          <a:prstGeom prst="rect">
+            <a:avLst/>
+          </a:prstGeom>
+          <a:noFill/>
+          <a:ln/>
+        </p:spPr>
+        <p:txBody>
+          <a:bodyPr wrap="square" lIns="0" tIns="0" rIns="0" bIns="0" rtlCol="0" anchor="ctr"/>
+          <a:lstStyle/>
+          <a:p>
+            <a:pPr indent="0" marL="0">
+              <a:buNone/>
+            </a:pPr>
+            <a:r>
+              <a:rPr lang="en-US" sz="4600" b="1" dirty="0">
+                <a:solidFill>
+                  <a:srgbClr val="1F2937"/>
+                </a:solidFill>
+                <a:latin typeface="Arial" pitchFamily="34" charset="0"/>
+                <a:ea typeface="Arial" pitchFamily="34" charset="-122"/>
+                <a:cs typeface="Arial" pitchFamily="34" charset="-120"/>
+              </a:rPr>
+              <a:t>Questions?</a:t>
+            </a:r>
+            <a:endParaRPr lang="en-US" sz="4600" dirty="0"/>
+          </a:p>
+        </p:txBody>
+      </p:sp>
+      <p:sp>
+        <p:nvSpPr>
+          <p:cNvPr id="3" name="Text 1"/>
+          <p:cNvSpPr/>
+          <p:nvPr/>
+        </p:nvSpPr>
+        <p:spPr>
+          <a:xfrm>
+            <a:off x="658368" y="2834640"/>
+            <a:ext cx="7863840" cy="731520"/>
+          </a:xfrm>
+          <a:prstGeom prst="rect">
+            <a:avLst/>
+          </a:prstGeom>
+          <a:noFill/>
+          <a:ln/>
+        </p:spPr>
+        <p:txBody>
+          <a:bodyPr wrap="square" lIns="0" tIns="0" rIns="0" bIns="0" rtlCol="0" anchor="ctr"/>
+          <a:lstStyle/>
+          <a:p>
+            <a:pPr indent="0" marL="0">
+              <a:buNone/>
+            </a:pPr>
+            <a:r>
+              <a:rPr lang="en-US" sz="1800" dirty="0">
+                <a:solidFill>
+                  <a:srgbClr val="E35205"/>
+                </a:solidFill>
+                <a:latin typeface="Calibri" pitchFamily="34" charset="0"/>
+                <a:ea typeface="Calibri" pitchFamily="34" charset="-122"/>
+                <a:cs typeface="Calibri" pitchFamily="34" charset="-120"/>
+              </a:rPr>
+              <a:t>Next week: Capstone studio &amp; CTF warm-up</a:t>
+            </a:r>
+            <a:endParaRPr lang="en-US" sz="1800" dirty="0"/>
+          </a:p>
+        </p:txBody>
+      </p:sp>
+      <p:pic>
+        <p:nvPicPr>
+          <p:cNvPr id="4" name="Image 0" descr="/private/tmp/claude-501/-Users-pop7-Library-CloudStorage-OneDrive-MonsterConnectCo--Ltd-Lecture-KOSEN69---software-security/f63a82af-e1ad-40ed-89c4-03c6ca776e3f/scratchpad/lq-anim/slides/pptx/assets/logo-small.png">    </p:cNvPr>
           <p:cNvPicPr>
             <a:picLocks noChangeAspect="1"/>
           </p:cNvPicPr>
@@ -7856,7 +8269,7 @@
       </p:sp>
       <p:pic>
         <p:nvPicPr>
-          <p:cNvPr id="8" name="Image 1" descr="/private/tmp/claude-501/-Users-pop7-Library-CloudStorage-OneDrive-MonsterConnectCo--Ltd-Lecture-KOSEN69---software-security/f63a82af-e1ad-40ed-89c4-03c6ca776e3f/scratchpad/vis-w15/slides/pptx/assets/logo-small.png">    </p:cNvPr>
+          <p:cNvPr id="8" name="Image 1" descr="/private/tmp/claude-501/-Users-pop7-Library-CloudStorage-OneDrive-MonsterConnectCo--Ltd-Lecture-KOSEN69---software-security/f63a82af-e1ad-40ed-89c4-03c6ca776e3f/scratchpad/lq-anim/slides/pptx/assets/logo-small.png">    </p:cNvPr>
           <p:cNvPicPr>
             <a:picLocks noChangeAspect="1"/>
           </p:cNvPicPr>
@@ -7994,7 +8407,7 @@
                 <a:ea typeface="Arial" pitchFamily="34" charset="-122"/>
                 <a:cs typeface="Arial" pitchFamily="34" charset="-120"/>
               </a:rPr>
-              <a:t>One push, three jobs</a:t>
+              <a:t>The whole course in one pipeline (cont.)</a:t>
             </a:r>
             <a:endParaRPr lang="en-US" sz="2600" dirty="0"/>
           </a:p>
@@ -8002,7 +8415,7 @@
       </p:sp>
       <p:pic>
         <p:nvPicPr>
-          <p:cNvPr id="5" name="Image 1" descr="The security-ci.yml pipeline at a glance. A push or PR to main starts three jobs in parallel: Semgrep (SAST), Trivy (SCA plus IaC) and Gitleaks (secrets, whole git history). Each job runs the same three phases. The report step never fails (|| true or exit-code &quot;0&quot;). The upload step (if: always()) sends the SARIF to the GitHub Security tab, where every finding of every severity shows. The gate step re-scans and can fail the build. Semgrep's --error and Gitleaks' --exit-code 1 fail on any finding. Trivy's two gates fail only on HIGH or CRITICAL, and the IaC gate is skipped if the SCA gate already failed. The report shows everything; the gate decides.">    </p:cNvPr>
+          <p:cNvPr id="5" name="Image 1" descr="One app, three layers. You are here: W15. W13, where it runs: a secret baked into an image layer and an IAM policy with Action * on Resource *; fix with a hardened image and least privilege. W14, what it says: the app gets a chatbot; typed text overrides its rules (prompt injection) and its reply goes into the page unescaped (XSS); fix with guardrails, secret redaction and output escaping. W15, how it ships: Semgrep, Trivy and Gitleaks check every push, a red gate fails the PR, and the app denies on error.">    </p:cNvPr>
           <p:cNvPicPr>
             <a:picLocks noChangeAspect="1"/>
           </p:cNvPicPr>
@@ -8016,8 +8429,8 @@
         </p:blipFill>
         <p:spPr>
           <a:xfrm>
-            <a:off x="1281426" y="1097280"/>
-            <a:ext cx="6581149" cy="3566160"/>
+            <a:off x="457200" y="1097280"/>
+            <a:ext cx="8229600" cy="2607754"/>
           </a:xfrm>
           <a:prstGeom prst="rect">
             <a:avLst/>
@@ -8065,7 +8478,7 @@
       </p:sp>
       <p:pic>
         <p:nvPicPr>
-          <p:cNvPr id="7" name="Image 2" descr="/private/tmp/claude-501/-Users-pop7-Library-CloudStorage-OneDrive-MonsterConnectCo--Ltd-Lecture-KOSEN69---software-security/f63a82af-e1ad-40ed-89c4-03c6ca776e3f/scratchpad/vis-w15/slides/pptx/assets/logo-small.png">    </p:cNvPr>
+          <p:cNvPr id="7" name="Image 2" descr="/private/tmp/claude-501/-Users-pop7-Library-CloudStorage-OneDrive-MonsterConnectCo--Ltd-Lecture-KOSEN69---software-security/f63a82af-e1ad-40ed-89c4-03c6ca776e3f/scratchpad/lq-anim/slides/pptx/assets/logo-small.png">    </p:cNvPr>
           <p:cNvPicPr>
             <a:picLocks noChangeAspect="1"/>
           </p:cNvPicPr>
@@ -8203,49 +8616,46 @@
                 <a:ea typeface="Arial" pitchFamily="34" charset="-122"/>
                 <a:cs typeface="Arial" pitchFamily="34" charset="-120"/>
               </a:rPr>
-              <a:t>A security gate</a:t>
+              <a:t>One push, three jobs</a:t>
             </a:r>
             <a:endParaRPr lang="en-US" sz="2600" dirty="0"/>
           </a:p>
         </p:txBody>
       </p:sp>
-      <p:sp>
-        <p:nvSpPr>
-          <p:cNvPr id="5" name="Shape 2"/>
-          <p:cNvSpPr/>
-          <p:nvPr/>
-        </p:nvSpPr>
-        <p:spPr>
-          <a:xfrm>
-            <a:off x="457200" y="1325880"/>
-            <a:ext cx="8229600" cy="1371600"/>
-          </a:xfrm>
-          <a:prstGeom prst="roundRect">
-            <a:avLst>
-              <a:gd name="adj" fmla="val 4000"/>
-            </a:avLst>
-          </a:prstGeom>
-          <a:solidFill>
-            <a:srgbClr val="0A1020"/>
-          </a:solidFill>
-          <a:ln w="12700">
-            <a:solidFill>
-              <a:srgbClr val="E8EDF3"/>
-            </a:solidFill>
-            <a:prstDash val="solid"/>
-          </a:ln>
-        </p:spPr>
-      </p:sp>
-      <p:sp>
-        <p:nvSpPr>
-          <p:cNvPr id="6" name="Text 3"/>
-          <p:cNvSpPr/>
-          <p:nvPr/>
-        </p:nvSpPr>
-        <p:spPr>
-          <a:xfrm>
-            <a:off x="640080" y="1399032"/>
-            <a:ext cx="7863840" cy="1225296"/>
+      <p:pic>
+        <p:nvPicPr>
+          <p:cNvPr id="5" name="Image 1" descr="The security-ci.yml pipeline at a glance. A push or PR to main starts three jobs in parallel: Semgrep (SAST), Trivy (SCA plus IaC) and Gitleaks (secrets, whole git history). Each job runs the same three phases. The report step never fails (|| true or exit-code &quot;0&quot;). The upload step (if: always()) sends the SARIF to the GitHub Security tab, where every finding of every severity shows. The gate step re-scans and can fail the build. Semgrep's --error and Gitleaks' --exit-code 1 fail on any finding. Trivy's two gates fail only on HIGH or CRITICAL, and the IaC gate is skipped if the SCA gate already failed. The report shows everything; the gate decides.">    </p:cNvPr>
+          <p:cNvPicPr>
+            <a:picLocks noChangeAspect="1"/>
+          </p:cNvPicPr>
+          <p:nvPr/>
+        </p:nvPicPr>
+        <p:blipFill>
+          <a:blip r:embed="rId2"/>
+          <a:stretch>
+            <a:fillRect/>
+          </a:stretch>
+        </p:blipFill>
+        <p:spPr>
+          <a:xfrm>
+            <a:off x="1281426" y="1097280"/>
+            <a:ext cx="6581149" cy="3566160"/>
+          </a:xfrm>
+          <a:prstGeom prst="rect">
+            <a:avLst/>
+          </a:prstGeom>
+        </p:spPr>
+      </p:pic>
+      <p:sp>
+        <p:nvSpPr>
+          <p:cNvPr id="6" name="Text 2"/>
+          <p:cNvSpPr/>
+          <p:nvPr/>
+        </p:nvSpPr>
+        <p:spPr>
+          <a:xfrm>
+            <a:off x="457200" y="4800600"/>
+            <a:ext cx="6949440" cy="274320"/>
           </a:xfrm>
           <a:prstGeom prst="rect">
             <a:avLst/>
@@ -8254,225 +8664,21 @@
           <a:ln/>
         </p:spPr>
         <p:txBody>
-          <a:bodyPr wrap="square" lIns="0" tIns="0" rIns="0" bIns="0" rtlCol="0" anchor="t">
-            <a:normAutofit/>
-          </a:bodyPr>
+          <a:bodyPr wrap="square" lIns="0" tIns="0" rIns="0" bIns="0" rtlCol="0" anchor="ctr"/>
           <a:lstStyle/>
           <a:p>
             <a:pPr indent="0" marL="0">
               <a:buNone/>
             </a:pPr>
             <a:r>
-              <a:rPr lang="en-US" sz="1150" dirty="0">
-                <a:solidFill>
-                  <a:srgbClr val="9FE7D6"/>
-                </a:solidFill>
-                <a:latin typeface="Courier New" pitchFamily="34" charset="0"/>
-                <a:ea typeface="Courier New" pitchFamily="34" charset="-122"/>
-                <a:cs typeface="Courier New" pitchFamily="34" charset="-120"/>
-              </a:rPr>
-              <a:t># .github/workflows/security-ci.yml</a:t>
-            </a:r>
-            <a:endParaRPr lang="en-US" sz="1150" dirty="0"/>
-          </a:p>
-          <a:p>
-            <a:pPr indent="0" marL="0">
-              <a:buNone/>
-            </a:pPr>
-            <a:r>
-              <a:rPr lang="en-US" sz="1150" dirty="0">
-                <a:solidFill>
-                  <a:srgbClr val="9FE7D6"/>
-                </a:solidFill>
-                <a:latin typeface="Courier New" pitchFamily="34" charset="0"/>
-                <a:ea typeface="Courier New" pitchFamily="34" charset="-122"/>
-                <a:cs typeface="Courier New" pitchFamily="34" charset="-120"/>
-              </a:rPr>
-              <a:t>- semgrep   # SAST</a:t>
-            </a:r>
-            <a:endParaRPr lang="en-US" sz="1150" dirty="0"/>
-          </a:p>
-          <a:p>
-            <a:pPr indent="0" marL="0">
-              <a:buNone/>
-            </a:pPr>
-            <a:r>
-              <a:rPr lang="en-US" sz="1150" dirty="0">
-                <a:solidFill>
-                  <a:srgbClr val="9FE7D6"/>
-                </a:solidFill>
-                <a:latin typeface="Courier New" pitchFamily="34" charset="0"/>
-                <a:ea typeface="Courier New" pitchFamily="34" charset="-122"/>
-                <a:cs typeface="Courier New" pitchFamily="34" charset="-120"/>
-              </a:rPr>
-              <a:t>- trivy     # SCA (fs) + IaC (config) — image scan is optional, off by default</a:t>
-            </a:r>
-            <a:endParaRPr lang="en-US" sz="1150" dirty="0"/>
-          </a:p>
-          <a:p>
-            <a:pPr indent="0" marL="0">
-              <a:buNone/>
-            </a:pPr>
-            <a:r>
-              <a:rPr lang="en-US" sz="1150" dirty="0">
-                <a:solidFill>
-                  <a:srgbClr val="9FE7D6"/>
-                </a:solidFill>
-                <a:latin typeface="Courier New" pitchFamily="34" charset="0"/>
-                <a:ea typeface="Courier New" pitchFamily="34" charset="-122"/>
-                <a:cs typeface="Courier New" pitchFamily="34" charset="-120"/>
-              </a:rPr>
-              <a:t>- gitleaks  # secrets + git history</a:t>
-            </a:r>
-            <a:endParaRPr lang="en-US" sz="1150" dirty="0"/>
-          </a:p>
-          <a:p>
-            <a:pPr indent="0" marL="0">
-              <a:buNone/>
-            </a:pPr>
-            <a:r>
-              <a:rPr lang="en-US" sz="1150" dirty="0">
-                <a:solidFill>
-                  <a:srgbClr val="9FE7D6"/>
-                </a:solidFill>
-                <a:latin typeface="Courier New" pitchFamily="34" charset="0"/>
-                <a:ea typeface="Courier New" pitchFamily="34" charset="-122"/>
-                <a:cs typeface="Courier New" pitchFamily="34" charset="-120"/>
-              </a:rPr>
-              <a:t># each tool runs TWICE: once to report (SARIF, always), once to gate (fails the build)</a:t>
-            </a:r>
-            <a:endParaRPr lang="en-US" sz="1150" dirty="0"/>
-          </a:p>
-        </p:txBody>
-      </p:sp>
-      <p:sp>
-        <p:nvSpPr>
-          <p:cNvPr id="7" name="Shape 4"/>
-          <p:cNvSpPr/>
-          <p:nvPr/>
-        </p:nvSpPr>
-        <p:spPr>
-          <a:xfrm>
-            <a:off x="457200" y="2862072"/>
-            <a:ext cx="8229600" cy="1097280"/>
-          </a:xfrm>
-          <a:prstGeom prst="roundRect">
-            <a:avLst>
-              <a:gd name="adj" fmla="val 6667"/>
-            </a:avLst>
-          </a:prstGeom>
-          <a:solidFill>
-            <a:srgbClr val="F1F5F9"/>
-          </a:solidFill>
-          <a:ln/>
-          <a:effectLst>
-            <a:outerShdw sx="100000" sy="100000" kx="0" ky="0" algn="bl" rotWithShape="0" blurRad="76200" dist="25400" dir="5400000">
-              <a:srgbClr val="000000">
-                <a:alpha val="12000"/>
-              </a:srgbClr>
-            </a:outerShdw>
-          </a:effectLst>
-        </p:spPr>
-      </p:sp>
-      <p:sp>
-        <p:nvSpPr>
-          <p:cNvPr id="8" name="Text 5"/>
-          <p:cNvSpPr/>
-          <p:nvPr/>
-        </p:nvSpPr>
-        <p:spPr>
-          <a:xfrm>
-            <a:off x="731520" y="2971800"/>
-            <a:ext cx="7680960" cy="877824"/>
-          </a:xfrm>
-          <a:prstGeom prst="rect">
-            <a:avLst/>
-          </a:prstGeom>
-          <a:noFill/>
-          <a:ln/>
-        </p:spPr>
-        <p:txBody>
-          <a:bodyPr wrap="square" lIns="0" tIns="0" rIns="0" bIns="0" rtlCol="0" anchor="t">
-            <a:normAutofit/>
-          </a:bodyPr>
-          <a:lstStyle/>
-          <a:p>
-            <a:pPr marL="342900" indent="-342900">
-              <a:spcAft>
-                <a:spcPts val="600"/>
-              </a:spcAft>
-              <a:buSzPct val="100000"/>
-              <a:buChar char="•"/>
-            </a:pPr>
-            <a:r>
-              <a:rPr lang="en-US" sz="1400" dirty="0">
-                <a:solidFill>
-                  <a:srgbClr val="1F2937"/>
+              <a:rPr lang="en-US" sz="900" dirty="0">
+                <a:solidFill>
+                  <a:srgbClr val="64748B"/>
                 </a:solidFill>
                 <a:latin typeface="Calibri" pitchFamily="34" charset="0"/>
                 <a:ea typeface="Calibri" pitchFamily="34" charset="-122"/>
                 <a:cs typeface="Calibri" pitchFamily="34" charset="-120"/>
               </a:rPr>
-              <a:t>Least-privilege token: contents: read, security-events: write — don't hand the pipeline more than it needs</a:t>
-            </a:r>
-            <a:endParaRPr lang="en-US" sz="1400" dirty="0"/>
-          </a:p>
-          <a:p>
-            <a:pPr marL="342900" indent="-342900">
-              <a:spcAft>
-                <a:spcPts val="600"/>
-              </a:spcAft>
-              <a:buSzPct val="100000"/>
-              <a:buChar char="•"/>
-            </a:pPr>
-            <a:r>
-              <a:rPr lang="en-US" sz="1400" dirty="0">
-                <a:solidFill>
-                  <a:srgbClr val="1F2937"/>
-                </a:solidFill>
-                <a:latin typeface="Calibri" pitchFamily="34" charset="0"/>
-                <a:ea typeface="Calibri" pitchFamily="34" charset="-122"/>
-                <a:cs typeface="Calibri" pitchFamily="34" charset="-120"/>
-              </a:rPr>
-              <a:t>Upload SARIF → GitHub Security tab</a:t>
-            </a:r>
-            <a:endParaRPr lang="en-US" sz="1400" dirty="0"/>
-          </a:p>
-        </p:txBody>
-      </p:sp>
-      <p:sp>
-        <p:nvSpPr>
-          <p:cNvPr id="9" name="Text 6"/>
-          <p:cNvSpPr/>
-          <p:nvPr/>
-        </p:nvSpPr>
-        <p:spPr>
-          <a:xfrm>
-            <a:off x="457200" y="4800600"/>
-            <a:ext cx="6949440" cy="274320"/>
-          </a:xfrm>
-          <a:prstGeom prst="rect">
-            <a:avLst/>
-          </a:prstGeom>
-          <a:noFill/>
-          <a:ln/>
-        </p:spPr>
-        <p:txBody>
-          <a:bodyPr wrap="square" lIns="0" tIns="0" rIns="0" bIns="0" rtlCol="0" anchor="ctr"/>
-          <a:lstStyle/>
-          <a:p>
-            <a:pPr indent="0" marL="0">
-              <a:buNone/>
-            </a:pPr>
-            <a:r>
-              <a:rPr lang="en-US" sz="900" dirty="0">
-                <a:solidFill>
-                  <a:srgbClr val="64748B"/>
-                </a:solidFill>
-                <a:latin typeface="Calibri" pitchFamily="34" charset="0"/>
-                <a:ea typeface="Calibri" pitchFamily="34" charset="-122"/>
-                <a:cs typeface="Calibri" pitchFamily="34" charset="-120"/>
-              </a:rPr>
               <a:t>Software Security · Week 15</a:t>
             </a:r>
             <a:endParaRPr lang="en-US" sz="900" dirty="0"/>
@@ -8481,14 +8687,14 @@
       </p:sp>
       <p:pic>
         <p:nvPicPr>
-          <p:cNvPr id="10" name="Image 1" descr="/private/tmp/claude-501/-Users-pop7-Library-CloudStorage-OneDrive-MonsterConnectCo--Ltd-Lecture-KOSEN69---software-security/f63a82af-e1ad-40ed-89c4-03c6ca776e3f/scratchpad/vis-w15/slides/pptx/assets/logo-small.png">    </p:cNvPr>
+          <p:cNvPr id="7" name="Image 2" descr="/private/tmp/claude-501/-Users-pop7-Library-CloudStorage-OneDrive-MonsterConnectCo--Ltd-Lecture-KOSEN69---software-security/f63a82af-e1ad-40ed-89c4-03c6ca776e3f/scratchpad/lq-anim/slides/pptx/assets/logo-small.png">    </p:cNvPr>
           <p:cNvPicPr>
             <a:picLocks noChangeAspect="1"/>
           </p:cNvPicPr>
           <p:nvPr/>
         </p:nvPicPr>
         <p:blipFill>
-          <a:blip r:embed="rId2"/>
+          <a:blip r:embed="rId3"/>
           <a:stretch>
             <a:fillRect/>
           </a:stretch>
@@ -8619,7 +8825,7 @@
                 <a:ea typeface="Arial" pitchFamily="34" charset="-122"/>
                 <a:cs typeface="Arial" pitchFamily="34" charset="-120"/>
               </a:rPr>
-              <a:t>A security gate (cont.)</a:t>
+              <a:t>A security gate</a:t>
             </a:r>
             <a:endParaRPr lang="en-US" sz="2600" dirty="0"/>
           </a:p>
@@ -8627,14 +8833,41 @@
       </p:sp>
       <p:sp>
         <p:nvSpPr>
-          <p:cNvPr id="5" name="Text 2"/>
-          <p:cNvSpPr/>
-          <p:nvPr/>
-        </p:nvSpPr>
-        <p:spPr>
-          <a:xfrm>
-            <a:off x="548640" y="1325880"/>
-            <a:ext cx="8046720" cy="548640"/>
+          <p:cNvPr id="5" name="Shape 2"/>
+          <p:cNvSpPr/>
+          <p:nvPr/>
+        </p:nvSpPr>
+        <p:spPr>
+          <a:xfrm>
+            <a:off x="457200" y="1325880"/>
+            <a:ext cx="8229600" cy="1371600"/>
+          </a:xfrm>
+          <a:prstGeom prst="roundRect">
+            <a:avLst>
+              <a:gd name="adj" fmla="val 4000"/>
+            </a:avLst>
+          </a:prstGeom>
+          <a:solidFill>
+            <a:srgbClr val="0A1020"/>
+          </a:solidFill>
+          <a:ln w="12700">
+            <a:solidFill>
+              <a:srgbClr val="E8EDF3"/>
+            </a:solidFill>
+            <a:prstDash val="solid"/>
+          </a:ln>
+        </p:spPr>
+      </p:sp>
+      <p:sp>
+        <p:nvSpPr>
+          <p:cNvPr id="6" name="Text 3"/>
+          <p:cNvSpPr/>
+          <p:nvPr/>
+        </p:nvSpPr>
+        <p:spPr>
+          <a:xfrm>
+            <a:off x="640080" y="1399032"/>
+            <a:ext cx="7863840" cy="1225296"/>
           </a:xfrm>
           <a:prstGeom prst="rect">
             <a:avLst/>
@@ -8652,6 +8885,148 @@
               <a:buNone/>
             </a:pPr>
             <a:r>
+              <a:rPr lang="en-US" sz="1150" dirty="0">
+                <a:solidFill>
+                  <a:srgbClr val="9FE7D6"/>
+                </a:solidFill>
+                <a:latin typeface="Courier New" pitchFamily="34" charset="0"/>
+                <a:ea typeface="Courier New" pitchFamily="34" charset="-122"/>
+                <a:cs typeface="Courier New" pitchFamily="34" charset="-120"/>
+              </a:rPr>
+              <a:t># .github/workflows/security-ci.yml</a:t>
+            </a:r>
+            <a:endParaRPr lang="en-US" sz="1150" dirty="0"/>
+          </a:p>
+          <a:p>
+            <a:pPr indent="0" marL="0">
+              <a:buNone/>
+            </a:pPr>
+            <a:r>
+              <a:rPr lang="en-US" sz="1150" dirty="0">
+                <a:solidFill>
+                  <a:srgbClr val="9FE7D6"/>
+                </a:solidFill>
+                <a:latin typeface="Courier New" pitchFamily="34" charset="0"/>
+                <a:ea typeface="Courier New" pitchFamily="34" charset="-122"/>
+                <a:cs typeface="Courier New" pitchFamily="34" charset="-120"/>
+              </a:rPr>
+              <a:t>- semgrep   # SAST</a:t>
+            </a:r>
+            <a:endParaRPr lang="en-US" sz="1150" dirty="0"/>
+          </a:p>
+          <a:p>
+            <a:pPr indent="0" marL="0">
+              <a:buNone/>
+            </a:pPr>
+            <a:r>
+              <a:rPr lang="en-US" sz="1150" dirty="0">
+                <a:solidFill>
+                  <a:srgbClr val="9FE7D6"/>
+                </a:solidFill>
+                <a:latin typeface="Courier New" pitchFamily="34" charset="0"/>
+                <a:ea typeface="Courier New" pitchFamily="34" charset="-122"/>
+                <a:cs typeface="Courier New" pitchFamily="34" charset="-120"/>
+              </a:rPr>
+              <a:t>- trivy     # SCA (fs) + IaC (config) — image scan is optional, off by default</a:t>
+            </a:r>
+            <a:endParaRPr lang="en-US" sz="1150" dirty="0"/>
+          </a:p>
+          <a:p>
+            <a:pPr indent="0" marL="0">
+              <a:buNone/>
+            </a:pPr>
+            <a:r>
+              <a:rPr lang="en-US" sz="1150" dirty="0">
+                <a:solidFill>
+                  <a:srgbClr val="9FE7D6"/>
+                </a:solidFill>
+                <a:latin typeface="Courier New" pitchFamily="34" charset="0"/>
+                <a:ea typeface="Courier New" pitchFamily="34" charset="-122"/>
+                <a:cs typeface="Courier New" pitchFamily="34" charset="-120"/>
+              </a:rPr>
+              <a:t>- gitleaks  # secrets + git history</a:t>
+            </a:r>
+            <a:endParaRPr lang="en-US" sz="1150" dirty="0"/>
+          </a:p>
+          <a:p>
+            <a:pPr indent="0" marL="0">
+              <a:buNone/>
+            </a:pPr>
+            <a:r>
+              <a:rPr lang="en-US" sz="1150" dirty="0">
+                <a:solidFill>
+                  <a:srgbClr val="9FE7D6"/>
+                </a:solidFill>
+                <a:latin typeface="Courier New" pitchFamily="34" charset="0"/>
+                <a:ea typeface="Courier New" pitchFamily="34" charset="-122"/>
+                <a:cs typeface="Courier New" pitchFamily="34" charset="-120"/>
+              </a:rPr>
+              <a:t># each tool runs TWICE: once to report (SARIF, always), once to gate (fails the build)</a:t>
+            </a:r>
+            <a:endParaRPr lang="en-US" sz="1150" dirty="0"/>
+          </a:p>
+        </p:txBody>
+      </p:sp>
+      <p:sp>
+        <p:nvSpPr>
+          <p:cNvPr id="7" name="Shape 4"/>
+          <p:cNvSpPr/>
+          <p:nvPr/>
+        </p:nvSpPr>
+        <p:spPr>
+          <a:xfrm>
+            <a:off x="457200" y="2862072"/>
+            <a:ext cx="8229600" cy="1609344"/>
+          </a:xfrm>
+          <a:prstGeom prst="roundRect">
+            <a:avLst>
+              <a:gd name="adj" fmla="val 4545"/>
+            </a:avLst>
+          </a:prstGeom>
+          <a:solidFill>
+            <a:srgbClr val="F1F5F9"/>
+          </a:solidFill>
+          <a:ln/>
+          <a:effectLst>
+            <a:outerShdw sx="100000" sy="100000" kx="0" ky="0" algn="bl" rotWithShape="0" blurRad="76200" dist="25400" dir="5400000">
+              <a:srgbClr val="000000">
+                <a:alpha val="12000"/>
+              </a:srgbClr>
+            </a:outerShdw>
+          </a:effectLst>
+        </p:spPr>
+      </p:sp>
+      <p:sp>
+        <p:nvSpPr>
+          <p:cNvPr id="8" name="Text 5"/>
+          <p:cNvSpPr/>
+          <p:nvPr/>
+        </p:nvSpPr>
+        <p:spPr>
+          <a:xfrm>
+            <a:off x="731520" y="2971800"/>
+            <a:ext cx="7680960" cy="1389888"/>
+          </a:xfrm>
+          <a:prstGeom prst="rect">
+            <a:avLst/>
+          </a:prstGeom>
+          <a:noFill/>
+          <a:ln/>
+        </p:spPr>
+        <p:txBody>
+          <a:bodyPr wrap="square" lIns="0" tIns="0" rIns="0" bIns="0" rtlCol="0" anchor="t">
+            <a:normAutofit/>
+          </a:bodyPr>
+          <a:lstStyle/>
+          <a:p>
+            <a:pPr marL="342900" indent="-342900">
+              <a:spcAft>
+                <a:spcPts val="600"/>
+              </a:spcAft>
+              <a:buSzPct val="100000"/>
+              <a:buChar char="•"/>
+            </a:pPr>
+            <a:r>
               <a:rPr lang="en-US" sz="1400" dirty="0">
                 <a:solidFill>
                   <a:srgbClr val="1F2937"/>
@@ -8660,45 +9035,87 @@
                 <a:ea typeface="Calibri" pitchFamily="34" charset="-122"/>
                 <a:cs typeface="Calibri" pitchFamily="34" charset="-120"/>
               </a:rPr>
-              <a:t>Try it live: /sim/gate-check (interactive simulation, web only)</a:t>
+              <a:t>Least-privilege token: contents: read, security-events: write — don't hand the pipeline more than it needs</a:t>
             </a:r>
             <a:endParaRPr lang="en-US" sz="1400" dirty="0"/>
           </a:p>
-        </p:txBody>
-      </p:sp>
-      <p:sp>
-        <p:nvSpPr>
-          <p:cNvPr id="6" name="Text 3"/>
-          <p:cNvSpPr/>
-          <p:nvPr/>
-        </p:nvSpPr>
-        <p:spPr>
-          <a:xfrm>
-            <a:off x="457200" y="4800600"/>
-            <a:ext cx="6949440" cy="274320"/>
-          </a:xfrm>
-          <a:prstGeom prst="rect">
-            <a:avLst/>
-          </a:prstGeom>
-          <a:noFill/>
-          <a:ln/>
-        </p:spPr>
-        <p:txBody>
-          <a:bodyPr wrap="square" lIns="0" tIns="0" rIns="0" bIns="0" rtlCol="0" anchor="ctr"/>
-          <a:lstStyle/>
-          <a:p>
-            <a:pPr indent="0" marL="0">
-              <a:buNone/>
-            </a:pPr>
-            <a:r>
-              <a:rPr lang="en-US" sz="900" dirty="0">
-                <a:solidFill>
-                  <a:srgbClr val="64748B"/>
+          <a:p>
+            <a:pPr marL="342900" indent="-342900">
+              <a:spcAft>
+                <a:spcPts val="600"/>
+              </a:spcAft>
+              <a:buSzPct val="100000"/>
+              <a:buChar char="•"/>
+            </a:pPr>
+            <a:r>
+              <a:rPr lang="en-US" sz="1400" dirty="0">
+                <a:solidFill>
+                  <a:srgbClr val="1F2937"/>
                 </a:solidFill>
                 <a:latin typeface="Calibri" pitchFamily="34" charset="0"/>
                 <a:ea typeface="Calibri" pitchFamily="34" charset="-122"/>
                 <a:cs typeface="Calibri" pitchFamily="34" charset="-120"/>
               </a:rPr>
+              <a:t>Upload SARIF → GitHub Security tab</a:t>
+            </a:r>
+            <a:endParaRPr lang="en-US" sz="1400" dirty="0"/>
+          </a:p>
+          <a:p>
+            <a:pPr marL="342900" indent="-342900">
+              <a:spcAft>
+                <a:spcPts val="600"/>
+              </a:spcAft>
+              <a:buSzPct val="100000"/>
+              <a:buChar char="•"/>
+            </a:pPr>
+            <a:r>
+              <a:rPr lang="en-US" sz="1400" dirty="0">
+                <a:solidFill>
+                  <a:srgbClr val="1F2937"/>
+                </a:solidFill>
+                <a:latin typeface="Calibri" pitchFamily="34" charset="0"/>
+                <a:ea typeface="Calibri" pitchFamily="34" charset="-122"/>
+                <a:cs typeface="Calibri" pitchFamily="34" charset="-120"/>
+              </a:rPr>
+              <a:t>A red run only blocks a merge if the jobs are required checks (branch protection) — otherwise it's a warning</a:t>
+            </a:r>
+            <a:endParaRPr lang="en-US" sz="1400" dirty="0"/>
+          </a:p>
+        </p:txBody>
+      </p:sp>
+      <p:sp>
+        <p:nvSpPr>
+          <p:cNvPr id="9" name="Text 6"/>
+          <p:cNvSpPr/>
+          <p:nvPr/>
+        </p:nvSpPr>
+        <p:spPr>
+          <a:xfrm>
+            <a:off x="457200" y="4800600"/>
+            <a:ext cx="6949440" cy="274320"/>
+          </a:xfrm>
+          <a:prstGeom prst="rect">
+            <a:avLst/>
+          </a:prstGeom>
+          <a:noFill/>
+          <a:ln/>
+        </p:spPr>
+        <p:txBody>
+          <a:bodyPr wrap="square" lIns="0" tIns="0" rIns="0" bIns="0" rtlCol="0" anchor="ctr"/>
+          <a:lstStyle/>
+          <a:p>
+            <a:pPr indent="0" marL="0">
+              <a:buNone/>
+            </a:pPr>
+            <a:r>
+              <a:rPr lang="en-US" sz="900" dirty="0">
+                <a:solidFill>
+                  <a:srgbClr val="64748B"/>
+                </a:solidFill>
+                <a:latin typeface="Calibri" pitchFamily="34" charset="0"/>
+                <a:ea typeface="Calibri" pitchFamily="34" charset="-122"/>
+                <a:cs typeface="Calibri" pitchFamily="34" charset="-120"/>
+              </a:rPr>
               <a:t>Software Security · Week 15</a:t>
             </a:r>
             <a:endParaRPr lang="en-US" sz="900" dirty="0"/>
@@ -8707,7 +9124,7 @@
       </p:sp>
       <p:pic>
         <p:nvPicPr>
-          <p:cNvPr id="7" name="Image 1" descr="/private/tmp/claude-501/-Users-pop7-Library-CloudStorage-OneDrive-MonsterConnectCo--Ltd-Lecture-KOSEN69---software-security/f63a82af-e1ad-40ed-89c4-03c6ca776e3f/scratchpad/vis-w15/slides/pptx/assets/logo-small.png">    </p:cNvPr>
+          <p:cNvPr id="10" name="Image 1" descr="/private/tmp/claude-501/-Users-pop7-Library-CloudStorage-OneDrive-MonsterConnectCo--Ltd-Lecture-KOSEN69---software-security/f63a82af-e1ad-40ed-89c4-03c6ca776e3f/scratchpad/lq-anim/slides/pptx/assets/logo-small.png">    </p:cNvPr>
           <p:cNvPicPr>
             <a:picLocks noChangeAspect="1"/>
           </p:cNvPicPr>
@@ -8845,7 +9262,7 @@
                 <a:ea typeface="Arial" pitchFamily="34" charset="-122"/>
                 <a:cs typeface="Arial" pitchFamily="34" charset="-120"/>
               </a:rPr>
-              <a:t>Platform option — GitHub Advanced Security</a:t>
+              <a:t>A security gate (cont.)</a:t>
             </a:r>
             <a:endParaRPr lang="en-US" sz="2600" dirty="0"/>
           </a:p>
@@ -8853,43 +9270,14 @@
       </p:sp>
       <p:sp>
         <p:nvSpPr>
-          <p:cNvPr id="5" name="Shape 2"/>
-          <p:cNvSpPr/>
-          <p:nvPr/>
-        </p:nvSpPr>
-        <p:spPr>
-          <a:xfrm>
-            <a:off x="457200" y="1325880"/>
-            <a:ext cx="8229600" cy="1517904"/>
-          </a:xfrm>
-          <a:prstGeom prst="roundRect">
-            <a:avLst>
-              <a:gd name="adj" fmla="val 4819"/>
-            </a:avLst>
-          </a:prstGeom>
-          <a:solidFill>
-            <a:srgbClr val="F1F5F9"/>
-          </a:solidFill>
-          <a:ln/>
-          <a:effectLst>
-            <a:outerShdw sx="100000" sy="100000" kx="0" ky="0" algn="bl" rotWithShape="0" blurRad="76200" dist="25400" dir="5400000">
-              <a:srgbClr val="000000">
-                <a:alpha val="12000"/>
-              </a:srgbClr>
-            </a:outerShdw>
-          </a:effectLst>
-        </p:spPr>
-      </p:sp>
-      <p:sp>
-        <p:nvSpPr>
-          <p:cNvPr id="6" name="Text 3"/>
-          <p:cNvSpPr/>
-          <p:nvPr/>
-        </p:nvSpPr>
-        <p:spPr>
-          <a:xfrm>
-            <a:off x="731520" y="1435608"/>
-            <a:ext cx="7680960" cy="1298448"/>
+          <p:cNvPr id="5" name="Text 2"/>
+          <p:cNvSpPr/>
+          <p:nvPr/>
+        </p:nvSpPr>
+        <p:spPr>
+          <a:xfrm>
+            <a:off x="548640" y="1325880"/>
+            <a:ext cx="8046720" cy="548640"/>
           </a:xfrm>
           <a:prstGeom prst="rect">
             <a:avLst/>
@@ -8903,12 +9291,8 @@
           </a:bodyPr>
           <a:lstStyle/>
           <a:p>
-            <a:pPr marL="342900" indent="-342900">
-              <a:spcAft>
-                <a:spcPts val="600"/>
-              </a:spcAft>
-              <a:buSzPct val="100000"/>
-              <a:buChar char="•"/>
+            <a:pPr indent="0" marL="0">
+              <a:buNone/>
             </a:pPr>
             <a:r>
               <a:rPr lang="en-US" sz="1400" dirty="0">
@@ -8919,171 +9303,45 @@
                 <a:ea typeface="Calibri" pitchFamily="34" charset="-122"/>
                 <a:cs typeface="Calibri" pitchFamily="34" charset="-120"/>
               </a:rPr>
-              <a:t>CodeQL code scanning (SAST) on every PR</a:t>
+              <a:t>Try it live: /sim/gate-check (interactive simulation, web only)</a:t>
             </a:r>
             <a:endParaRPr lang="en-US" sz="1400" dirty="0"/>
           </a:p>
-          <a:p>
-            <a:pPr marL="342900" indent="-342900">
-              <a:spcAft>
-                <a:spcPts val="600"/>
-              </a:spcAft>
-              <a:buSzPct val="100000"/>
-              <a:buChar char="•"/>
-            </a:pPr>
-            <a:r>
-              <a:rPr lang="en-US" sz="1400" dirty="0">
-                <a:solidFill>
-                  <a:srgbClr val="1F2937"/>
+        </p:txBody>
+      </p:sp>
+      <p:sp>
+        <p:nvSpPr>
+          <p:cNvPr id="6" name="Text 3"/>
+          <p:cNvSpPr/>
+          <p:nvPr/>
+        </p:nvSpPr>
+        <p:spPr>
+          <a:xfrm>
+            <a:off x="457200" y="4800600"/>
+            <a:ext cx="6949440" cy="274320"/>
+          </a:xfrm>
+          <a:prstGeom prst="rect">
+            <a:avLst/>
+          </a:prstGeom>
+          <a:noFill/>
+          <a:ln/>
+        </p:spPr>
+        <p:txBody>
+          <a:bodyPr wrap="square" lIns="0" tIns="0" rIns="0" bIns="0" rtlCol="0" anchor="ctr"/>
+          <a:lstStyle/>
+          <a:p>
+            <a:pPr indent="0" marL="0">
+              <a:buNone/>
+            </a:pPr>
+            <a:r>
+              <a:rPr lang="en-US" sz="900" dirty="0">
+                <a:solidFill>
+                  <a:srgbClr val="64748B"/>
                 </a:solidFill>
                 <a:latin typeface="Calibri" pitchFamily="34" charset="0"/>
                 <a:ea typeface="Calibri" pitchFamily="34" charset="-122"/>
                 <a:cs typeface="Calibri" pitchFamily="34" charset="-120"/>
               </a:rPr>
-              <a:t>Secret scanning + push protection</a:t>
-            </a:r>
-            <a:endParaRPr lang="en-US" sz="1400" dirty="0"/>
-          </a:p>
-          <a:p>
-            <a:pPr marL="342900" indent="-342900">
-              <a:spcAft>
-                <a:spcPts val="600"/>
-              </a:spcAft>
-              <a:buSzPct val="100000"/>
-              <a:buChar char="•"/>
-            </a:pPr>
-            <a:r>
-              <a:rPr lang="en-US" sz="1400" dirty="0">
-                <a:solidFill>
-                  <a:srgbClr val="1F2937"/>
-                </a:solidFill>
-                <a:latin typeface="Calibri" pitchFamily="34" charset="0"/>
-                <a:ea typeface="Calibri" pitchFamily="34" charset="-122"/>
-                <a:cs typeface="Calibri" pitchFamily="34" charset="-120"/>
-              </a:rPr>
-              <a:t>Dependabot for vulnerable deps</a:t>
-            </a:r>
-            <a:endParaRPr lang="en-US" sz="1400" dirty="0"/>
-          </a:p>
-          <a:p>
-            <a:pPr marL="342900" indent="-342900">
-              <a:spcAft>
-                <a:spcPts val="600"/>
-              </a:spcAft>
-              <a:buSzPct val="100000"/>
-              <a:buChar char="•"/>
-            </a:pPr>
-            <a:r>
-              <a:rPr lang="en-US" sz="1400" dirty="0">
-                <a:solidFill>
-                  <a:srgbClr val="1F2937"/>
-                </a:solidFill>
-                <a:latin typeface="Calibri" pitchFamily="34" charset="0"/>
-                <a:ea typeface="Calibri" pitchFamily="34" charset="-122"/>
-                <a:cs typeface="Calibri" pitchFamily="34" charset="-120"/>
-              </a:rPr>
-              <a:t>SonarQube as a quality/SAST gate alongside</a:t>
-            </a:r>
-            <a:endParaRPr lang="en-US" sz="1400" dirty="0"/>
-          </a:p>
-        </p:txBody>
-      </p:sp>
-      <p:sp>
-        <p:nvSpPr>
-          <p:cNvPr id="7" name="Shape 4"/>
-          <p:cNvSpPr/>
-          <p:nvPr/>
-        </p:nvSpPr>
-        <p:spPr>
-          <a:xfrm>
-            <a:off x="457200" y="3008376"/>
-            <a:ext cx="8229600" cy="822960"/>
-          </a:xfrm>
-          <a:prstGeom prst="roundRect">
-            <a:avLst>
-              <a:gd name="adj" fmla="val 8889"/>
-            </a:avLst>
-          </a:prstGeom>
-          <a:solidFill>
-            <a:srgbClr val="E8EDF3"/>
-          </a:solidFill>
-          <a:ln/>
-        </p:spPr>
-      </p:sp>
-      <p:sp>
-        <p:nvSpPr>
-          <p:cNvPr id="8" name="Text 5"/>
-          <p:cNvSpPr/>
-          <p:nvPr/>
-        </p:nvSpPr>
-        <p:spPr>
-          <a:xfrm>
-            <a:off x="731520" y="3008376"/>
-            <a:ext cx="7680960" cy="822960"/>
-          </a:xfrm>
-          <a:prstGeom prst="rect">
-            <a:avLst/>
-          </a:prstGeom>
-          <a:noFill/>
-          <a:ln/>
-        </p:spPr>
-        <p:txBody>
-          <a:bodyPr wrap="square" lIns="0" tIns="0" rIns="0" bIns="0" rtlCol="0" anchor="ctr">
-            <a:normAutofit/>
-          </a:bodyPr>
-          <a:lstStyle/>
-          <a:p>
-            <a:pPr indent="0" marL="0">
-              <a:buNone/>
-            </a:pPr>
-            <a:r>
-              <a:rPr lang="en-US" sz="1400" i="1" dirty="0">
-                <a:solidFill>
-                  <a:srgbClr val="E35205"/>
-                </a:solidFill>
-                <a:latin typeface="Calibri" pitchFamily="34" charset="0"/>
-                <a:ea typeface="Calibri" pitchFamily="34" charset="-122"/>
-                <a:cs typeface="Calibri" pitchFamily="34" charset="-120"/>
-              </a:rPr>
-              <a:t>Same idea as the YAML gate — managed, in the repo.</a:t>
-            </a:r>
-            <a:endParaRPr lang="en-US" sz="1400" dirty="0"/>
-          </a:p>
-        </p:txBody>
-      </p:sp>
-      <p:sp>
-        <p:nvSpPr>
-          <p:cNvPr id="9" name="Text 6"/>
-          <p:cNvSpPr/>
-          <p:nvPr/>
-        </p:nvSpPr>
-        <p:spPr>
-          <a:xfrm>
-            <a:off x="457200" y="4800600"/>
-            <a:ext cx="6949440" cy="274320"/>
-          </a:xfrm>
-          <a:prstGeom prst="rect">
-            <a:avLst/>
-          </a:prstGeom>
-          <a:noFill/>
-          <a:ln/>
-        </p:spPr>
-        <p:txBody>
-          <a:bodyPr wrap="square" lIns="0" tIns="0" rIns="0" bIns="0" rtlCol="0" anchor="ctr"/>
-          <a:lstStyle/>
-          <a:p>
-            <a:pPr indent="0" marL="0">
-              <a:buNone/>
-            </a:pPr>
-            <a:r>
-              <a:rPr lang="en-US" sz="900" dirty="0">
-                <a:solidFill>
-                  <a:srgbClr val="64748B"/>
-                </a:solidFill>
-                <a:latin typeface="Calibri" pitchFamily="34" charset="0"/>
-                <a:ea typeface="Calibri" pitchFamily="34" charset="-122"/>
-                <a:cs typeface="Calibri" pitchFamily="34" charset="-120"/>
-              </a:rPr>
               <a:t>Software Security · Week 15</a:t>
             </a:r>
             <a:endParaRPr lang="en-US" sz="900" dirty="0"/>
@@ -9092,7 +9350,7 @@
       </p:sp>
       <p:pic>
         <p:nvPicPr>
-          <p:cNvPr id="10" name="Image 1" descr="/private/tmp/claude-501/-Users-pop7-Library-CloudStorage-OneDrive-MonsterConnectCo--Ltd-Lecture-KOSEN69---software-security/f63a82af-e1ad-40ed-89c4-03c6ca776e3f/scratchpad/vis-w15/slides/pptx/assets/logo-small.png">    </p:cNvPr>
+          <p:cNvPr id="7" name="Image 1" descr="/private/tmp/claude-501/-Users-pop7-Library-CloudStorage-OneDrive-MonsterConnectCo--Ltd-Lecture-KOSEN69---software-security/f63a82af-e1ad-40ed-89c4-03c6ca776e3f/scratchpad/lq-anim/slides/pptx/assets/logo-small.png">    </p:cNvPr>
           <p:cNvPicPr>
             <a:picLocks noChangeAspect="1"/>
           </p:cNvPicPr>
@@ -9230,7 +9488,7 @@
                 <a:ea typeface="Arial" pitchFamily="34" charset="-122"/>
                 <a:cs typeface="Arial" pitchFamily="34" charset="-120"/>
               </a:rPr>
-              <a:t>Logging, monitoring, alerting</a:t>
+              <a:t>Platform option — GitHub Advanced Security</a:t>
             </a:r>
             <a:endParaRPr lang="en-US" sz="2600" dirty="0"/>
           </a:p>
@@ -9245,11 +9503,11 @@
         <p:spPr>
           <a:xfrm>
             <a:off x="457200" y="1325880"/>
-            <a:ext cx="8229600" cy="1719072"/>
+            <a:ext cx="8229600" cy="1517904"/>
           </a:xfrm>
           <a:prstGeom prst="roundRect">
             <a:avLst>
-              <a:gd name="adj" fmla="val 4255"/>
+              <a:gd name="adj" fmla="val 4819"/>
             </a:avLst>
           </a:prstGeom>
           <a:solidFill>
@@ -9274,7 +9532,7 @@
         <p:spPr>
           <a:xfrm>
             <a:off x="731520" y="1435608"/>
-            <a:ext cx="7680960" cy="1499616"/>
+            <a:ext cx="7680960" cy="1298448"/>
           </a:xfrm>
           <a:prstGeom prst="rect">
             <a:avLst/>
@@ -9304,7 +9562,7 @@
                 <a:ea typeface="Calibri" pitchFamily="34" charset="-122"/>
                 <a:cs typeface="Calibri" pitchFamily="34" charset="-120"/>
               </a:rPr>
-              <a:t>A09:2025 — without logs you can't detect or respond</a:t>
+              <a:t>CodeQL code scanning (SAST) on every PR</a:t>
             </a:r>
             <a:endParaRPr lang="en-US" sz="1400" dirty="0"/>
           </a:p>
@@ -9325,7 +9583,7 @@
                 <a:ea typeface="Calibri" pitchFamily="34" charset="-122"/>
                 <a:cs typeface="Calibri" pitchFamily="34" charset="-120"/>
               </a:rPr>
-              <a:t>Log security events (authn, authz failures, anomalies)</a:t>
+              <a:t>Secret scanning + push protection</a:t>
             </a:r>
             <a:endParaRPr lang="en-US" sz="1400" dirty="0"/>
           </a:p>
@@ -9346,7 +9604,7 @@
                 <a:ea typeface="Calibri" pitchFamily="34" charset="-122"/>
                 <a:cs typeface="Calibri" pitchFamily="34" charset="-120"/>
               </a:rPr>
-              <a:t>Never log the secret/token value itself (CWE-532) — log reason=bad_token, not the token</a:t>
+              <a:t>Dependabot for vulnerable deps</a:t>
             </a:r>
             <a:endParaRPr lang="en-US" sz="1400" dirty="0"/>
           </a:p>
@@ -9367,7 +9625,7 @@
                 <a:ea typeface="Calibri" pitchFamily="34" charset="-122"/>
                 <a:cs typeface="Calibri" pitchFamily="34" charset="-120"/>
               </a:rPr>
-              <a:t>Alert on suspicious patterns</a:t>
+              <a:t>SonarQube as a quality/SAST gate alongside</a:t>
             </a:r>
             <a:endParaRPr lang="en-US" sz="1400" dirty="0"/>
           </a:p>
@@ -9375,14 +9633,36 @@
       </p:sp>
       <p:sp>
         <p:nvSpPr>
-          <p:cNvPr id="7" name="Text 4"/>
-          <p:cNvSpPr/>
-          <p:nvPr/>
-        </p:nvSpPr>
-        <p:spPr>
-          <a:xfrm>
-            <a:off x="457200" y="4800600"/>
-            <a:ext cx="6949440" cy="274320"/>
+          <p:cNvPr id="7" name="Shape 4"/>
+          <p:cNvSpPr/>
+          <p:nvPr/>
+        </p:nvSpPr>
+        <p:spPr>
+          <a:xfrm>
+            <a:off x="457200" y="3008376"/>
+            <a:ext cx="8229600" cy="822960"/>
+          </a:xfrm>
+          <a:prstGeom prst="roundRect">
+            <a:avLst>
+              <a:gd name="adj" fmla="val 8889"/>
+            </a:avLst>
+          </a:prstGeom>
+          <a:solidFill>
+            <a:srgbClr val="E8EDF3"/>
+          </a:solidFill>
+          <a:ln/>
+        </p:spPr>
+      </p:sp>
+      <p:sp>
+        <p:nvSpPr>
+          <p:cNvPr id="8" name="Text 5"/>
+          <p:cNvSpPr/>
+          <p:nvPr/>
+        </p:nvSpPr>
+        <p:spPr>
+          <a:xfrm>
+            <a:off x="731520" y="3008376"/>
+            <a:ext cx="7680960" cy="822960"/>
           </a:xfrm>
           <a:prstGeom prst="rect">
             <a:avLst/>
@@ -9391,21 +9671,62 @@
           <a:ln/>
         </p:spPr>
         <p:txBody>
-          <a:bodyPr wrap="square" lIns="0" tIns="0" rIns="0" bIns="0" rtlCol="0" anchor="ctr"/>
+          <a:bodyPr wrap="square" lIns="0" tIns="0" rIns="0" bIns="0" rtlCol="0" anchor="ctr">
+            <a:normAutofit/>
+          </a:bodyPr>
           <a:lstStyle/>
           <a:p>
             <a:pPr indent="0" marL="0">
               <a:buNone/>
             </a:pPr>
             <a:r>
-              <a:rPr lang="en-US" sz="900" dirty="0">
-                <a:solidFill>
-                  <a:srgbClr val="64748B"/>
+              <a:rPr lang="en-US" sz="1400" i="1" dirty="0">
+                <a:solidFill>
+                  <a:srgbClr val="E35205"/>
                 </a:solidFill>
                 <a:latin typeface="Calibri" pitchFamily="34" charset="0"/>
                 <a:ea typeface="Calibri" pitchFamily="34" charset="-122"/>
                 <a:cs typeface="Calibri" pitchFamily="34" charset="-120"/>
               </a:rPr>
+              <a:t>Same idea as the YAML gate — managed, in the repo.</a:t>
+            </a:r>
+            <a:endParaRPr lang="en-US" sz="1400" dirty="0"/>
+          </a:p>
+        </p:txBody>
+      </p:sp>
+      <p:sp>
+        <p:nvSpPr>
+          <p:cNvPr id="9" name="Text 6"/>
+          <p:cNvSpPr/>
+          <p:nvPr/>
+        </p:nvSpPr>
+        <p:spPr>
+          <a:xfrm>
+            <a:off x="457200" y="4800600"/>
+            <a:ext cx="6949440" cy="274320"/>
+          </a:xfrm>
+          <a:prstGeom prst="rect">
+            <a:avLst/>
+          </a:prstGeom>
+          <a:noFill/>
+          <a:ln/>
+        </p:spPr>
+        <p:txBody>
+          <a:bodyPr wrap="square" lIns="0" tIns="0" rIns="0" bIns="0" rtlCol="0" anchor="ctr"/>
+          <a:lstStyle/>
+          <a:p>
+            <a:pPr indent="0" marL="0">
+              <a:buNone/>
+            </a:pPr>
+            <a:r>
+              <a:rPr lang="en-US" sz="900" dirty="0">
+                <a:solidFill>
+                  <a:srgbClr val="64748B"/>
+                </a:solidFill>
+                <a:latin typeface="Calibri" pitchFamily="34" charset="0"/>
+                <a:ea typeface="Calibri" pitchFamily="34" charset="-122"/>
+                <a:cs typeface="Calibri" pitchFamily="34" charset="-120"/>
+              </a:rPr>
               <a:t>Software Security · Week 15</a:t>
             </a:r>
             <a:endParaRPr lang="en-US" sz="900" dirty="0"/>
@@ -9414,7 +9735,7 @@
       </p:sp>
       <p:pic>
         <p:nvPicPr>
-          <p:cNvPr id="8" name="Image 1" descr="/private/tmp/claude-501/-Users-pop7-Library-CloudStorage-OneDrive-MonsterConnectCo--Ltd-Lecture-KOSEN69---software-security/f63a82af-e1ad-40ed-89c4-03c6ca776e3f/scratchpad/vis-w15/slides/pptx/assets/logo-small.png">    </p:cNvPr>
+          <p:cNvPr id="10" name="Image 1" descr="/private/tmp/claude-501/-Users-pop7-Library-CloudStorage-OneDrive-MonsterConnectCo--Ltd-Lecture-KOSEN69---software-security/f63a82af-e1ad-40ed-89c4-03c6ca776e3f/scratchpad/lq-anim/slides/pptx/assets/logo-small.png">    </p:cNvPr>
           <p:cNvPicPr>
             <a:picLocks noChangeAspect="1"/>
           </p:cNvPicPr>
@@ -9552,7 +9873,7 @@
                 <a:ea typeface="Arial" pitchFamily="34" charset="-122"/>
                 <a:cs typeface="Arial" pitchFamily="34" charset="-120"/>
               </a:rPr>
-              <a:t>Detection tooling</a:t>
+              <a:t>Logging, monitoring, alerting</a:t>
             </a:r>
             <a:endParaRPr lang="en-US" sz="2600" dirty="0"/>
           </a:p>
@@ -9567,11 +9888,11 @@
         <p:spPr>
           <a:xfrm>
             <a:off x="457200" y="1325880"/>
-            <a:ext cx="8229600" cy="1517904"/>
+            <a:ext cx="8229600" cy="1719072"/>
           </a:xfrm>
           <a:prstGeom prst="roundRect">
             <a:avLst>
-              <a:gd name="adj" fmla="val 4819"/>
+              <a:gd name="adj" fmla="val 4255"/>
             </a:avLst>
           </a:prstGeom>
           <a:solidFill>
@@ -9596,7 +9917,7 @@
         <p:spPr>
           <a:xfrm>
             <a:off x="731520" y="1435608"/>
-            <a:ext cx="7680960" cy="1298448"/>
+            <a:ext cx="7680960" cy="1499616"/>
           </a:xfrm>
           <a:prstGeom prst="rect">
             <a:avLst/>
@@ -9626,7 +9947,7 @@
                 <a:ea typeface="Calibri" pitchFamily="34" charset="-122"/>
                 <a:cs typeface="Calibri" pitchFamily="34" charset="-120"/>
               </a:rPr>
-              <a:t>NIDS — Snort / Suricata (network signatures)</a:t>
+              <a:t>A09:2025 — without logs you can't detect or respond</a:t>
             </a:r>
             <a:endParaRPr lang="en-US" sz="1400" dirty="0"/>
           </a:p>
@@ -9647,7 +9968,7 @@
                 <a:ea typeface="Calibri" pitchFamily="34" charset="-122"/>
                 <a:cs typeface="Calibri" pitchFamily="34" charset="-120"/>
               </a:rPr>
-              <a:t>HIDS — OSSEC (host-based)</a:t>
+              <a:t>Log security events (authn, authz failures, anomalies)</a:t>
             </a:r>
             <a:endParaRPr lang="en-US" sz="1400" dirty="0"/>
           </a:p>
@@ -9668,7 +9989,7 @@
                 <a:ea typeface="Calibri" pitchFamily="34" charset="-122"/>
                 <a:cs typeface="Calibri" pitchFamily="34" charset="-120"/>
               </a:rPr>
-              <a:t>SIEM / stack — Security Onion bundles them + analysis</a:t>
+              <a:t>Never log the secret/token value itself (CWE-532) — log reason=bad_token, not the token</a:t>
             </a:r>
             <a:endParaRPr lang="en-US" sz="1400" dirty="0"/>
           </a:p>
@@ -9689,7 +10010,7 @@
                 <a:ea typeface="Calibri" pitchFamily="34" charset="-122"/>
                 <a:cs typeface="Calibri" pitchFamily="34" charset="-120"/>
               </a:rPr>
-              <a:t>Network visibility: TAP (lossless) vs SPAN (cheap, can drop)</a:t>
+              <a:t>Alert on suspicious patterns</a:t>
             </a:r>
             <a:endParaRPr lang="en-US" sz="1400" dirty="0"/>
           </a:p>
@@ -9736,7 +10057,7 @@
       </p:sp>
       <p:pic>
         <p:nvPicPr>
-          <p:cNvPr id="8" name="Image 1" descr="/private/tmp/claude-501/-Users-pop7-Library-CloudStorage-OneDrive-MonsterConnectCo--Ltd-Lecture-KOSEN69---software-security/f63a82af-e1ad-40ed-89c4-03c6ca776e3f/scratchpad/vis-w15/slides/pptx/assets/logo-small.png">    </p:cNvPr>
+          <p:cNvPr id="8" name="Image 1" descr="/private/tmp/claude-501/-Users-pop7-Library-CloudStorage-OneDrive-MonsterConnectCo--Ltd-Lecture-KOSEN69---software-security/f63a82af-e1ad-40ed-89c4-03c6ca776e3f/scratchpad/lq-anim/slides/pptx/assets/logo-small.png">    </p:cNvPr>
           <p:cNvPicPr>
             <a:picLocks noChangeAspect="1"/>
           </p:cNvPicPr>

--- a/slides/pptx/week15.pptx
+++ b/slides/pptx/week15.pptx
@@ -28,10 +28,9 @@
     <p:sldId id="276" r:id="rId22"/>
     <p:sldId id="277" r:id="rId23"/>
     <p:sldId id="278" r:id="rId24"/>
-    <p:sldId id="279" r:id="rId25"/>
   </p:sldIdLst>
   <p:notesMasterIdLst>
-    <p:notesMasterId r:id="rId26"/>
+    <p:notesMasterId r:id="rId25"/>
   </p:notesMasterIdLst>
   <p:sldSz cx="9144000" cy="5143500"/>
   <p:notesSz cx="5143500" cy="9144000"/>
@@ -1760,7 +1759,7 @@
           <a:p>
             <a:r>
               <a:rPr lang="en-US" dirty="0"/>
-              <a:t>Two separate targets this week, both graded: security-ci.yml is the CI gate; insecure_service.py/secure_service.py (compose, :8090/:8091) is where the local (public demo) flag lives; graded per-student flags come from the hosted instance. The "build failing" screenshot is the proof the gate actually says no — a green pipeline that never fails is useless. The worksheet grades one planted defect (Task 4); encourage all three if time allows. AI-resilient tasks count. This is also the last weekly quiz.</a:t>
+              <a:t>Recap + course wrap of the technical units. Cold-call: "why must the gate FAIL the build, not just warn?" (warnings get ignored). ~2 min.</a:t>
             </a:r>
             <a:endParaRPr lang="en-US" dirty="0"/>
           </a:p>
@@ -1848,7 +1847,7 @@
           <a:p>
             <a:r>
               <a:rPr lang="en-US" dirty="0"/>
-              <a:t>Recap + course wrap of the technical units. Cold-call: "why must the gate FAIL the build, not just warn?" (warnings get ignored). ~2 min.</a:t>
+              <a:t>Wrap: "Teaching is done — next is your capstone: ship something secure, then defend it in the final CTF. Bring your project to the studio."</a:t>
             </a:r>
             <a:endParaRPr lang="en-US" dirty="0"/>
           </a:p>
@@ -1872,94 +1871,6 @@
             <a:fld id="{F7021451-1387-4CA6-816F-3879F97B5CBC}" type="slidenum">
               <a:rPr lang="en-US"/>
               <a:t>23</a:t>
-            </a:fld>
-            <a:endParaRPr lang="en-US"/>
-          </a:p>
-        </p:txBody>
-      </p:sp>
-    </p:spTree>
-    <p:extLst>
-      <p:ext uri="{BB962C8B-B14F-4D97-AF65-F5344CB8AC3E}">
-        <p14:creationId xmlns:p14="http://schemas.microsoft.com/office/powerpoint/2010/main" val="1024086991"/>
-      </p:ext>
-    </p:extLst>
-  </p:cSld>
-  <p:clrMapOvr>
-    <a:masterClrMapping/>
-  </p:clrMapOvr>
-</p:notes>
-</file>
-
-<file path=ppt/notesSlides/notesSlide24.xml><?xml version="1.0" encoding="utf-8"?>
-<p:notes xmlns:a="http://schemas.openxmlformats.org/drawingml/2006/main" xmlns:r="http://schemas.openxmlformats.org/officeDocument/2006/relationships" xmlns:p="http://schemas.openxmlformats.org/presentationml/2006/main">
-  <p:cSld>
-    <p:spTree>
-      <p:nvGrpSpPr>
-        <p:cNvPr id="1" name=""/>
-        <p:cNvGrpSpPr/>
-        <p:nvPr/>
-      </p:nvGrpSpPr>
-      <p:grpSpPr>
-        <a:xfrm>
-          <a:off x="0" y="0"/>
-          <a:ext cx="0" cy="0"/>
-          <a:chOff x="0" y="0"/>
-          <a:chExt cx="0" cy="0"/>
-        </a:xfrm>
-      </p:grpSpPr>
-      <p:sp>
-        <p:nvSpPr>
-          <p:cNvPr id="2" name="Slide Image Placeholder 1"/>
-          <p:cNvSpPr>
-            <a:spLocks noGrp="1" noRot="1" noChangeAspect="1"/>
-          </p:cNvSpPr>
-          <p:nvPr>
-            <p:ph type="sldImg"/>
-          </p:nvPr>
-        </p:nvSpPr>
-        <p:spPr/>
-      </p:sp>
-      <p:sp>
-        <p:nvSpPr>
-          <p:cNvPr id="3" name="Notes Placeholder 2"/>
-          <p:cNvSpPr>
-            <a:spLocks noGrp="1"/>
-          </p:cNvSpPr>
-          <p:nvPr>
-            <p:ph type="body" idx="1"/>
-          </p:nvPr>
-        </p:nvSpPr>
-        <p:spPr/>
-        <p:txBody>
-          <a:bodyPr/>
-          <a:lstStyle/>
-          <a:p>
-            <a:r>
-              <a:rPr lang="en-US" dirty="0"/>
-              <a:t>Wrap: "Teaching is done — next is your capstone: ship something secure, then defend it in the final CTF. Bring your project to the studio."</a:t>
-            </a:r>
-            <a:endParaRPr lang="en-US" dirty="0"/>
-          </a:p>
-        </p:txBody>
-      </p:sp>
-      <p:sp>
-        <p:nvSpPr>
-          <p:cNvPr id="4" name="Slide Number Placeholder 3"/>
-          <p:cNvSpPr>
-            <a:spLocks noGrp="1"/>
-          </p:cNvSpPr>
-          <p:nvPr>
-            <p:ph type="sldNum" sz="quarter" idx="10"/>
-          </p:nvPr>
-        </p:nvSpPr>
-        <p:spPr/>
-        <p:txBody>
-          <a:bodyPr/>
-          <a:lstStyle/>
-          <a:p>
-            <a:fld id="{F7021451-1387-4CA6-816F-3879F97B5CBC}" type="slidenum">
-              <a:rPr lang="en-US"/>
-              <a:t>24</a:t>
             </a:fld>
             <a:endParaRPr lang="en-US"/>
           </a:p>
@@ -2930,7 +2841,7 @@
       </p:grpSpPr>
       <p:pic>
         <p:nvPicPr>
-          <p:cNvPr id="2" name="Image 0" descr="/private/tmp/claude-501/-Users-pop7-Library-CloudStorage-OneDrive-MonsterConnectCo--Ltd-Lecture-KOSEN69---software-security/f63a82af-e1ad-40ed-89c4-03c6ca776e3f/scratchpad/lq-anim/slides/pptx/assets/logo-small.png">    </p:cNvPr>
+          <p:cNvPr id="2" name="Image 0" descr="/private/tmp/claude-501/-Users-pop7-Library-CloudStorage-OneDrive-MonsterConnectCo--Ltd-Lecture-KOSEN69---software-security/f63a82af-e1ad-40ed-89c4-03c6ca776e3f/scratchpad/lq-easy/slides/pptx/assets/logo-small.png">    </p:cNvPr>
           <p:cNvPicPr>
             <a:picLocks noChangeAspect="1"/>
           </p:cNvPicPr>
@@ -3262,7 +3173,7 @@
                 <a:ea typeface="Calibri" pitchFamily="34" charset="-122"/>
                 <a:cs typeface="Calibri" pitchFamily="34" charset="-120"/>
               </a:rPr>
-              <a:t>NIDS — Snort / Suricata (network signatures)</a:t>
+              <a:t>NIDS (network intrusion detection) — Snort / Suricata watch network traffic</a:t>
             </a:r>
             <a:endParaRPr lang="en-US" sz="1400" dirty="0"/>
           </a:p>
@@ -3283,7 +3194,7 @@
                 <a:ea typeface="Calibri" pitchFamily="34" charset="-122"/>
                 <a:cs typeface="Calibri" pitchFamily="34" charset="-120"/>
               </a:rPr>
-              <a:t>HIDS — OSSEC (host-based)</a:t>
+              <a:t>HIDS (host intrusion detection) — OSSEC watches one machine</a:t>
             </a:r>
             <a:endParaRPr lang="en-US" sz="1400" dirty="0"/>
           </a:p>
@@ -3304,7 +3215,7 @@
                 <a:ea typeface="Calibri" pitchFamily="34" charset="-122"/>
                 <a:cs typeface="Calibri" pitchFamily="34" charset="-120"/>
               </a:rPr>
-              <a:t>SIEM / stack — Security Onion bundles them + analysis</a:t>
+              <a:t>SIEM (collects and connects alerts) — Security Onion bundles these tools</a:t>
             </a:r>
             <a:endParaRPr lang="en-US" sz="1400" dirty="0"/>
           </a:p>
@@ -3372,7 +3283,7 @@
       </p:sp>
       <p:pic>
         <p:nvPicPr>
-          <p:cNvPr id="8" name="Image 1" descr="/private/tmp/claude-501/-Users-pop7-Library-CloudStorage-OneDrive-MonsterConnectCo--Ltd-Lecture-KOSEN69---software-security/f63a82af-e1ad-40ed-89c4-03c6ca776e3f/scratchpad/lq-anim/slides/pptx/assets/logo-small.png">    </p:cNvPr>
+          <p:cNvPr id="8" name="Image 1" descr="/private/tmp/claude-501/-Users-pop7-Library-CloudStorage-OneDrive-MonsterConnectCo--Ltd-Lecture-KOSEN69---software-security/f63a82af-e1ad-40ed-89c4-03c6ca776e3f/scratchpad/lq-easy/slides/pptx/assets/logo-small.png">    </p:cNvPr>
           <p:cNvPicPr>
             <a:picLocks noChangeAspect="1"/>
           </p:cNvPicPr>
@@ -4230,7 +4141,7 @@
       </p:sp>
       <p:pic>
         <p:nvPicPr>
-          <p:cNvPr id="9" name="Image 1" descr="/private/tmp/claude-501/-Users-pop7-Library-CloudStorage-OneDrive-MonsterConnectCo--Ltd-Lecture-KOSEN69---software-security/f63a82af-e1ad-40ed-89c4-03c6ca776e3f/scratchpad/lq-anim/slides/pptx/assets/logo-small.png">    </p:cNvPr>
+          <p:cNvPr id="9" name="Image 1" descr="/private/tmp/claude-501/-Users-pop7-Library-CloudStorage-OneDrive-MonsterConnectCo--Ltd-Lecture-KOSEN69---software-security/f63a82af-e1ad-40ed-89c4-03c6ca776e3f/scratchpad/lq-easy/slides/pptx/assets/logo-small.png">    </p:cNvPr>
           <p:cNvPicPr>
             <a:picLocks noChangeAspect="1"/>
           </p:cNvPicPr>
@@ -4424,11 +4335,11 @@
         <p:spPr>
           <a:xfrm>
             <a:off x="457200" y="1965960"/>
-            <a:ext cx="8229600" cy="896112"/>
+            <a:ext cx="8229600" cy="1097280"/>
           </a:xfrm>
           <a:prstGeom prst="roundRect">
             <a:avLst>
-              <a:gd name="adj" fmla="val 8163"/>
+              <a:gd name="adj" fmla="val 6667"/>
             </a:avLst>
           </a:prstGeom>
           <a:solidFill>
@@ -4453,7 +4364,7 @@
         <p:spPr>
           <a:xfrm>
             <a:off x="731520" y="2075688"/>
-            <a:ext cx="7680960" cy="676656"/>
+            <a:ext cx="7680960" cy="877824"/>
           </a:xfrm>
           <a:prstGeom prst="rect">
             <a:avLst/>
@@ -4483,7 +4394,7 @@
                 <a:ea typeface="Calibri" pitchFamily="34" charset="-122"/>
                 <a:cs typeface="Calibri" pitchFamily="34" charset="-120"/>
               </a:rPr>
-              <a:t>Preserve order of volatility: memory → temp files → disk → logs</a:t>
+              <a:t>Collect what disappears first (order of volatility): memory → temp files → disk → logs</a:t>
             </a:r>
             <a:endParaRPr lang="en-US" sz="1400" dirty="0"/>
           </a:p>
@@ -4551,7 +4462,7 @@
       </p:sp>
       <p:pic>
         <p:nvPicPr>
-          <p:cNvPr id="9" name="Image 1" descr="/private/tmp/claude-501/-Users-pop7-Library-CloudStorage-OneDrive-MonsterConnectCo--Ltd-Lecture-KOSEN69---software-security/f63a82af-e1ad-40ed-89c4-03c6ca776e3f/scratchpad/lq-anim/slides/pptx/assets/logo-small.png">    </p:cNvPr>
+          <p:cNvPr id="9" name="Image 1" descr="/private/tmp/claude-501/-Users-pop7-Library-CloudStorage-OneDrive-MonsterConnectCo--Ltd-Lecture-KOSEN69---software-security/f63a82af-e1ad-40ed-89c4-03c6ca776e3f/scratchpad/lq-easy/slides/pptx/assets/logo-small.png">    </p:cNvPr>
           <p:cNvPicPr>
             <a:picLocks noChangeAspect="1"/>
           </p:cNvPicPr>
@@ -4852,7 +4763,7 @@
       </p:sp>
       <p:pic>
         <p:nvPicPr>
-          <p:cNvPr id="8" name="Image 1" descr="/private/tmp/claude-501/-Users-pop7-Library-CloudStorage-OneDrive-MonsterConnectCo--Ltd-Lecture-KOSEN69---software-security/f63a82af-e1ad-40ed-89c4-03c6ca776e3f/scratchpad/lq-anim/slides/pptx/assets/logo-small.png">    </p:cNvPr>
+          <p:cNvPr id="8" name="Image 1" descr="/private/tmp/claude-501/-Users-pop7-Library-CloudStorage-OneDrive-MonsterConnectCo--Ltd-Lecture-KOSEN69---software-security/f63a82af-e1ad-40ed-89c4-03c6ca776e3f/scratchpad/lq-easy/slides/pptx/assets/logo-small.png">    </p:cNvPr>
           <p:cNvPicPr>
             <a:picLocks noChangeAspect="1"/>
           </p:cNvPicPr>
@@ -5153,7 +5064,7 @@
       </p:sp>
       <p:pic>
         <p:nvPicPr>
-          <p:cNvPr id="8" name="Image 1" descr="/private/tmp/claude-501/-Users-pop7-Library-CloudStorage-OneDrive-MonsterConnectCo--Ltd-Lecture-KOSEN69---software-security/f63a82af-e1ad-40ed-89c4-03c6ca776e3f/scratchpad/lq-anim/slides/pptx/assets/logo-small.png">    </p:cNvPr>
+          <p:cNvPr id="8" name="Image 1" descr="/private/tmp/claude-501/-Users-pop7-Library-CloudStorage-OneDrive-MonsterConnectCo--Ltd-Lecture-KOSEN69---software-security/f63a82af-e1ad-40ed-89c4-03c6ca776e3f/scratchpad/lq-easy/slides/pptx/assets/logo-small.png">    </p:cNvPr>
           <p:cNvPicPr>
             <a:picLocks noChangeAspect="1"/>
           </p:cNvPicPr>
@@ -5362,7 +5273,7 @@
       </p:sp>
       <p:pic>
         <p:nvPicPr>
-          <p:cNvPr id="7" name="Image 2" descr="/private/tmp/claude-501/-Users-pop7-Library-CloudStorage-OneDrive-MonsterConnectCo--Ltd-Lecture-KOSEN69---software-security/f63a82af-e1ad-40ed-89c4-03c6ca776e3f/scratchpad/lq-anim/slides/pptx/assets/logo-small.png">    </p:cNvPr>
+          <p:cNvPr id="7" name="Image 2" descr="/private/tmp/claude-501/-Users-pop7-Library-CloudStorage-OneDrive-MonsterConnectCo--Ltd-Lecture-KOSEN69---software-security/f63a82af-e1ad-40ed-89c4-03c6ca776e3f/scratchpad/lq-easy/slides/pptx/assets/logo-small.png">    </p:cNvPr>
           <p:cNvPicPr>
             <a:picLocks noChangeAspect="1"/>
           </p:cNvPicPr>
@@ -5605,7 +5516,7 @@
       </p:sp>
       <p:pic>
         <p:nvPicPr>
-          <p:cNvPr id="7" name="Image 1" descr="/private/tmp/claude-501/-Users-pop7-Library-CloudStorage-OneDrive-MonsterConnectCo--Ltd-Lecture-KOSEN69---software-security/f63a82af-e1ad-40ed-89c4-03c6ca776e3f/scratchpad/lq-anim/slides/pptx/assets/logo-small.png">    </p:cNvPr>
+          <p:cNvPr id="7" name="Image 1" descr="/private/tmp/claude-501/-Users-pop7-Library-CloudStorage-OneDrive-MonsterConnectCo--Ltd-Lecture-KOSEN69---software-security/f63a82af-e1ad-40ed-89c4-03c6ca776e3f/scratchpad/lq-easy/slides/pptx/assets/logo-small.png">    </p:cNvPr>
           <p:cNvPicPr>
             <a:picLocks noChangeAspect="1"/>
           </p:cNvPicPr>
@@ -5758,11 +5669,11 @@
         <p:spPr>
           <a:xfrm>
             <a:off x="457200" y="1325880"/>
-            <a:ext cx="8229600" cy="2615184"/>
+            <a:ext cx="8229600" cy="2322576"/>
           </a:xfrm>
           <a:prstGeom prst="roundRect">
             <a:avLst>
-              <a:gd name="adj" fmla="val 2797"/>
+              <a:gd name="adj" fmla="val 3150"/>
             </a:avLst>
           </a:prstGeom>
           <a:solidFill>
@@ -5787,7 +5698,7 @@
         <p:spPr>
           <a:xfrm>
             <a:off x="731520" y="1435608"/>
-            <a:ext cx="7680960" cy="2395728"/>
+            <a:ext cx="7680960" cy="2103120"/>
           </a:xfrm>
           <a:prstGeom prst="rect">
             <a:avLst/>
@@ -5817,7 +5728,7 @@
                 <a:ea typeface="Calibri" pitchFamily="34" charset="-122"/>
                 <a:cs typeface="Calibri" pitchFamily="34" charset="-120"/>
               </a:rPr>
-              <a:t>Blue: build the gate (Semgrep + Trivy + Gitleaks), fail on HIGH/CRITICAL, add security logging that fails closed</a:t>
+              <a:t>Blue: set up the gate (Semgrep + Trivy + Gitleaks), fail on HIGH/CRITICAL, log security events and deny on error</a:t>
             </a:r>
             <a:endParaRPr lang="en-US" sz="1400" dirty="0"/>
           </a:p>
@@ -5838,7 +5749,7 @@
                 <a:ea typeface="Calibri" pitchFamily="34" charset="-122"/>
                 <a:cs typeface="Calibri" pitchFamily="34" charset="-120"/>
               </a:rPr>
-              <a:t>Red: one planted defect per PR, aimed at a gate — outdated dependency (Trivy SCA), a Dockerfile running as root (Trivy config), a hardcoded token (Gitleaks). chmod 777 and FROM:latest stay green: that's a blind spot, not a Task 4 screenshot</a:t>
+              <a:t>Red: one planted defect per PR — an old dependency (Trivy SCA), a Dockerfile running as root (Trivy config), or a hard-coded token (Gitleaks)</a:t>
             </a:r>
             <a:endParaRPr lang="en-US" sz="1400" dirty="0"/>
           </a:p>
@@ -5859,45 +5770,66 @@
                 <a:ea typeface="Calibri" pitchFamily="34" charset="-122"/>
                 <a:cs typeface="Calibri" pitchFamily="34" charset="-120"/>
               </a:rPr>
-              <a:t>Score: Blue per catch, Red per defect that slips through (a blind spot found — propose the rule that would catch it); then leak the flag from the fail-open /admin bypass in insecure_service.py (a public demo value on a local run; your personal flag comes from your hosted instance)</a:t>
+              <a:t>Score: Blue +1 per catch · Red +1 per defect that slips through (e.g. chmod 777, FROM :latest stay green) — then propose a rule that would catch it</a:t>
             </a:r>
             <a:endParaRPr lang="en-US" sz="1400" dirty="0"/>
           </a:p>
-        </p:txBody>
-      </p:sp>
-      <p:sp>
-        <p:nvSpPr>
-          <p:cNvPr id="7" name="Text 4"/>
-          <p:cNvSpPr/>
-          <p:nvPr/>
-        </p:nvSpPr>
-        <p:spPr>
-          <a:xfrm>
-            <a:off x="457200" y="4800600"/>
-            <a:ext cx="6949440" cy="274320"/>
-          </a:xfrm>
-          <a:prstGeom prst="rect">
-            <a:avLst/>
-          </a:prstGeom>
-          <a:noFill/>
-          <a:ln/>
-        </p:spPr>
-        <p:txBody>
-          <a:bodyPr wrap="square" lIns="0" tIns="0" rIns="0" bIns="0" rtlCol="0" anchor="ctr"/>
-          <a:lstStyle/>
-          <a:p>
-            <a:pPr indent="0" marL="0">
-              <a:buNone/>
-            </a:pPr>
-            <a:r>
-              <a:rPr lang="en-US" sz="900" dirty="0">
-                <a:solidFill>
-                  <a:srgbClr val="64748B"/>
+          <a:p>
+            <a:pPr marL="342900" indent="-342900">
+              <a:spcAft>
+                <a:spcPts val="600"/>
+              </a:spcAft>
+              <a:buSzPct val="100000"/>
+              <a:buChar char="•"/>
+            </a:pPr>
+            <a:r>
+              <a:rPr lang="en-US" sz="1400" dirty="0">
+                <a:solidFill>
+                  <a:srgbClr val="1F2937"/>
                 </a:solidFill>
                 <a:latin typeface="Calibri" pitchFamily="34" charset="0"/>
                 <a:ea typeface="Calibri" pitchFamily="34" charset="-122"/>
                 <a:cs typeface="Calibri" pitchFamily="34" charset="-120"/>
               </a:rPr>
+              <a:t>Flag: leak it from the fail-open /admin in insecure_service.py (local run = demo flag; graded flag = your hosted instance)</a:t>
+            </a:r>
+            <a:endParaRPr lang="en-US" sz="1400" dirty="0"/>
+          </a:p>
+        </p:txBody>
+      </p:sp>
+      <p:sp>
+        <p:nvSpPr>
+          <p:cNvPr id="7" name="Text 4"/>
+          <p:cNvSpPr/>
+          <p:nvPr/>
+        </p:nvSpPr>
+        <p:spPr>
+          <a:xfrm>
+            <a:off x="457200" y="4800600"/>
+            <a:ext cx="6949440" cy="274320"/>
+          </a:xfrm>
+          <a:prstGeom prst="rect">
+            <a:avLst/>
+          </a:prstGeom>
+          <a:noFill/>
+          <a:ln/>
+        </p:spPr>
+        <p:txBody>
+          <a:bodyPr wrap="square" lIns="0" tIns="0" rIns="0" bIns="0" rtlCol="0" anchor="ctr"/>
+          <a:lstStyle/>
+          <a:p>
+            <a:pPr indent="0" marL="0">
+              <a:buNone/>
+            </a:pPr>
+            <a:r>
+              <a:rPr lang="en-US" sz="900" dirty="0">
+                <a:solidFill>
+                  <a:srgbClr val="64748B"/>
+                </a:solidFill>
+                <a:latin typeface="Calibri" pitchFamily="34" charset="0"/>
+                <a:ea typeface="Calibri" pitchFamily="34" charset="-122"/>
+                <a:cs typeface="Calibri" pitchFamily="34" charset="-120"/>
+              </a:rPr>
               <a:t>Software Security · Week 15</a:t>
             </a:r>
             <a:endParaRPr lang="en-US" sz="900" dirty="0"/>
@@ -5906,7 +5838,7 @@
       </p:sp>
       <p:pic>
         <p:nvPicPr>
-          <p:cNvPr id="8" name="Image 1" descr="/private/tmp/claude-501/-Users-pop7-Library-CloudStorage-OneDrive-MonsterConnectCo--Ltd-Lecture-KOSEN69---software-security/f63a82af-e1ad-40ed-89c4-03c6ca776e3f/scratchpad/lq-anim/slides/pptx/assets/logo-small.png">    </p:cNvPr>
+          <p:cNvPr id="8" name="Image 1" descr="/private/tmp/claude-501/-Users-pop7-Library-CloudStorage-OneDrive-MonsterConnectCo--Ltd-Lecture-KOSEN69---software-security/f63a82af-e1ad-40ed-89c4-03c6ca776e3f/scratchpad/lq-easy/slides/pptx/assets/logo-small.png">    </p:cNvPr>
           <p:cNvPicPr>
             <a:picLocks noChangeAspect="1"/>
           </p:cNvPicPr>
@@ -6115,7 +6047,7 @@
       </p:sp>
       <p:pic>
         <p:nvPicPr>
-          <p:cNvPr id="7" name="Image 2" descr="/private/tmp/claude-501/-Users-pop7-Library-CloudStorage-OneDrive-MonsterConnectCo--Ltd-Lecture-KOSEN69---software-security/f63a82af-e1ad-40ed-89c4-03c6ca776e3f/scratchpad/lq-anim/slides/pptx/assets/logo-small.png">    </p:cNvPr>
+          <p:cNvPr id="7" name="Image 2" descr="/private/tmp/claude-501/-Users-pop7-Library-CloudStorage-OneDrive-MonsterConnectCo--Ltd-Lecture-KOSEN69---software-security/f63a82af-e1ad-40ed-89c4-03c6ca776e3f/scratchpad/lq-easy/slides/pptx/assets/logo-small.png">    </p:cNvPr>
           <p:cNvPicPr>
             <a:picLocks noChangeAspect="1"/>
           </p:cNvPicPr>
@@ -6268,7 +6200,7 @@
         <p:spPr>
           <a:xfrm>
             <a:off x="548640" y="1325880"/>
-            <a:ext cx="8046720" cy="1097280"/>
+            <a:ext cx="8046720" cy="822960"/>
           </a:xfrm>
           <a:prstGeom prst="rect">
             <a:avLst/>
@@ -6294,7 +6226,7 @@
                 <a:ea typeface="Calibri" pitchFamily="34" charset="-122"/>
                 <a:cs typeface="Calibri" pitchFamily="34" charset="-120"/>
               </a:rPr>
-              <a:t>Start from the untouched lab or Blue's fixes, plant a defect, read the run step by step.</a:t>
+              <a:t>Click Blue's clean baseline, then Red: old urllib3, and find the gate that fails.</a:t>
             </a:r>
             <a:endParaRPr lang="en-US" sz="1400" dirty="0"/>
           </a:p>
@@ -6358,7 +6290,7 @@
       </p:sp>
       <p:pic>
         <p:nvPicPr>
-          <p:cNvPr id="7" name="Image 1" descr="/private/tmp/claude-501/-Users-pop7-Library-CloudStorage-OneDrive-MonsterConnectCo--Ltd-Lecture-KOSEN69---software-security/f63a82af-e1ad-40ed-89c4-03c6ca776e3f/scratchpad/lq-anim/slides/pptx/assets/logo-small.png">    </p:cNvPr>
+          <p:cNvPr id="7" name="Image 1" descr="/private/tmp/claude-501/-Users-pop7-Library-CloudStorage-OneDrive-MonsterConnectCo--Ltd-Lecture-KOSEN69---software-security/f63a82af-e1ad-40ed-89c4-03c6ca776e3f/scratchpad/lq-easy/slides/pptx/assets/logo-small.png">    </p:cNvPr>
           <p:cNvPicPr>
             <a:picLocks noChangeAspect="1"/>
           </p:cNvPicPr>
@@ -6701,7 +6633,7 @@
       </p:sp>
       <p:pic>
         <p:nvPicPr>
-          <p:cNvPr id="8" name="Image 1" descr="/private/tmp/claude-501/-Users-pop7-Library-CloudStorage-OneDrive-MonsterConnectCo--Ltd-Lecture-KOSEN69---software-security/f63a82af-e1ad-40ed-89c4-03c6ca776e3f/scratchpad/lq-anim/slides/pptx/assets/logo-small.png">    </p:cNvPr>
+          <p:cNvPr id="8" name="Image 1" descr="/private/tmp/claude-501/-Users-pop7-Library-CloudStorage-OneDrive-MonsterConnectCo--Ltd-Lecture-KOSEN69---software-security/f63a82af-e1ad-40ed-89c4-03c6ca776e3f/scratchpad/lq-easy/slides/pptx/assets/logo-small.png">    </p:cNvPr>
           <p:cNvPicPr>
             <a:picLocks noChangeAspect="1"/>
           </p:cNvPicPr>
@@ -6910,7 +6842,7 @@
       </p:sp>
       <p:pic>
         <p:nvPicPr>
-          <p:cNvPr id="7" name="Image 2" descr="/private/tmp/claude-501/-Users-pop7-Library-CloudStorage-OneDrive-MonsterConnectCo--Ltd-Lecture-KOSEN69---software-security/f63a82af-e1ad-40ed-89c4-03c6ca776e3f/scratchpad/lq-anim/slides/pptx/assets/logo-small.png">    </p:cNvPr>
+          <p:cNvPr id="7" name="Image 2" descr="/private/tmp/claude-501/-Users-pop7-Library-CloudStorage-OneDrive-MonsterConnectCo--Ltd-Lecture-KOSEN69---software-security/f63a82af-e1ad-40ed-89c4-03c6ca776e3f/scratchpad/lq-easy/slides/pptx/assets/logo-small.png">    </p:cNvPr>
           <p:cNvPicPr>
             <a:picLocks noChangeAspect="1"/>
           </p:cNvPicPr>
@@ -7111,7 +7043,7 @@
                 <a:ea typeface="Calibri" pitchFamily="34" charset="-122"/>
                 <a:cs typeface="Calibri" pitchFamily="34" charset="-120"/>
               </a:rPr>
-              <a:t>📋 Worksheet 15 — labs/week15-devsecops-pipeline/worksheet.md (Part 3) · kickoff: push security-ci.yml → GitHub Actions; separately, docker compose up → :8090 (insecure) / :8091 (secure) for the flag task</a:t>
+              <a:t>📋 Worksheet 15 — labs/week15-devsecops-pipeline/worksheet.md (Part 3) · start: push security-ci.yml to your own public repo → GitHub Actions; for the flag, docker compose up → :8090 (insecure) / :8091 (secure)</a:t>
             </a:r>
             <a:endParaRPr lang="en-US" sz="1400" dirty="0"/>
           </a:p>
@@ -7126,11 +7058,11 @@
         <p:spPr>
           <a:xfrm>
             <a:off x="457200" y="2587752"/>
-            <a:ext cx="8229600" cy="1810512"/>
+            <a:ext cx="8229600" cy="1920240"/>
           </a:xfrm>
           <a:prstGeom prst="roundRect">
             <a:avLst>
-              <a:gd name="adj" fmla="val 4040"/>
+              <a:gd name="adj" fmla="val 3810"/>
             </a:avLst>
           </a:prstGeom>
           <a:solidFill>
@@ -7155,7 +7087,7 @@
         <p:spPr>
           <a:xfrm>
             <a:off x="731520" y="2697480"/>
-            <a:ext cx="7680960" cy="1591056"/>
+            <a:ext cx="7680960" cy="1700784"/>
           </a:xfrm>
           <a:prstGeom prst="rect">
             <a:avLst/>
@@ -7206,7 +7138,7 @@
                 <a:ea typeface="Calibri" pitchFamily="34" charset="-122"/>
                 <a:cs typeface="Calibri" pitchFamily="34" charset="-120"/>
               </a:rPr>
-              <a:t>Screenshot: the failing gate step for your planted defect, and which job caught it (one defect per PR; trying all 3 categories is good practice)</a:t>
+              <a:t>A screenshot of the failing gate step for your planted defect, and which job caught it</a:t>
             </a:r>
             <a:endParaRPr lang="en-US" sz="1400" dirty="0"/>
           </a:p>
@@ -7227,45 +7159,66 @@
                 <a:ea typeface="Calibri" pitchFamily="34" charset="-122"/>
                 <a:cs typeface="Calibri" pitchFamily="34" charset="-120"/>
               </a:rPr>
-              <a:t>The FLAG{...} from the fail-open /admin bypass, in the worksheet (not the weekly quiz, which runs before the lab); your personal flag comes from your hosted instance</a:t>
+              <a:t>The FLAG{...} from the fail-open /admin, written in the worksheet (graded flag: your hosted instance)</a:t>
             </a:r>
             <a:endParaRPr lang="en-US" sz="1400" dirty="0"/>
           </a:p>
-        </p:txBody>
-      </p:sp>
-      <p:sp>
-        <p:nvSpPr>
-          <p:cNvPr id="9" name="Text 6"/>
-          <p:cNvSpPr/>
-          <p:nvPr/>
-        </p:nvSpPr>
-        <p:spPr>
-          <a:xfrm>
-            <a:off x="457200" y="4800600"/>
-            <a:ext cx="6949440" cy="274320"/>
-          </a:xfrm>
-          <a:prstGeom prst="rect">
-            <a:avLst/>
-          </a:prstGeom>
-          <a:noFill/>
-          <a:ln/>
-        </p:spPr>
-        <p:txBody>
-          <a:bodyPr wrap="square" lIns="0" tIns="0" rIns="0" bIns="0" rtlCol="0" anchor="ctr"/>
-          <a:lstStyle/>
-          <a:p>
-            <a:pPr indent="0" marL="0">
-              <a:buNone/>
-            </a:pPr>
-            <a:r>
-              <a:rPr lang="en-US" sz="900" dirty="0">
-                <a:solidFill>
-                  <a:srgbClr val="64748B"/>
+          <a:p>
+            <a:pPr marL="342900" indent="-342900">
+              <a:spcAft>
+                <a:spcPts val="600"/>
+              </a:spcAft>
+              <a:buSzPct val="100000"/>
+              <a:buChar char="•"/>
+            </a:pPr>
+            <a:r>
+              <a:rPr lang="en-US" sz="1400" dirty="0">
+                <a:solidFill>
+                  <a:srgbClr val="1F2937"/>
                 </a:solidFill>
                 <a:latin typeface="Calibri" pitchFamily="34" charset="0"/>
                 <a:ea typeface="Calibri" pitchFamily="34" charset="-122"/>
                 <a:cs typeface="Calibri" pitchFamily="34" charset="-120"/>
               </a:rPr>
+              <a:t>+ Audit the AI / EiPE / Prompt Problem (see worksheet)</a:t>
+            </a:r>
+            <a:endParaRPr lang="en-US" sz="1400" dirty="0"/>
+          </a:p>
+        </p:txBody>
+      </p:sp>
+      <p:sp>
+        <p:nvSpPr>
+          <p:cNvPr id="9" name="Text 6"/>
+          <p:cNvSpPr/>
+          <p:nvPr/>
+        </p:nvSpPr>
+        <p:spPr>
+          <a:xfrm>
+            <a:off x="457200" y="4800600"/>
+            <a:ext cx="6949440" cy="274320"/>
+          </a:xfrm>
+          <a:prstGeom prst="rect">
+            <a:avLst/>
+          </a:prstGeom>
+          <a:noFill/>
+          <a:ln/>
+        </p:spPr>
+        <p:txBody>
+          <a:bodyPr wrap="square" lIns="0" tIns="0" rIns="0" bIns="0" rtlCol="0" anchor="ctr"/>
+          <a:lstStyle/>
+          <a:p>
+            <a:pPr indent="0" marL="0">
+              <a:buNone/>
+            </a:pPr>
+            <a:r>
+              <a:rPr lang="en-US" sz="900" dirty="0">
+                <a:solidFill>
+                  <a:srgbClr val="64748B"/>
+                </a:solidFill>
+                <a:latin typeface="Calibri" pitchFamily="34" charset="0"/>
+                <a:ea typeface="Calibri" pitchFamily="34" charset="-122"/>
+                <a:cs typeface="Calibri" pitchFamily="34" charset="-120"/>
+              </a:rPr>
               <a:t>Software Security · Week 15</a:t>
             </a:r>
             <a:endParaRPr lang="en-US" sz="900" dirty="0"/>
@@ -7274,7 +7227,7 @@
       </p:sp>
       <p:pic>
         <p:nvPicPr>
-          <p:cNvPr id="10" name="Image 1" descr="/private/tmp/claude-501/-Users-pop7-Library-CloudStorage-OneDrive-MonsterConnectCo--Ltd-Lecture-KOSEN69---software-security/f63a82af-e1ad-40ed-89c4-03c6ca776e3f/scratchpad/lq-anim/slides/pptx/assets/logo-small.png">    </p:cNvPr>
+          <p:cNvPr id="10" name="Image 1" descr="/private/tmp/claude-501/-Users-pop7-Library-CloudStorage-OneDrive-MonsterConnectCo--Ltd-Lecture-KOSEN69---software-security/f63a82af-e1ad-40ed-89c4-03c6ca776e3f/scratchpad/lq-easy/slides/pptx/assets/logo-small.png">    </p:cNvPr>
           <p:cNvPicPr>
             <a:picLocks noChangeAspect="1"/>
           </p:cNvPicPr>
@@ -7412,7 +7365,7 @@
                 <a:ea typeface="Arial" pitchFamily="34" charset="-122"/>
                 <a:cs typeface="Arial" pitchFamily="34" charset="-120"/>
               </a:rPr>
-              <a:t>Deliverable (cont.)</a:t>
+              <a:t>Key takeaways</a:t>
             </a:r>
             <a:endParaRPr lang="en-US" sz="2600" dirty="0"/>
           </a:p>
@@ -7427,11 +7380,11 @@
         <p:spPr>
           <a:xfrm>
             <a:off x="457200" y="1325880"/>
-            <a:ext cx="8229600" cy="585216"/>
+            <a:ext cx="8229600" cy="1207008"/>
           </a:xfrm>
           <a:prstGeom prst="roundRect">
             <a:avLst>
-              <a:gd name="adj" fmla="val 12500"/>
+              <a:gd name="adj" fmla="val 6061"/>
             </a:avLst>
           </a:prstGeom>
           <a:solidFill>
@@ -7456,7 +7409,7 @@
         <p:spPr>
           <a:xfrm>
             <a:off x="731520" y="1435608"/>
-            <a:ext cx="7680960" cy="365760"/>
+            <a:ext cx="7680960" cy="987552"/>
           </a:xfrm>
           <a:prstGeom prst="rect">
             <a:avLst/>
@@ -7486,45 +7439,87 @@
                 <a:ea typeface="Calibri" pitchFamily="34" charset="-122"/>
                 <a:cs typeface="Calibri" pitchFamily="34" charset="-120"/>
               </a:rPr>
-              <a:t>+ Audit the AI / EiPE / Prompt Problem (see worksheet)</a:t>
+              <a:t>Automate security gates — humans forget, pipelines don't</a:t>
             </a:r>
             <a:endParaRPr lang="en-US" sz="1400" dirty="0"/>
           </a:p>
-        </p:txBody>
-      </p:sp>
-      <p:sp>
-        <p:nvSpPr>
-          <p:cNvPr id="7" name="Text 4"/>
-          <p:cNvSpPr/>
-          <p:nvPr/>
-        </p:nvSpPr>
-        <p:spPr>
-          <a:xfrm>
-            <a:off x="457200" y="4800600"/>
-            <a:ext cx="6949440" cy="274320"/>
-          </a:xfrm>
-          <a:prstGeom prst="rect">
-            <a:avLst/>
-          </a:prstGeom>
-          <a:noFill/>
-          <a:ln/>
-        </p:spPr>
-        <p:txBody>
-          <a:bodyPr wrap="square" lIns="0" tIns="0" rIns="0" bIns="0" rtlCol="0" anchor="ctr"/>
-          <a:lstStyle/>
-          <a:p>
-            <a:pPr indent="0" marL="0">
-              <a:buNone/>
-            </a:pPr>
-            <a:r>
-              <a:rPr lang="en-US" sz="900" dirty="0">
-                <a:solidFill>
-                  <a:srgbClr val="64748B"/>
+          <a:p>
+            <a:pPr marL="342900" indent="-342900">
+              <a:spcAft>
+                <a:spcPts val="600"/>
+              </a:spcAft>
+              <a:buSzPct val="100000"/>
+              <a:buChar char="•"/>
+            </a:pPr>
+            <a:r>
+              <a:rPr lang="en-US" sz="1400" dirty="0">
+                <a:solidFill>
+                  <a:srgbClr val="1F2937"/>
                 </a:solidFill>
                 <a:latin typeface="Calibri" pitchFamily="34" charset="0"/>
                 <a:ea typeface="Calibri" pitchFamily="34" charset="-122"/>
                 <a:cs typeface="Calibri" pitchFamily="34" charset="-120"/>
               </a:rPr>
+              <a:t>You can't defend what you don't log</a:t>
+            </a:r>
+            <a:endParaRPr lang="en-US" sz="1400" dirty="0"/>
+          </a:p>
+          <a:p>
+            <a:pPr marL="342900" indent="-342900">
+              <a:spcAft>
+                <a:spcPts val="600"/>
+              </a:spcAft>
+              <a:buSzPct val="100000"/>
+              <a:buChar char="•"/>
+            </a:pPr>
+            <a:r>
+              <a:rPr lang="en-US" sz="1400" dirty="0">
+                <a:solidFill>
+                  <a:srgbClr val="1F2937"/>
+                </a:solidFill>
+                <a:latin typeface="Calibri" pitchFamily="34" charset="0"/>
+                <a:ea typeface="Calibri" pitchFamily="34" charset="-122"/>
+                <a:cs typeface="Calibri" pitchFamily="34" charset="-120"/>
+              </a:rPr>
+              <a:t>Fail closed; disclose responsibly</a:t>
+            </a:r>
+            <a:endParaRPr lang="en-US" sz="1400" dirty="0"/>
+          </a:p>
+        </p:txBody>
+      </p:sp>
+      <p:sp>
+        <p:nvSpPr>
+          <p:cNvPr id="7" name="Text 4"/>
+          <p:cNvSpPr/>
+          <p:nvPr/>
+        </p:nvSpPr>
+        <p:spPr>
+          <a:xfrm>
+            <a:off x="457200" y="4800600"/>
+            <a:ext cx="6949440" cy="274320"/>
+          </a:xfrm>
+          <a:prstGeom prst="rect">
+            <a:avLst/>
+          </a:prstGeom>
+          <a:noFill/>
+          <a:ln/>
+        </p:spPr>
+        <p:txBody>
+          <a:bodyPr wrap="square" lIns="0" tIns="0" rIns="0" bIns="0" rtlCol="0" anchor="ctr"/>
+          <a:lstStyle/>
+          <a:p>
+            <a:pPr indent="0" marL="0">
+              <a:buNone/>
+            </a:pPr>
+            <a:r>
+              <a:rPr lang="en-US" sz="900" dirty="0">
+                <a:solidFill>
+                  <a:srgbClr val="64748B"/>
+                </a:solidFill>
+                <a:latin typeface="Calibri" pitchFamily="34" charset="0"/>
+                <a:ea typeface="Calibri" pitchFamily="34" charset="-122"/>
+                <a:cs typeface="Calibri" pitchFamily="34" charset="-120"/>
+              </a:rPr>
               <a:t>Software Security · Week 15</a:t>
             </a:r>
             <a:endParaRPr lang="en-US" sz="900" dirty="0"/>
@@ -7533,7 +7528,7 @@
       </p:sp>
       <p:pic>
         <p:nvPicPr>
-          <p:cNvPr id="8" name="Image 1" descr="/private/tmp/claude-501/-Users-pop7-Library-CloudStorage-OneDrive-MonsterConnectCo--Ltd-Lecture-KOSEN69---software-security/f63a82af-e1ad-40ed-89c4-03c6ca776e3f/scratchpad/lq-anim/slides/pptx/assets/logo-small.png">    </p:cNvPr>
+          <p:cNvPr id="8" name="Image 1" descr="/private/tmp/claude-501/-Users-pop7-Library-CloudStorage-OneDrive-MonsterConnectCo--Ltd-Lecture-KOSEN69---software-security/f63a82af-e1ad-40ed-89c4-03c6ca776e3f/scratchpad/lq-easy/slides/pptx/assets/logo-small.png">    </p:cNvPr>
           <p:cNvPicPr>
             <a:picLocks noChangeAspect="1"/>
           </p:cNvPicPr>
@@ -7589,65 +7584,14 @@
       </p:grpSpPr>
       <p:sp>
         <p:nvSpPr>
-          <p:cNvPr id="2" name="Shape 0"/>
-          <p:cNvSpPr/>
-          <p:nvPr/>
-        </p:nvSpPr>
-        <p:spPr>
-          <a:xfrm>
-            <a:off x="457200" y="384048"/>
-            <a:ext cx="530352" cy="530352"/>
-          </a:xfrm>
-          <a:prstGeom prst="ellipse">
-            <a:avLst/>
-          </a:prstGeom>
-          <a:solidFill>
-            <a:srgbClr val="E35205"/>
-          </a:solidFill>
-          <a:ln/>
-          <a:effectLst>
-            <a:outerShdw sx="100000" sy="100000" kx="0" ky="0" algn="bl" rotWithShape="0" blurRad="76200" dist="25400" dir="5400000">
-              <a:srgbClr val="000000">
-                <a:alpha val="12000"/>
-              </a:srgbClr>
-            </a:outerShdw>
-          </a:effectLst>
-        </p:spPr>
-      </p:sp>
-      <p:pic>
-        <p:nvPicPr>
-          <p:cNvPr id="3" name="Image 0" descr="preencoded.png">    </p:cNvPr>
-          <p:cNvPicPr>
-            <a:picLocks noChangeAspect="1"/>
-          </p:cNvPicPr>
-          <p:nvPr/>
-        </p:nvPicPr>
-        <p:blipFill>
-          <a:blip r:embed="rId1"/>
-          <a:stretch>
-            <a:fillRect/>
-          </a:stretch>
-        </p:blipFill>
-        <p:spPr>
-          <a:xfrm>
-            <a:off x="594360" y="521208"/>
-            <a:ext cx="256032" cy="256032"/>
-          </a:xfrm>
-          <a:prstGeom prst="rect">
-            <a:avLst/>
-          </a:prstGeom>
-        </p:spPr>
-      </p:pic>
-      <p:sp>
-        <p:nvSpPr>
-          <p:cNvPr id="4" name="Text 1"/>
-          <p:cNvSpPr/>
-          <p:nvPr/>
-        </p:nvSpPr>
-        <p:spPr>
-          <a:xfrm>
-            <a:off x="1143000" y="329184"/>
-            <a:ext cx="7498080" cy="603504"/>
+          <p:cNvPr id="2" name="Text 0"/>
+          <p:cNvSpPr/>
+          <p:nvPr/>
+        </p:nvSpPr>
+        <p:spPr>
+          <a:xfrm>
+            <a:off x="640080" y="1737360"/>
+            <a:ext cx="7863840" cy="1097280"/>
           </a:xfrm>
           <a:prstGeom prst="rect">
             <a:avLst/>
@@ -7663,7 +7607,7 @@
               <a:buNone/>
             </a:pPr>
             <a:r>
-              <a:rPr lang="en-US" sz="2600" b="1" dirty="0">
+              <a:rPr lang="en-US" sz="4600" b="1" dirty="0">
                 <a:solidFill>
                   <a:srgbClr val="1F2937"/>
                 </a:solidFill>
@@ -7671,51 +7615,22 @@
                 <a:ea typeface="Arial" pitchFamily="34" charset="-122"/>
                 <a:cs typeface="Arial" pitchFamily="34" charset="-120"/>
               </a:rPr>
-              <a:t>Key takeaways</a:t>
-            </a:r>
-            <a:endParaRPr lang="en-US" sz="2600" dirty="0"/>
-          </a:p>
-        </p:txBody>
-      </p:sp>
-      <p:sp>
-        <p:nvSpPr>
-          <p:cNvPr id="5" name="Shape 2"/>
-          <p:cNvSpPr/>
-          <p:nvPr/>
-        </p:nvSpPr>
-        <p:spPr>
-          <a:xfrm>
-            <a:off x="457200" y="1325880"/>
-            <a:ext cx="8229600" cy="1207008"/>
-          </a:xfrm>
-          <a:prstGeom prst="roundRect">
-            <a:avLst>
-              <a:gd name="adj" fmla="val 6061"/>
-            </a:avLst>
-          </a:prstGeom>
-          <a:solidFill>
-            <a:srgbClr val="F1F5F9"/>
-          </a:solidFill>
-          <a:ln/>
-          <a:effectLst>
-            <a:outerShdw sx="100000" sy="100000" kx="0" ky="0" algn="bl" rotWithShape="0" blurRad="76200" dist="25400" dir="5400000">
-              <a:srgbClr val="000000">
-                <a:alpha val="12000"/>
-              </a:srgbClr>
-            </a:outerShdw>
-          </a:effectLst>
-        </p:spPr>
-      </p:sp>
-      <p:sp>
-        <p:nvSpPr>
-          <p:cNvPr id="6" name="Text 3"/>
-          <p:cNvSpPr/>
-          <p:nvPr/>
-        </p:nvSpPr>
-        <p:spPr>
-          <a:xfrm>
-            <a:off x="731520" y="1435608"/>
-            <a:ext cx="7680960" cy="987552"/>
+              <a:t>Questions?</a:t>
+            </a:r>
+            <a:endParaRPr lang="en-US" sz="4600" dirty="0"/>
+          </a:p>
+        </p:txBody>
+      </p:sp>
+      <p:sp>
+        <p:nvSpPr>
+          <p:cNvPr id="3" name="Text 1"/>
+          <p:cNvSpPr/>
+          <p:nvPr/>
+        </p:nvSpPr>
+        <p:spPr>
+          <a:xfrm>
+            <a:off x="658368" y="2834640"/>
+            <a:ext cx="7863840" cy="731520"/>
           </a:xfrm>
           <a:prstGeom prst="rect">
             <a:avLst/>
@@ -7724,251 +7639,30 @@
           <a:ln/>
         </p:spPr>
         <p:txBody>
-          <a:bodyPr wrap="square" lIns="0" tIns="0" rIns="0" bIns="0" rtlCol="0" anchor="t">
-            <a:normAutofit/>
-          </a:bodyPr>
-          <a:lstStyle/>
-          <a:p>
-            <a:pPr marL="342900" indent="-342900">
-              <a:spcAft>
-                <a:spcPts val="600"/>
-              </a:spcAft>
-              <a:buSzPct val="100000"/>
-              <a:buChar char="•"/>
-            </a:pPr>
-            <a:r>
-              <a:rPr lang="en-US" sz="1400" dirty="0">
-                <a:solidFill>
-                  <a:srgbClr val="1F2937"/>
+          <a:bodyPr wrap="square" lIns="0" tIns="0" rIns="0" bIns="0" rtlCol="0" anchor="ctr"/>
+          <a:lstStyle/>
+          <a:p>
+            <a:pPr indent="0" marL="0">
+              <a:buNone/>
+            </a:pPr>
+            <a:r>
+              <a:rPr lang="en-US" sz="1800" dirty="0">
+                <a:solidFill>
+                  <a:srgbClr val="E35205"/>
                 </a:solidFill>
                 <a:latin typeface="Calibri" pitchFamily="34" charset="0"/>
                 <a:ea typeface="Calibri" pitchFamily="34" charset="-122"/>
                 <a:cs typeface="Calibri" pitchFamily="34" charset="-120"/>
               </a:rPr>
-              <a:t>Automate security gates — humans forget, pipelines don't</a:t>
-            </a:r>
-            <a:endParaRPr lang="en-US" sz="1400" dirty="0"/>
-          </a:p>
-          <a:p>
-            <a:pPr marL="342900" indent="-342900">
-              <a:spcAft>
-                <a:spcPts val="600"/>
-              </a:spcAft>
-              <a:buSzPct val="100000"/>
-              <a:buChar char="•"/>
-            </a:pPr>
-            <a:r>
-              <a:rPr lang="en-US" sz="1400" dirty="0">
-                <a:solidFill>
-                  <a:srgbClr val="1F2937"/>
-                </a:solidFill>
-                <a:latin typeface="Calibri" pitchFamily="34" charset="0"/>
-                <a:ea typeface="Calibri" pitchFamily="34" charset="-122"/>
-                <a:cs typeface="Calibri" pitchFamily="34" charset="-120"/>
-              </a:rPr>
-              <a:t>You can't defend what you don't log</a:t>
-            </a:r>
-            <a:endParaRPr lang="en-US" sz="1400" dirty="0"/>
-          </a:p>
-          <a:p>
-            <a:pPr marL="342900" indent="-342900">
-              <a:spcAft>
-                <a:spcPts val="600"/>
-              </a:spcAft>
-              <a:buSzPct val="100000"/>
-              <a:buChar char="•"/>
-            </a:pPr>
-            <a:r>
-              <a:rPr lang="en-US" sz="1400" dirty="0">
-                <a:solidFill>
-                  <a:srgbClr val="1F2937"/>
-                </a:solidFill>
-                <a:latin typeface="Calibri" pitchFamily="34" charset="0"/>
-                <a:ea typeface="Calibri" pitchFamily="34" charset="-122"/>
-                <a:cs typeface="Calibri" pitchFamily="34" charset="-120"/>
-              </a:rPr>
-              <a:t>Fail closed; disclose responsibly</a:t>
-            </a:r>
-            <a:endParaRPr lang="en-US" sz="1400" dirty="0"/>
-          </a:p>
-        </p:txBody>
-      </p:sp>
-      <p:sp>
-        <p:nvSpPr>
-          <p:cNvPr id="7" name="Text 4"/>
-          <p:cNvSpPr/>
-          <p:nvPr/>
-        </p:nvSpPr>
-        <p:spPr>
-          <a:xfrm>
-            <a:off x="457200" y="4800600"/>
-            <a:ext cx="6949440" cy="274320"/>
-          </a:xfrm>
-          <a:prstGeom prst="rect">
-            <a:avLst/>
-          </a:prstGeom>
-          <a:noFill/>
-          <a:ln/>
-        </p:spPr>
-        <p:txBody>
-          <a:bodyPr wrap="square" lIns="0" tIns="0" rIns="0" bIns="0" rtlCol="0" anchor="ctr"/>
-          <a:lstStyle/>
-          <a:p>
-            <a:pPr indent="0" marL="0">
-              <a:buNone/>
-            </a:pPr>
-            <a:r>
-              <a:rPr lang="en-US" sz="900" dirty="0">
-                <a:solidFill>
-                  <a:srgbClr val="64748B"/>
-                </a:solidFill>
-                <a:latin typeface="Calibri" pitchFamily="34" charset="0"/>
-                <a:ea typeface="Calibri" pitchFamily="34" charset="-122"/>
-                <a:cs typeface="Calibri" pitchFamily="34" charset="-120"/>
-              </a:rPr>
-              <a:t>Software Security · Week 15</a:t>
-            </a:r>
-            <a:endParaRPr lang="en-US" sz="900" dirty="0"/>
+              <a:t>Next week: Capstone studio &amp; CTF warm-up</a:t>
+            </a:r>
+            <a:endParaRPr lang="en-US" sz="1800" dirty="0"/>
           </a:p>
         </p:txBody>
       </p:sp>
       <p:pic>
         <p:nvPicPr>
-          <p:cNvPr id="8" name="Image 1" descr="/private/tmp/claude-501/-Users-pop7-Library-CloudStorage-OneDrive-MonsterConnectCo--Ltd-Lecture-KOSEN69---software-security/f63a82af-e1ad-40ed-89c4-03c6ca776e3f/scratchpad/lq-anim/slides/pptx/assets/logo-small.png">    </p:cNvPr>
-          <p:cNvPicPr>
-            <a:picLocks noChangeAspect="1"/>
-          </p:cNvPicPr>
-          <p:nvPr/>
-        </p:nvPicPr>
-        <p:blipFill>
-          <a:blip r:embed="rId2"/>
-          <a:stretch>
-            <a:fillRect/>
-          </a:stretch>
-        </p:blipFill>
-        <p:spPr>
-          <a:xfrm>
-            <a:off x="7882128" y="4700016"/>
-            <a:ext cx="768096" cy="356616"/>
-          </a:xfrm>
-          <a:prstGeom prst="rect">
-            <a:avLst/>
-          </a:prstGeom>
-        </p:spPr>
-      </p:pic>
-    </p:spTree>
-  </p:cSld>
-  <p:clrMapOvr>
-    <a:masterClrMapping/>
-  </p:clrMapOvr>
-</p:sld>
-</file>
-
-<file path=ppt/slides/slide24.xml><?xml version="1.0" encoding="utf-8"?>
-<p:sld xmlns:a="http://schemas.openxmlformats.org/drawingml/2006/main" xmlns:r="http://schemas.openxmlformats.org/officeDocument/2006/relationships" xmlns:p="http://schemas.openxmlformats.org/presentationml/2006/main">
-  <p:cSld name="Slide 24">
-    <p:bg>
-      <p:bgPr>
-        <a:solidFill>
-          <a:srgbClr val="FFFFFF"/>
-        </a:solidFill>
-      </p:bgPr>
-    </p:bg>
-    <p:spTree>
-      <p:nvGrpSpPr>
-        <p:cNvPr id="1" name=""/>
-        <p:cNvGrpSpPr/>
-        <p:nvPr/>
-      </p:nvGrpSpPr>
-      <p:grpSpPr>
-        <a:xfrm>
-          <a:off x="0" y="0"/>
-          <a:ext cx="0" cy="0"/>
-          <a:chOff x="0" y="0"/>
-          <a:chExt cx="0" cy="0"/>
-        </a:xfrm>
-      </p:grpSpPr>
-      <p:sp>
-        <p:nvSpPr>
-          <p:cNvPr id="2" name="Text 0"/>
-          <p:cNvSpPr/>
-          <p:nvPr/>
-        </p:nvSpPr>
-        <p:spPr>
-          <a:xfrm>
-            <a:off x="640080" y="1737360"/>
-            <a:ext cx="7863840" cy="1097280"/>
-          </a:xfrm>
-          <a:prstGeom prst="rect">
-            <a:avLst/>
-          </a:prstGeom>
-          <a:noFill/>
-          <a:ln/>
-        </p:spPr>
-        <p:txBody>
-          <a:bodyPr wrap="square" lIns="0" tIns="0" rIns="0" bIns="0" rtlCol="0" anchor="ctr"/>
-          <a:lstStyle/>
-          <a:p>
-            <a:pPr indent="0" marL="0">
-              <a:buNone/>
-            </a:pPr>
-            <a:r>
-              <a:rPr lang="en-US" sz="4600" b="1" dirty="0">
-                <a:solidFill>
-                  <a:srgbClr val="1F2937"/>
-                </a:solidFill>
-                <a:latin typeface="Arial" pitchFamily="34" charset="0"/>
-                <a:ea typeface="Arial" pitchFamily="34" charset="-122"/>
-                <a:cs typeface="Arial" pitchFamily="34" charset="-120"/>
-              </a:rPr>
-              <a:t>Questions?</a:t>
-            </a:r>
-            <a:endParaRPr lang="en-US" sz="4600" dirty="0"/>
-          </a:p>
-        </p:txBody>
-      </p:sp>
-      <p:sp>
-        <p:nvSpPr>
-          <p:cNvPr id="3" name="Text 1"/>
-          <p:cNvSpPr/>
-          <p:nvPr/>
-        </p:nvSpPr>
-        <p:spPr>
-          <a:xfrm>
-            <a:off x="658368" y="2834640"/>
-            <a:ext cx="7863840" cy="731520"/>
-          </a:xfrm>
-          <a:prstGeom prst="rect">
-            <a:avLst/>
-          </a:prstGeom>
-          <a:noFill/>
-          <a:ln/>
-        </p:spPr>
-        <p:txBody>
-          <a:bodyPr wrap="square" lIns="0" tIns="0" rIns="0" bIns="0" rtlCol="0" anchor="ctr"/>
-          <a:lstStyle/>
-          <a:p>
-            <a:pPr indent="0" marL="0">
-              <a:buNone/>
-            </a:pPr>
-            <a:r>
-              <a:rPr lang="en-US" sz="1800" dirty="0">
-                <a:solidFill>
-                  <a:srgbClr val="E35205"/>
-                </a:solidFill>
-                <a:latin typeface="Calibri" pitchFamily="34" charset="0"/>
-                <a:ea typeface="Calibri" pitchFamily="34" charset="-122"/>
-                <a:cs typeface="Calibri" pitchFamily="34" charset="-120"/>
-              </a:rPr>
-              <a:t>Next week: Capstone studio &amp; CTF warm-up</a:t>
-            </a:r>
-            <a:endParaRPr lang="en-US" sz="1800" dirty="0"/>
-          </a:p>
-        </p:txBody>
-      </p:sp>
-      <p:pic>
-        <p:nvPicPr>
-          <p:cNvPr id="4" name="Image 0" descr="/private/tmp/claude-501/-Users-pop7-Library-CloudStorage-OneDrive-MonsterConnectCo--Ltd-Lecture-KOSEN69---software-security/f63a82af-e1ad-40ed-89c4-03c6ca776e3f/scratchpad/lq-anim/slides/pptx/assets/logo-small.png">    </p:cNvPr>
+          <p:cNvPr id="4" name="Image 0" descr="/private/tmp/claude-501/-Users-pop7-Library-CloudStorage-OneDrive-MonsterConnectCo--Ltd-Lecture-KOSEN69---software-security/f63a82af-e1ad-40ed-89c4-03c6ca776e3f/scratchpad/lq-easy/slides/pptx/assets/logo-small.png">    </p:cNvPr>
           <p:cNvPicPr>
             <a:picLocks noChangeAspect="1"/>
           </p:cNvPicPr>
@@ -8121,11 +7815,11 @@
         <p:spPr>
           <a:xfrm>
             <a:off x="457200" y="1325880"/>
-            <a:ext cx="8229600" cy="1207008"/>
+            <a:ext cx="8229600" cy="1408176"/>
           </a:xfrm>
           <a:prstGeom prst="roundRect">
             <a:avLst>
-              <a:gd name="adj" fmla="val 6061"/>
+              <a:gd name="adj" fmla="val 5195"/>
             </a:avLst>
           </a:prstGeom>
           <a:solidFill>
@@ -8150,7 +7844,7 @@
         <p:spPr>
           <a:xfrm>
             <a:off x="731520" y="1435608"/>
-            <a:ext cx="7680960" cy="987552"/>
+            <a:ext cx="7680960" cy="1188720"/>
           </a:xfrm>
           <a:prstGeom prst="rect">
             <a:avLst/>
@@ -8180,7 +7874,7 @@
                 <a:ea typeface="Calibri" pitchFamily="34" charset="-122"/>
                 <a:cs typeface="Calibri" pitchFamily="34" charset="-120"/>
               </a:rPr>
-              <a:t>SAST (Wk2) · SCA + image scan (Wk12–13) · secret scanning (Wk2)</a:t>
+              <a:t>SAST (Wk2) · SCA + image scan (Wk12–13) · IaC (infrastructure-as-code) config scan (Wk13) · secret scanning (Wk2)</a:t>
             </a:r>
             <a:endParaRPr lang="en-US" sz="1400" dirty="0"/>
           </a:p>
@@ -8269,7 +7963,7 @@
       </p:sp>
       <p:pic>
         <p:nvPicPr>
-          <p:cNvPr id="8" name="Image 1" descr="/private/tmp/claude-501/-Users-pop7-Library-CloudStorage-OneDrive-MonsterConnectCo--Ltd-Lecture-KOSEN69---software-security/f63a82af-e1ad-40ed-89c4-03c6ca776e3f/scratchpad/lq-anim/slides/pptx/assets/logo-small.png">    </p:cNvPr>
+          <p:cNvPr id="8" name="Image 1" descr="/private/tmp/claude-501/-Users-pop7-Library-CloudStorage-OneDrive-MonsterConnectCo--Ltd-Lecture-KOSEN69---software-security/f63a82af-e1ad-40ed-89c4-03c6ca776e3f/scratchpad/lq-easy/slides/pptx/assets/logo-small.png">    </p:cNvPr>
           <p:cNvPicPr>
             <a:picLocks noChangeAspect="1"/>
           </p:cNvPicPr>
@@ -8478,7 +8172,7 @@
       </p:sp>
       <p:pic>
         <p:nvPicPr>
-          <p:cNvPr id="7" name="Image 2" descr="/private/tmp/claude-501/-Users-pop7-Library-CloudStorage-OneDrive-MonsterConnectCo--Ltd-Lecture-KOSEN69---software-security/f63a82af-e1ad-40ed-89c4-03c6ca776e3f/scratchpad/lq-anim/slides/pptx/assets/logo-small.png">    </p:cNvPr>
+          <p:cNvPr id="7" name="Image 2" descr="/private/tmp/claude-501/-Users-pop7-Library-CloudStorage-OneDrive-MonsterConnectCo--Ltd-Lecture-KOSEN69---software-security/f63a82af-e1ad-40ed-89c4-03c6ca776e3f/scratchpad/lq-easy/slides/pptx/assets/logo-small.png">    </p:cNvPr>
           <p:cNvPicPr>
             <a:picLocks noChangeAspect="1"/>
           </p:cNvPicPr>
@@ -8687,7 +8381,7 @@
       </p:sp>
       <p:pic>
         <p:nvPicPr>
-          <p:cNvPr id="7" name="Image 2" descr="/private/tmp/claude-501/-Users-pop7-Library-CloudStorage-OneDrive-MonsterConnectCo--Ltd-Lecture-KOSEN69---software-security/f63a82af-e1ad-40ed-89c4-03c6ca776e3f/scratchpad/lq-anim/slides/pptx/assets/logo-small.png">    </p:cNvPr>
+          <p:cNvPr id="7" name="Image 2" descr="/private/tmp/claude-501/-Users-pop7-Library-CloudStorage-OneDrive-MonsterConnectCo--Ltd-Lecture-KOSEN69---software-security/f63a82af-e1ad-40ed-89c4-03c6ca776e3f/scratchpad/lq-easy/slides/pptx/assets/logo-small.png">    </p:cNvPr>
           <p:cNvPicPr>
             <a:picLocks noChangeAspect="1"/>
           </p:cNvPicPr>
@@ -8976,11 +8670,11 @@
         <p:spPr>
           <a:xfrm>
             <a:off x="457200" y="2862072"/>
-            <a:ext cx="8229600" cy="1609344"/>
+            <a:ext cx="8229600" cy="1408176"/>
           </a:xfrm>
           <a:prstGeom prst="roundRect">
             <a:avLst>
-              <a:gd name="adj" fmla="val 4545"/>
+              <a:gd name="adj" fmla="val 5195"/>
             </a:avLst>
           </a:prstGeom>
           <a:solidFill>
@@ -9005,7 +8699,7 @@
         <p:spPr>
           <a:xfrm>
             <a:off x="731520" y="2971800"/>
-            <a:ext cx="7680960" cy="1389888"/>
+            <a:ext cx="7680960" cy="1188720"/>
           </a:xfrm>
           <a:prstGeom prst="rect">
             <a:avLst/>
@@ -9035,7 +8729,7 @@
                 <a:ea typeface="Calibri" pitchFamily="34" charset="-122"/>
                 <a:cs typeface="Calibri" pitchFamily="34" charset="-120"/>
               </a:rPr>
-              <a:t>Least-privilege token: contents: read, security-events: write — don't hand the pipeline more than it needs</a:t>
+              <a:t>The token gets only what it needs: contents: read, security-events: write</a:t>
             </a:r>
             <a:endParaRPr lang="en-US" sz="1400" dirty="0"/>
           </a:p>
@@ -9056,7 +8750,7 @@
                 <a:ea typeface="Calibri" pitchFamily="34" charset="-122"/>
                 <a:cs typeface="Calibri" pitchFamily="34" charset="-120"/>
               </a:rPr>
-              <a:t>Upload SARIF → GitHub Security tab</a:t>
+              <a:t>Results (SARIF) go to the GitHub Security tab</a:t>
             </a:r>
             <a:endParaRPr lang="en-US" sz="1400" dirty="0"/>
           </a:p>
@@ -9077,7 +8771,7 @@
                 <a:ea typeface="Calibri" pitchFamily="34" charset="-122"/>
                 <a:cs typeface="Calibri" pitchFamily="34" charset="-120"/>
               </a:rPr>
-              <a:t>A red run only blocks a merge if the jobs are required checks (branch protection) — otherwise it's a warning</a:t>
+              <a:t>A red run blocks a merge only if the jobs are required checks (branch protection)</a:t>
             </a:r>
             <a:endParaRPr lang="en-US" sz="1400" dirty="0"/>
           </a:p>
@@ -9124,7 +8818,7 @@
       </p:sp>
       <p:pic>
         <p:nvPicPr>
-          <p:cNvPr id="10" name="Image 1" descr="/private/tmp/claude-501/-Users-pop7-Library-CloudStorage-OneDrive-MonsterConnectCo--Ltd-Lecture-KOSEN69---software-security/f63a82af-e1ad-40ed-89c4-03c6ca776e3f/scratchpad/lq-anim/slides/pptx/assets/logo-small.png">    </p:cNvPr>
+          <p:cNvPr id="10" name="Image 1" descr="/private/tmp/claude-501/-Users-pop7-Library-CloudStorage-OneDrive-MonsterConnectCo--Ltd-Lecture-KOSEN69---software-security/f63a82af-e1ad-40ed-89c4-03c6ca776e3f/scratchpad/lq-easy/slides/pptx/assets/logo-small.png">    </p:cNvPr>
           <p:cNvPicPr>
             <a:picLocks noChangeAspect="1"/>
           </p:cNvPicPr>
@@ -9350,7 +9044,7 @@
       </p:sp>
       <p:pic>
         <p:nvPicPr>
-          <p:cNvPr id="7" name="Image 1" descr="/private/tmp/claude-501/-Users-pop7-Library-CloudStorage-OneDrive-MonsterConnectCo--Ltd-Lecture-KOSEN69---software-security/f63a82af-e1ad-40ed-89c4-03c6ca776e3f/scratchpad/lq-anim/slides/pptx/assets/logo-small.png">    </p:cNvPr>
+          <p:cNvPr id="7" name="Image 1" descr="/private/tmp/claude-501/-Users-pop7-Library-CloudStorage-OneDrive-MonsterConnectCo--Ltd-Lecture-KOSEN69---software-security/f63a82af-e1ad-40ed-89c4-03c6ca776e3f/scratchpad/lq-easy/slides/pptx/assets/logo-small.png">    </p:cNvPr>
           <p:cNvPicPr>
             <a:picLocks noChangeAspect="1"/>
           </p:cNvPicPr>
@@ -9735,7 +9429,7 @@
       </p:sp>
       <p:pic>
         <p:nvPicPr>
-          <p:cNvPr id="10" name="Image 1" descr="/private/tmp/claude-501/-Users-pop7-Library-CloudStorage-OneDrive-MonsterConnectCo--Ltd-Lecture-KOSEN69---software-security/f63a82af-e1ad-40ed-89c4-03c6ca776e3f/scratchpad/lq-anim/slides/pptx/assets/logo-small.png">    </p:cNvPr>
+          <p:cNvPr id="10" name="Image 1" descr="/private/tmp/claude-501/-Users-pop7-Library-CloudStorage-OneDrive-MonsterConnectCo--Ltd-Lecture-KOSEN69---software-security/f63a82af-e1ad-40ed-89c4-03c6ca776e3f/scratchpad/lq-easy/slides/pptx/assets/logo-small.png">    </p:cNvPr>
           <p:cNvPicPr>
             <a:picLocks noChangeAspect="1"/>
           </p:cNvPicPr>
@@ -10057,7 +9751,7 @@
       </p:sp>
       <p:pic>
         <p:nvPicPr>
-          <p:cNvPr id="8" name="Image 1" descr="/private/tmp/claude-501/-Users-pop7-Library-CloudStorage-OneDrive-MonsterConnectCo--Ltd-Lecture-KOSEN69---software-security/f63a82af-e1ad-40ed-89c4-03c6ca776e3f/scratchpad/lq-anim/slides/pptx/assets/logo-small.png">    </p:cNvPr>
+          <p:cNvPr id="8" name="Image 1" descr="/private/tmp/claude-501/-Users-pop7-Library-CloudStorage-OneDrive-MonsterConnectCo--Ltd-Lecture-KOSEN69---software-security/f63a82af-e1ad-40ed-89c4-03c6ca776e3f/scratchpad/lq-easy/slides/pptx/assets/logo-small.png">    </p:cNvPr>
           <p:cNvPicPr>
             <a:picLocks noChangeAspect="1"/>
           </p:cNvPicPr>
